--- a/testcases/charts-3d.pptx
+++ b/testcases/charts-3d.pptx
@@ -6,6 +6,8 @@
   </p:sldMasterIdLst>
   <p:sldIdLst>
     <p:sldId id="256" r:id="rId2"/>
+    <p:sldId id="257" r:id="rId3"/>
+    <p:sldId id="258" r:id="rId4"/>
   </p:sldIdLst>
   <p:sldSz cx="12192000" cy="6858000"/>
   <p:notesSz cx="6858000" cy="9144000"/>
@@ -332,7 +334,7 @@
           </c:val>
           <c:extLst>
             <c:ext xmlns:c16="http://schemas.microsoft.com/office/drawing/2014/chart" uri="{C3380CC4-5D6E-409C-BE32-E72D297353CC}">
-              <c16:uniqueId val="{00000000-7223-4599-94C8-180DBEB525BC}"/>
+              <c16:uniqueId val="{00000000-1DAA-4BE2-B6D9-CE8581DB8452}"/>
             </c:ext>
           </c:extLst>
         </c:ser>
@@ -547,7 +549,7 @@
           </c:val>
           <c:extLst>
             <c:ext xmlns:c16="http://schemas.microsoft.com/office/drawing/2014/chart" uri="{C3380CC4-5D6E-409C-BE32-E72D297353CC}">
-              <c16:uniqueId val="{00000000-7479-4DC0-B257-CFE4BF49734F}"/>
+              <c16:uniqueId val="{00000000-7D77-454F-AE2B-FF83330101FD}"/>
             </c:ext>
           </c:extLst>
         </c:ser>
@@ -619,7 +621,7 @@
           </c:val>
           <c:extLst>
             <c:ext xmlns:c16="http://schemas.microsoft.com/office/drawing/2014/chart" uri="{C3380CC4-5D6E-409C-BE32-E72D297353CC}">
-              <c16:uniqueId val="{00000001-7479-4DC0-B257-CFE4BF49734F}"/>
+              <c16:uniqueId val="{00000001-7D77-454F-AE2B-FF83330101FD}"/>
             </c:ext>
           </c:extLst>
         </c:ser>
@@ -691,7 +693,7 @@
           </c:val>
           <c:extLst>
             <c:ext xmlns:c16="http://schemas.microsoft.com/office/drawing/2014/chart" uri="{C3380CC4-5D6E-409C-BE32-E72D297353CC}">
-              <c16:uniqueId val="{00000002-7479-4DC0-B257-CFE4BF49734F}"/>
+              <c16:uniqueId val="{00000002-7D77-454F-AE2B-FF83330101FD}"/>
             </c:ext>
           </c:extLst>
         </c:ser>
@@ -705,12 +707,12 @@
         </c:dLbls>
         <c:gapWidth val="150"/>
         <c:shape val="box"/>
-        <c:axId val="86302591"/>
-        <c:axId val="86306911"/>
+        <c:axId val="29546079"/>
+        <c:axId val="29551839"/>
         <c:axId val="0"/>
       </c:bar3DChart>
       <c:catAx>
-        <c:axId val="86302591"/>
+        <c:axId val="29546079"/>
         <c:scaling>
           <c:orientation val="minMax"/>
         </c:scaling>
@@ -747,7 +749,7 @@
             <a:endParaRPr lang="zh-CN"/>
           </a:p>
         </c:txPr>
-        <c:crossAx val="86306911"/>
+        <c:crossAx val="29551839"/>
         <c:crosses val="autoZero"/>
         <c:auto val="1"/>
         <c:lblAlgn val="ctr"/>
@@ -755,7 +757,7 @@
         <c:noMultiLvlLbl val="0"/>
       </c:catAx>
       <c:valAx>
-        <c:axId val="86306911"/>
+        <c:axId val="29551839"/>
         <c:scaling>
           <c:orientation val="minMax"/>
         </c:scaling>
@@ -806,10 +808,1954 @@
             <a:endParaRPr lang="zh-CN"/>
           </a:p>
         </c:txPr>
-        <c:crossAx val="86302591"/>
+        <c:crossAx val="29546079"/>
         <c:crosses val="autoZero"/>
         <c:crossBetween val="between"/>
       </c:valAx>
+      <c:spPr>
+        <a:noFill/>
+        <a:ln>
+          <a:noFill/>
+        </a:ln>
+        <a:effectLst/>
+      </c:spPr>
+    </c:plotArea>
+    <c:legend>
+      <c:legendPos val="b"/>
+      <c:overlay val="0"/>
+      <c:spPr>
+        <a:noFill/>
+        <a:ln>
+          <a:noFill/>
+        </a:ln>
+        <a:effectLst/>
+      </c:spPr>
+      <c:txPr>
+        <a:bodyPr rot="0" spcFirstLastPara="1" vertOverflow="ellipsis" vert="horz" wrap="square" anchor="ctr" anchorCtr="1"/>
+        <a:lstStyle/>
+        <a:p>
+          <a:pPr>
+            <a:defRPr sz="1197" b="0" i="0" u="none" strike="noStrike" kern="1200" baseline="0">
+              <a:solidFill>
+                <a:schemeClr val="tx1">
+                  <a:lumMod val="65000"/>
+                  <a:lumOff val="35000"/>
+                </a:schemeClr>
+              </a:solidFill>
+              <a:latin typeface="+mn-lt"/>
+              <a:ea typeface="+mn-ea"/>
+              <a:cs typeface="+mn-cs"/>
+            </a:defRPr>
+          </a:pPr>
+          <a:endParaRPr lang="zh-CN"/>
+        </a:p>
+      </c:txPr>
+    </c:legend>
+    <c:plotVisOnly val="1"/>
+    <c:dispBlanksAs val="gap"/>
+    <c:extLst>
+      <c:ext xmlns:c16r3="http://schemas.microsoft.com/office/drawing/2017/03/chart" uri="{56B9EC1D-385E-4148-901F-78D8002777C0}">
+        <c16r3:dataDisplayOptions16>
+          <c16r3:dispNaAsBlank val="1"/>
+        </c16r3:dataDisplayOptions16>
+      </c:ext>
+    </c:extLst>
+    <c:showDLblsOverMax val="0"/>
+  </c:chart>
+  <c:spPr>
+    <a:noFill/>
+    <a:ln>
+      <a:noFill/>
+    </a:ln>
+    <a:effectLst/>
+  </c:spPr>
+  <c:txPr>
+    <a:bodyPr/>
+    <a:lstStyle/>
+    <a:p>
+      <a:pPr>
+        <a:defRPr/>
+      </a:pPr>
+      <a:endParaRPr lang="zh-CN"/>
+    </a:p>
+  </c:txPr>
+  <c:externalData r:id="rId3">
+    <c:autoUpdate val="0"/>
+  </c:externalData>
+</c:chartSpace>
+</file>
+
+<file path=ppt/charts/chart3.xml><?xml version="1.0" encoding="utf-8"?>
+<c:chartSpace xmlns:c="http://schemas.openxmlformats.org/drawingml/2006/chart" xmlns:a="http://schemas.openxmlformats.org/drawingml/2006/main" xmlns:r="http://schemas.openxmlformats.org/officeDocument/2006/relationships" xmlns:c16r2="http://schemas.microsoft.com/office/drawing/2015/06/chart">
+  <c:date1904 val="0"/>
+  <c:lang val="zh-CN"/>
+  <c:roundedCorners val="0"/>
+  <mc:AlternateContent xmlns:mc="http://schemas.openxmlformats.org/markup-compatibility/2006">
+    <mc:Choice xmlns:c14="http://schemas.microsoft.com/office/drawing/2007/8/2/chart" Requires="c14">
+      <c14:style val="102"/>
+    </mc:Choice>
+    <mc:Fallback>
+      <c:style val="2"/>
+    </mc:Fallback>
+  </mc:AlternateContent>
+  <c:chart>
+    <c:autoTitleDeleted val="0"/>
+    <c:view3D>
+      <c:rotX val="15"/>
+      <c:rotY val="20"/>
+      <c:depthPercent val="100"/>
+      <c:rAngAx val="1"/>
+    </c:view3D>
+    <c:floor>
+      <c:thickness val="0"/>
+      <c:spPr>
+        <a:noFill/>
+        <a:ln>
+          <a:noFill/>
+        </a:ln>
+        <a:effectLst/>
+        <a:sp3d/>
+      </c:spPr>
+    </c:floor>
+    <c:sideWall>
+      <c:thickness val="0"/>
+      <c:spPr>
+        <a:noFill/>
+        <a:ln>
+          <a:noFill/>
+        </a:ln>
+        <a:effectLst/>
+        <a:sp3d/>
+      </c:spPr>
+    </c:sideWall>
+    <c:backWall>
+      <c:thickness val="0"/>
+      <c:spPr>
+        <a:noFill/>
+        <a:ln>
+          <a:noFill/>
+        </a:ln>
+        <a:effectLst/>
+        <a:sp3d/>
+      </c:spPr>
+    </c:backWall>
+    <c:plotArea>
+      <c:layout/>
+      <c:bar3DChart>
+        <c:barDir val="col"/>
+        <c:grouping val="stacked"/>
+        <c:varyColors val="0"/>
+        <c:ser>
+          <c:idx val="0"/>
+          <c:order val="0"/>
+          <c:tx>
+            <c:strRef>
+              <c:f>Sheet1!$B$1</c:f>
+              <c:strCache>
+                <c:ptCount val="1"/>
+                <c:pt idx="0">
+                  <c:v>系列 1</c:v>
+                </c:pt>
+              </c:strCache>
+            </c:strRef>
+          </c:tx>
+          <c:spPr>
+            <a:solidFill>
+              <a:schemeClr val="accent1"/>
+            </a:solidFill>
+            <a:ln>
+              <a:noFill/>
+            </a:ln>
+            <a:effectLst/>
+            <a:sp3d/>
+          </c:spPr>
+          <c:invertIfNegative val="0"/>
+          <c:cat>
+            <c:strRef>
+              <c:f>Sheet1!$A$2:$A$5</c:f>
+              <c:strCache>
+                <c:ptCount val="4"/>
+                <c:pt idx="0">
+                  <c:v>类别 1</c:v>
+                </c:pt>
+                <c:pt idx="1">
+                  <c:v>类别 2</c:v>
+                </c:pt>
+                <c:pt idx="2">
+                  <c:v>类别 3</c:v>
+                </c:pt>
+                <c:pt idx="3">
+                  <c:v>类别 4</c:v>
+                </c:pt>
+              </c:strCache>
+            </c:strRef>
+          </c:cat>
+          <c:val>
+            <c:numRef>
+              <c:f>Sheet1!$B$2:$B$5</c:f>
+              <c:numCache>
+                <c:formatCode>General</c:formatCode>
+                <c:ptCount val="4"/>
+                <c:pt idx="0">
+                  <c:v>4.3</c:v>
+                </c:pt>
+                <c:pt idx="1">
+                  <c:v>2.5</c:v>
+                </c:pt>
+                <c:pt idx="2">
+                  <c:v>3.5</c:v>
+                </c:pt>
+                <c:pt idx="3">
+                  <c:v>4.5</c:v>
+                </c:pt>
+              </c:numCache>
+            </c:numRef>
+          </c:val>
+          <c:extLst>
+            <c:ext xmlns:c16="http://schemas.microsoft.com/office/drawing/2014/chart" uri="{C3380CC4-5D6E-409C-BE32-E72D297353CC}">
+              <c16:uniqueId val="{00000000-5E3C-4799-8533-EDAD068C9B2C}"/>
+            </c:ext>
+          </c:extLst>
+        </c:ser>
+        <c:ser>
+          <c:idx val="1"/>
+          <c:order val="1"/>
+          <c:tx>
+            <c:strRef>
+              <c:f>Sheet1!$C$1</c:f>
+              <c:strCache>
+                <c:ptCount val="1"/>
+                <c:pt idx="0">
+                  <c:v>系列 2</c:v>
+                </c:pt>
+              </c:strCache>
+            </c:strRef>
+          </c:tx>
+          <c:spPr>
+            <a:solidFill>
+              <a:schemeClr val="accent2"/>
+            </a:solidFill>
+            <a:ln>
+              <a:noFill/>
+            </a:ln>
+            <a:effectLst/>
+            <a:sp3d/>
+          </c:spPr>
+          <c:invertIfNegative val="0"/>
+          <c:cat>
+            <c:strRef>
+              <c:f>Sheet1!$A$2:$A$5</c:f>
+              <c:strCache>
+                <c:ptCount val="4"/>
+                <c:pt idx="0">
+                  <c:v>类别 1</c:v>
+                </c:pt>
+                <c:pt idx="1">
+                  <c:v>类别 2</c:v>
+                </c:pt>
+                <c:pt idx="2">
+                  <c:v>类别 3</c:v>
+                </c:pt>
+                <c:pt idx="3">
+                  <c:v>类别 4</c:v>
+                </c:pt>
+              </c:strCache>
+            </c:strRef>
+          </c:cat>
+          <c:val>
+            <c:numRef>
+              <c:f>Sheet1!$C$2:$C$5</c:f>
+              <c:numCache>
+                <c:formatCode>General</c:formatCode>
+                <c:ptCount val="4"/>
+                <c:pt idx="0">
+                  <c:v>2.4</c:v>
+                </c:pt>
+                <c:pt idx="1">
+                  <c:v>4.4000000000000004</c:v>
+                </c:pt>
+                <c:pt idx="2">
+                  <c:v>1.8</c:v>
+                </c:pt>
+                <c:pt idx="3">
+                  <c:v>2.8</c:v>
+                </c:pt>
+              </c:numCache>
+            </c:numRef>
+          </c:val>
+          <c:extLst>
+            <c:ext xmlns:c16="http://schemas.microsoft.com/office/drawing/2014/chart" uri="{C3380CC4-5D6E-409C-BE32-E72D297353CC}">
+              <c16:uniqueId val="{00000001-5E3C-4799-8533-EDAD068C9B2C}"/>
+            </c:ext>
+          </c:extLst>
+        </c:ser>
+        <c:ser>
+          <c:idx val="2"/>
+          <c:order val="2"/>
+          <c:tx>
+            <c:strRef>
+              <c:f>Sheet1!$D$1</c:f>
+              <c:strCache>
+                <c:ptCount val="1"/>
+                <c:pt idx="0">
+                  <c:v>系列 3</c:v>
+                </c:pt>
+              </c:strCache>
+            </c:strRef>
+          </c:tx>
+          <c:spPr>
+            <a:solidFill>
+              <a:schemeClr val="accent3"/>
+            </a:solidFill>
+            <a:ln>
+              <a:noFill/>
+            </a:ln>
+            <a:effectLst/>
+            <a:sp3d/>
+          </c:spPr>
+          <c:invertIfNegative val="0"/>
+          <c:cat>
+            <c:strRef>
+              <c:f>Sheet1!$A$2:$A$5</c:f>
+              <c:strCache>
+                <c:ptCount val="4"/>
+                <c:pt idx="0">
+                  <c:v>类别 1</c:v>
+                </c:pt>
+                <c:pt idx="1">
+                  <c:v>类别 2</c:v>
+                </c:pt>
+                <c:pt idx="2">
+                  <c:v>类别 3</c:v>
+                </c:pt>
+                <c:pt idx="3">
+                  <c:v>类别 4</c:v>
+                </c:pt>
+              </c:strCache>
+            </c:strRef>
+          </c:cat>
+          <c:val>
+            <c:numRef>
+              <c:f>Sheet1!$D$2:$D$5</c:f>
+              <c:numCache>
+                <c:formatCode>General</c:formatCode>
+                <c:ptCount val="4"/>
+                <c:pt idx="0">
+                  <c:v>2</c:v>
+                </c:pt>
+                <c:pt idx="1">
+                  <c:v>2</c:v>
+                </c:pt>
+                <c:pt idx="2">
+                  <c:v>3</c:v>
+                </c:pt>
+                <c:pt idx="3">
+                  <c:v>5</c:v>
+                </c:pt>
+              </c:numCache>
+            </c:numRef>
+          </c:val>
+          <c:extLst>
+            <c:ext xmlns:c16="http://schemas.microsoft.com/office/drawing/2014/chart" uri="{C3380CC4-5D6E-409C-BE32-E72D297353CC}">
+              <c16:uniqueId val="{00000002-5E3C-4799-8533-EDAD068C9B2C}"/>
+            </c:ext>
+          </c:extLst>
+        </c:ser>
+        <c:dLbls>
+          <c:showLegendKey val="0"/>
+          <c:showVal val="0"/>
+          <c:showCatName val="0"/>
+          <c:showSerName val="0"/>
+          <c:showPercent val="0"/>
+          <c:showBubbleSize val="0"/>
+        </c:dLbls>
+        <c:gapWidth val="150"/>
+        <c:shape val="box"/>
+        <c:axId val="1815569376"/>
+        <c:axId val="1815574176"/>
+        <c:axId val="0"/>
+      </c:bar3DChart>
+      <c:catAx>
+        <c:axId val="1815569376"/>
+        <c:scaling>
+          <c:orientation val="minMax"/>
+        </c:scaling>
+        <c:delete val="0"/>
+        <c:axPos val="b"/>
+        <c:numFmt formatCode="General" sourceLinked="1"/>
+        <c:majorTickMark val="none"/>
+        <c:minorTickMark val="none"/>
+        <c:tickLblPos val="nextTo"/>
+        <c:spPr>
+          <a:noFill/>
+          <a:ln>
+            <a:noFill/>
+          </a:ln>
+          <a:effectLst/>
+        </c:spPr>
+        <c:txPr>
+          <a:bodyPr rot="-60000000" spcFirstLastPara="1" vertOverflow="ellipsis" vert="horz" wrap="square" anchor="ctr" anchorCtr="1"/>
+          <a:lstStyle/>
+          <a:p>
+            <a:pPr>
+              <a:defRPr sz="1197" b="0" i="0" u="none" strike="noStrike" kern="1200" baseline="0">
+                <a:solidFill>
+                  <a:schemeClr val="tx1">
+                    <a:lumMod val="65000"/>
+                    <a:lumOff val="35000"/>
+                  </a:schemeClr>
+                </a:solidFill>
+                <a:latin typeface="+mn-lt"/>
+                <a:ea typeface="+mn-ea"/>
+                <a:cs typeface="+mn-cs"/>
+              </a:defRPr>
+            </a:pPr>
+            <a:endParaRPr lang="zh-CN"/>
+          </a:p>
+        </c:txPr>
+        <c:crossAx val="1815574176"/>
+        <c:crosses val="autoZero"/>
+        <c:auto val="1"/>
+        <c:lblAlgn val="ctr"/>
+        <c:lblOffset val="100"/>
+        <c:noMultiLvlLbl val="0"/>
+      </c:catAx>
+      <c:valAx>
+        <c:axId val="1815574176"/>
+        <c:scaling>
+          <c:orientation val="minMax"/>
+        </c:scaling>
+        <c:delete val="0"/>
+        <c:axPos val="l"/>
+        <c:majorGridlines>
+          <c:spPr>
+            <a:ln w="9525" cap="flat" cmpd="sng" algn="ctr">
+              <a:solidFill>
+                <a:schemeClr val="tx1">
+                  <a:lumMod val="15000"/>
+                  <a:lumOff val="85000"/>
+                </a:schemeClr>
+              </a:solidFill>
+              <a:round/>
+            </a:ln>
+            <a:effectLst/>
+          </c:spPr>
+        </c:majorGridlines>
+        <c:numFmt formatCode="General" sourceLinked="1"/>
+        <c:majorTickMark val="none"/>
+        <c:minorTickMark val="none"/>
+        <c:tickLblPos val="nextTo"/>
+        <c:spPr>
+          <a:noFill/>
+          <a:ln>
+            <a:noFill/>
+          </a:ln>
+          <a:effectLst/>
+        </c:spPr>
+        <c:txPr>
+          <a:bodyPr rot="-60000000" spcFirstLastPara="1" vertOverflow="ellipsis" vert="horz" wrap="square" anchor="ctr" anchorCtr="1"/>
+          <a:lstStyle/>
+          <a:p>
+            <a:pPr>
+              <a:defRPr sz="1197" b="0" i="0" u="none" strike="noStrike" kern="1200" baseline="0">
+                <a:solidFill>
+                  <a:schemeClr val="tx1">
+                    <a:lumMod val="65000"/>
+                    <a:lumOff val="35000"/>
+                  </a:schemeClr>
+                </a:solidFill>
+                <a:latin typeface="+mn-lt"/>
+                <a:ea typeface="+mn-ea"/>
+                <a:cs typeface="+mn-cs"/>
+              </a:defRPr>
+            </a:pPr>
+            <a:endParaRPr lang="zh-CN"/>
+          </a:p>
+        </c:txPr>
+        <c:crossAx val="1815569376"/>
+        <c:crosses val="autoZero"/>
+        <c:crossBetween val="between"/>
+      </c:valAx>
+      <c:spPr>
+        <a:noFill/>
+        <a:ln>
+          <a:noFill/>
+        </a:ln>
+        <a:effectLst/>
+      </c:spPr>
+    </c:plotArea>
+    <c:legend>
+      <c:legendPos val="b"/>
+      <c:overlay val="0"/>
+      <c:spPr>
+        <a:noFill/>
+        <a:ln>
+          <a:noFill/>
+        </a:ln>
+        <a:effectLst/>
+      </c:spPr>
+      <c:txPr>
+        <a:bodyPr rot="0" spcFirstLastPara="1" vertOverflow="ellipsis" vert="horz" wrap="square" anchor="ctr" anchorCtr="1"/>
+        <a:lstStyle/>
+        <a:p>
+          <a:pPr>
+            <a:defRPr sz="1197" b="0" i="0" u="none" strike="noStrike" kern="1200" baseline="0">
+              <a:solidFill>
+                <a:schemeClr val="tx1">
+                  <a:lumMod val="65000"/>
+                  <a:lumOff val="35000"/>
+                </a:schemeClr>
+              </a:solidFill>
+              <a:latin typeface="+mn-lt"/>
+              <a:ea typeface="+mn-ea"/>
+              <a:cs typeface="+mn-cs"/>
+            </a:defRPr>
+          </a:pPr>
+          <a:endParaRPr lang="zh-CN"/>
+        </a:p>
+      </c:txPr>
+    </c:legend>
+    <c:plotVisOnly val="1"/>
+    <c:dispBlanksAs val="gap"/>
+    <c:extLst>
+      <c:ext xmlns:c16r3="http://schemas.microsoft.com/office/drawing/2017/03/chart" uri="{56B9EC1D-385E-4148-901F-78D8002777C0}">
+        <c16r3:dataDisplayOptions16>
+          <c16r3:dispNaAsBlank val="1"/>
+        </c16r3:dataDisplayOptions16>
+      </c:ext>
+    </c:extLst>
+    <c:showDLblsOverMax val="0"/>
+  </c:chart>
+  <c:spPr>
+    <a:noFill/>
+    <a:ln>
+      <a:noFill/>
+    </a:ln>
+    <a:effectLst/>
+  </c:spPr>
+  <c:txPr>
+    <a:bodyPr/>
+    <a:lstStyle/>
+    <a:p>
+      <a:pPr>
+        <a:defRPr/>
+      </a:pPr>
+      <a:endParaRPr lang="zh-CN"/>
+    </a:p>
+  </c:txPr>
+  <c:externalData r:id="rId3">
+    <c:autoUpdate val="0"/>
+  </c:externalData>
+</c:chartSpace>
+</file>
+
+<file path=ppt/charts/chart4.xml><?xml version="1.0" encoding="utf-8"?>
+<c:chartSpace xmlns:c="http://schemas.openxmlformats.org/drawingml/2006/chart" xmlns:a="http://schemas.openxmlformats.org/drawingml/2006/main" xmlns:r="http://schemas.openxmlformats.org/officeDocument/2006/relationships" xmlns:c16r2="http://schemas.microsoft.com/office/drawing/2015/06/chart">
+  <c:date1904 val="0"/>
+  <c:lang val="zh-CN"/>
+  <c:roundedCorners val="0"/>
+  <mc:AlternateContent xmlns:mc="http://schemas.openxmlformats.org/markup-compatibility/2006">
+    <mc:Choice xmlns:c14="http://schemas.microsoft.com/office/drawing/2007/8/2/chart" Requires="c14">
+      <c14:style val="102"/>
+    </mc:Choice>
+    <mc:Fallback>
+      <c:style val="2"/>
+    </mc:Fallback>
+  </mc:AlternateContent>
+  <c:chart>
+    <c:autoTitleDeleted val="0"/>
+    <c:view3D>
+      <c:rotX val="15"/>
+      <c:rotY val="20"/>
+      <c:depthPercent val="100"/>
+      <c:rAngAx val="1"/>
+    </c:view3D>
+    <c:floor>
+      <c:thickness val="0"/>
+      <c:spPr>
+        <a:noFill/>
+        <a:ln>
+          <a:noFill/>
+        </a:ln>
+        <a:effectLst/>
+        <a:sp3d/>
+      </c:spPr>
+    </c:floor>
+    <c:sideWall>
+      <c:thickness val="0"/>
+      <c:spPr>
+        <a:noFill/>
+        <a:ln>
+          <a:noFill/>
+        </a:ln>
+        <a:effectLst/>
+        <a:sp3d/>
+      </c:spPr>
+    </c:sideWall>
+    <c:backWall>
+      <c:thickness val="0"/>
+      <c:spPr>
+        <a:noFill/>
+        <a:ln>
+          <a:noFill/>
+        </a:ln>
+        <a:effectLst/>
+        <a:sp3d/>
+      </c:spPr>
+    </c:backWall>
+    <c:plotArea>
+      <c:layout/>
+      <c:bar3DChart>
+        <c:barDir val="bar"/>
+        <c:grouping val="clustered"/>
+        <c:varyColors val="0"/>
+        <c:ser>
+          <c:idx val="0"/>
+          <c:order val="0"/>
+          <c:tx>
+            <c:strRef>
+              <c:f>Sheet1!$B$1</c:f>
+              <c:strCache>
+                <c:ptCount val="1"/>
+                <c:pt idx="0">
+                  <c:v>系列 1</c:v>
+                </c:pt>
+              </c:strCache>
+            </c:strRef>
+          </c:tx>
+          <c:spPr>
+            <a:solidFill>
+              <a:schemeClr val="accent1"/>
+            </a:solidFill>
+            <a:ln>
+              <a:noFill/>
+            </a:ln>
+            <a:effectLst/>
+            <a:sp3d/>
+          </c:spPr>
+          <c:invertIfNegative val="0"/>
+          <c:cat>
+            <c:strRef>
+              <c:f>Sheet1!$A$2:$A$5</c:f>
+              <c:strCache>
+                <c:ptCount val="4"/>
+                <c:pt idx="0">
+                  <c:v>类别 1</c:v>
+                </c:pt>
+                <c:pt idx="1">
+                  <c:v>类别 2</c:v>
+                </c:pt>
+                <c:pt idx="2">
+                  <c:v>类别 3</c:v>
+                </c:pt>
+                <c:pt idx="3">
+                  <c:v>类别 4</c:v>
+                </c:pt>
+              </c:strCache>
+            </c:strRef>
+          </c:cat>
+          <c:val>
+            <c:numRef>
+              <c:f>Sheet1!$B$2:$B$5</c:f>
+              <c:numCache>
+                <c:formatCode>General</c:formatCode>
+                <c:ptCount val="4"/>
+                <c:pt idx="0">
+                  <c:v>4.3</c:v>
+                </c:pt>
+                <c:pt idx="1">
+                  <c:v>2.5</c:v>
+                </c:pt>
+                <c:pt idx="2">
+                  <c:v>3.5</c:v>
+                </c:pt>
+                <c:pt idx="3">
+                  <c:v>4.5</c:v>
+                </c:pt>
+              </c:numCache>
+            </c:numRef>
+          </c:val>
+          <c:extLst>
+            <c:ext xmlns:c16="http://schemas.microsoft.com/office/drawing/2014/chart" uri="{C3380CC4-5D6E-409C-BE32-E72D297353CC}">
+              <c16:uniqueId val="{00000000-FFF7-47FB-85F0-66051225376E}"/>
+            </c:ext>
+          </c:extLst>
+        </c:ser>
+        <c:ser>
+          <c:idx val="1"/>
+          <c:order val="1"/>
+          <c:tx>
+            <c:strRef>
+              <c:f>Sheet1!$C$1</c:f>
+              <c:strCache>
+                <c:ptCount val="1"/>
+                <c:pt idx="0">
+                  <c:v>系列 2</c:v>
+                </c:pt>
+              </c:strCache>
+            </c:strRef>
+          </c:tx>
+          <c:spPr>
+            <a:solidFill>
+              <a:schemeClr val="accent2"/>
+            </a:solidFill>
+            <a:ln>
+              <a:noFill/>
+            </a:ln>
+            <a:effectLst/>
+            <a:sp3d/>
+          </c:spPr>
+          <c:invertIfNegative val="0"/>
+          <c:cat>
+            <c:strRef>
+              <c:f>Sheet1!$A$2:$A$5</c:f>
+              <c:strCache>
+                <c:ptCount val="4"/>
+                <c:pt idx="0">
+                  <c:v>类别 1</c:v>
+                </c:pt>
+                <c:pt idx="1">
+                  <c:v>类别 2</c:v>
+                </c:pt>
+                <c:pt idx="2">
+                  <c:v>类别 3</c:v>
+                </c:pt>
+                <c:pt idx="3">
+                  <c:v>类别 4</c:v>
+                </c:pt>
+              </c:strCache>
+            </c:strRef>
+          </c:cat>
+          <c:val>
+            <c:numRef>
+              <c:f>Sheet1!$C$2:$C$5</c:f>
+              <c:numCache>
+                <c:formatCode>General</c:formatCode>
+                <c:ptCount val="4"/>
+                <c:pt idx="0">
+                  <c:v>2.4</c:v>
+                </c:pt>
+                <c:pt idx="1">
+                  <c:v>4.4000000000000004</c:v>
+                </c:pt>
+                <c:pt idx="2">
+                  <c:v>1.8</c:v>
+                </c:pt>
+                <c:pt idx="3">
+                  <c:v>2.8</c:v>
+                </c:pt>
+              </c:numCache>
+            </c:numRef>
+          </c:val>
+          <c:extLst>
+            <c:ext xmlns:c16="http://schemas.microsoft.com/office/drawing/2014/chart" uri="{C3380CC4-5D6E-409C-BE32-E72D297353CC}">
+              <c16:uniqueId val="{00000001-FFF7-47FB-85F0-66051225376E}"/>
+            </c:ext>
+          </c:extLst>
+        </c:ser>
+        <c:ser>
+          <c:idx val="2"/>
+          <c:order val="2"/>
+          <c:tx>
+            <c:strRef>
+              <c:f>Sheet1!$D$1</c:f>
+              <c:strCache>
+                <c:ptCount val="1"/>
+                <c:pt idx="0">
+                  <c:v>系列 3</c:v>
+                </c:pt>
+              </c:strCache>
+            </c:strRef>
+          </c:tx>
+          <c:spPr>
+            <a:solidFill>
+              <a:schemeClr val="accent3"/>
+            </a:solidFill>
+            <a:ln>
+              <a:noFill/>
+            </a:ln>
+            <a:effectLst/>
+            <a:sp3d/>
+          </c:spPr>
+          <c:invertIfNegative val="0"/>
+          <c:cat>
+            <c:strRef>
+              <c:f>Sheet1!$A$2:$A$5</c:f>
+              <c:strCache>
+                <c:ptCount val="4"/>
+                <c:pt idx="0">
+                  <c:v>类别 1</c:v>
+                </c:pt>
+                <c:pt idx="1">
+                  <c:v>类别 2</c:v>
+                </c:pt>
+                <c:pt idx="2">
+                  <c:v>类别 3</c:v>
+                </c:pt>
+                <c:pt idx="3">
+                  <c:v>类别 4</c:v>
+                </c:pt>
+              </c:strCache>
+            </c:strRef>
+          </c:cat>
+          <c:val>
+            <c:numRef>
+              <c:f>Sheet1!$D$2:$D$5</c:f>
+              <c:numCache>
+                <c:formatCode>General</c:formatCode>
+                <c:ptCount val="4"/>
+                <c:pt idx="0">
+                  <c:v>2</c:v>
+                </c:pt>
+                <c:pt idx="1">
+                  <c:v>2</c:v>
+                </c:pt>
+                <c:pt idx="2">
+                  <c:v>3</c:v>
+                </c:pt>
+                <c:pt idx="3">
+                  <c:v>5</c:v>
+                </c:pt>
+              </c:numCache>
+            </c:numRef>
+          </c:val>
+          <c:extLst>
+            <c:ext xmlns:c16="http://schemas.microsoft.com/office/drawing/2014/chart" uri="{C3380CC4-5D6E-409C-BE32-E72D297353CC}">
+              <c16:uniqueId val="{00000002-FFF7-47FB-85F0-66051225376E}"/>
+            </c:ext>
+          </c:extLst>
+        </c:ser>
+        <c:dLbls>
+          <c:showLegendKey val="0"/>
+          <c:showVal val="0"/>
+          <c:showCatName val="0"/>
+          <c:showSerName val="0"/>
+          <c:showPercent val="0"/>
+          <c:showBubbleSize val="0"/>
+        </c:dLbls>
+        <c:gapWidth val="150"/>
+        <c:shape val="box"/>
+        <c:axId val="37418735"/>
+        <c:axId val="37421135"/>
+        <c:axId val="0"/>
+      </c:bar3DChart>
+      <c:catAx>
+        <c:axId val="37418735"/>
+        <c:scaling>
+          <c:orientation val="minMax"/>
+        </c:scaling>
+        <c:delete val="0"/>
+        <c:axPos val="l"/>
+        <c:numFmt formatCode="General" sourceLinked="1"/>
+        <c:majorTickMark val="none"/>
+        <c:minorTickMark val="none"/>
+        <c:tickLblPos val="nextTo"/>
+        <c:spPr>
+          <a:noFill/>
+          <a:ln>
+            <a:noFill/>
+          </a:ln>
+          <a:effectLst/>
+        </c:spPr>
+        <c:txPr>
+          <a:bodyPr rot="-60000000" spcFirstLastPara="1" vertOverflow="ellipsis" vert="horz" wrap="square" anchor="ctr" anchorCtr="1"/>
+          <a:lstStyle/>
+          <a:p>
+            <a:pPr>
+              <a:defRPr sz="1197" b="0" i="0" u="none" strike="noStrike" kern="1200" baseline="0">
+                <a:solidFill>
+                  <a:schemeClr val="tx1">
+                    <a:lumMod val="65000"/>
+                    <a:lumOff val="35000"/>
+                  </a:schemeClr>
+                </a:solidFill>
+                <a:latin typeface="+mn-lt"/>
+                <a:ea typeface="+mn-ea"/>
+                <a:cs typeface="+mn-cs"/>
+              </a:defRPr>
+            </a:pPr>
+            <a:endParaRPr lang="zh-CN"/>
+          </a:p>
+        </c:txPr>
+        <c:crossAx val="37421135"/>
+        <c:crosses val="autoZero"/>
+        <c:auto val="1"/>
+        <c:lblAlgn val="ctr"/>
+        <c:lblOffset val="100"/>
+        <c:noMultiLvlLbl val="0"/>
+      </c:catAx>
+      <c:valAx>
+        <c:axId val="37421135"/>
+        <c:scaling>
+          <c:orientation val="minMax"/>
+        </c:scaling>
+        <c:delete val="0"/>
+        <c:axPos val="b"/>
+        <c:majorGridlines>
+          <c:spPr>
+            <a:ln w="9525" cap="flat" cmpd="sng" algn="ctr">
+              <a:solidFill>
+                <a:schemeClr val="tx1">
+                  <a:lumMod val="15000"/>
+                  <a:lumOff val="85000"/>
+                </a:schemeClr>
+              </a:solidFill>
+              <a:round/>
+            </a:ln>
+            <a:effectLst/>
+          </c:spPr>
+        </c:majorGridlines>
+        <c:numFmt formatCode="General" sourceLinked="1"/>
+        <c:majorTickMark val="none"/>
+        <c:minorTickMark val="none"/>
+        <c:tickLblPos val="nextTo"/>
+        <c:spPr>
+          <a:noFill/>
+          <a:ln>
+            <a:noFill/>
+          </a:ln>
+          <a:effectLst/>
+        </c:spPr>
+        <c:txPr>
+          <a:bodyPr rot="-60000000" spcFirstLastPara="1" vertOverflow="ellipsis" vert="horz" wrap="square" anchor="ctr" anchorCtr="1"/>
+          <a:lstStyle/>
+          <a:p>
+            <a:pPr>
+              <a:defRPr sz="1197" b="0" i="0" u="none" strike="noStrike" kern="1200" baseline="0">
+                <a:solidFill>
+                  <a:schemeClr val="tx1">
+                    <a:lumMod val="65000"/>
+                    <a:lumOff val="35000"/>
+                  </a:schemeClr>
+                </a:solidFill>
+                <a:latin typeface="+mn-lt"/>
+                <a:ea typeface="+mn-ea"/>
+                <a:cs typeface="+mn-cs"/>
+              </a:defRPr>
+            </a:pPr>
+            <a:endParaRPr lang="zh-CN"/>
+          </a:p>
+        </c:txPr>
+        <c:crossAx val="37418735"/>
+        <c:crosses val="autoZero"/>
+        <c:crossBetween val="between"/>
+      </c:valAx>
+      <c:spPr>
+        <a:noFill/>
+        <a:ln>
+          <a:noFill/>
+        </a:ln>
+        <a:effectLst/>
+      </c:spPr>
+    </c:plotArea>
+    <c:legend>
+      <c:legendPos val="b"/>
+      <c:overlay val="0"/>
+      <c:spPr>
+        <a:noFill/>
+        <a:ln>
+          <a:noFill/>
+        </a:ln>
+        <a:effectLst/>
+      </c:spPr>
+      <c:txPr>
+        <a:bodyPr rot="0" spcFirstLastPara="1" vertOverflow="ellipsis" vert="horz" wrap="square" anchor="ctr" anchorCtr="1"/>
+        <a:lstStyle/>
+        <a:p>
+          <a:pPr>
+            <a:defRPr sz="1197" b="0" i="0" u="none" strike="noStrike" kern="1200" baseline="0">
+              <a:solidFill>
+                <a:schemeClr val="tx1">
+                  <a:lumMod val="65000"/>
+                  <a:lumOff val="35000"/>
+                </a:schemeClr>
+              </a:solidFill>
+              <a:latin typeface="+mn-lt"/>
+              <a:ea typeface="+mn-ea"/>
+              <a:cs typeface="+mn-cs"/>
+            </a:defRPr>
+          </a:pPr>
+          <a:endParaRPr lang="zh-CN"/>
+        </a:p>
+      </c:txPr>
+    </c:legend>
+    <c:plotVisOnly val="1"/>
+    <c:dispBlanksAs val="gap"/>
+    <c:extLst>
+      <c:ext xmlns:c16r3="http://schemas.microsoft.com/office/drawing/2017/03/chart" uri="{56B9EC1D-385E-4148-901F-78D8002777C0}">
+        <c16r3:dataDisplayOptions16>
+          <c16r3:dispNaAsBlank val="1"/>
+        </c16r3:dataDisplayOptions16>
+      </c:ext>
+    </c:extLst>
+    <c:showDLblsOverMax val="0"/>
+  </c:chart>
+  <c:spPr>
+    <a:noFill/>
+    <a:ln>
+      <a:noFill/>
+    </a:ln>
+    <a:effectLst/>
+  </c:spPr>
+  <c:txPr>
+    <a:bodyPr/>
+    <a:lstStyle/>
+    <a:p>
+      <a:pPr>
+        <a:defRPr/>
+      </a:pPr>
+      <a:endParaRPr lang="zh-CN"/>
+    </a:p>
+  </c:txPr>
+  <c:externalData r:id="rId3">
+    <c:autoUpdate val="0"/>
+  </c:externalData>
+</c:chartSpace>
+</file>
+
+<file path=ppt/charts/chart5.xml><?xml version="1.0" encoding="utf-8"?>
+<c:chartSpace xmlns:c="http://schemas.openxmlformats.org/drawingml/2006/chart" xmlns:a="http://schemas.openxmlformats.org/drawingml/2006/main" xmlns:r="http://schemas.openxmlformats.org/officeDocument/2006/relationships" xmlns:c16r2="http://schemas.microsoft.com/office/drawing/2015/06/chart">
+  <c:date1904 val="0"/>
+  <c:lang val="zh-CN"/>
+  <c:roundedCorners val="0"/>
+  <mc:AlternateContent xmlns:mc="http://schemas.openxmlformats.org/markup-compatibility/2006">
+    <mc:Choice xmlns:c14="http://schemas.microsoft.com/office/drawing/2007/8/2/chart" Requires="c14">
+      <c14:style val="102"/>
+    </mc:Choice>
+    <mc:Fallback>
+      <c:style val="2"/>
+    </mc:Fallback>
+  </mc:AlternateContent>
+  <c:chart>
+    <c:autoTitleDeleted val="0"/>
+    <c:view3D>
+      <c:rotX val="15"/>
+      <c:rotY val="20"/>
+      <c:depthPercent val="100"/>
+      <c:rAngAx val="1"/>
+    </c:view3D>
+    <c:floor>
+      <c:thickness val="0"/>
+      <c:spPr>
+        <a:noFill/>
+        <a:ln>
+          <a:noFill/>
+        </a:ln>
+        <a:effectLst/>
+        <a:sp3d/>
+      </c:spPr>
+    </c:floor>
+    <c:sideWall>
+      <c:thickness val="0"/>
+      <c:spPr>
+        <a:noFill/>
+        <a:ln>
+          <a:noFill/>
+        </a:ln>
+        <a:effectLst/>
+        <a:sp3d/>
+      </c:spPr>
+    </c:sideWall>
+    <c:backWall>
+      <c:thickness val="0"/>
+      <c:spPr>
+        <a:noFill/>
+        <a:ln>
+          <a:noFill/>
+        </a:ln>
+        <a:effectLst/>
+        <a:sp3d/>
+      </c:spPr>
+    </c:backWall>
+    <c:plotArea>
+      <c:layout/>
+      <c:bar3DChart>
+        <c:barDir val="col"/>
+        <c:grouping val="standard"/>
+        <c:varyColors val="0"/>
+        <c:ser>
+          <c:idx val="0"/>
+          <c:order val="0"/>
+          <c:tx>
+            <c:strRef>
+              <c:f>Sheet1!$B$1</c:f>
+              <c:strCache>
+                <c:ptCount val="1"/>
+                <c:pt idx="0">
+                  <c:v>系列 1</c:v>
+                </c:pt>
+              </c:strCache>
+            </c:strRef>
+          </c:tx>
+          <c:spPr>
+            <a:solidFill>
+              <a:schemeClr val="accent1"/>
+            </a:solidFill>
+            <a:ln>
+              <a:noFill/>
+            </a:ln>
+            <a:effectLst/>
+            <a:sp3d/>
+          </c:spPr>
+          <c:invertIfNegative val="0"/>
+          <c:cat>
+            <c:strRef>
+              <c:f>Sheet1!$A$2:$A$5</c:f>
+              <c:strCache>
+                <c:ptCount val="4"/>
+                <c:pt idx="0">
+                  <c:v>类别 1</c:v>
+                </c:pt>
+                <c:pt idx="1">
+                  <c:v>类别 2</c:v>
+                </c:pt>
+                <c:pt idx="2">
+                  <c:v>类别 3</c:v>
+                </c:pt>
+                <c:pt idx="3">
+                  <c:v>类别 4</c:v>
+                </c:pt>
+              </c:strCache>
+            </c:strRef>
+          </c:cat>
+          <c:val>
+            <c:numRef>
+              <c:f>Sheet1!$B$2:$B$5</c:f>
+              <c:numCache>
+                <c:formatCode>General</c:formatCode>
+                <c:ptCount val="4"/>
+                <c:pt idx="0">
+                  <c:v>4.3</c:v>
+                </c:pt>
+                <c:pt idx="1">
+                  <c:v>2.5</c:v>
+                </c:pt>
+                <c:pt idx="2">
+                  <c:v>3.5</c:v>
+                </c:pt>
+                <c:pt idx="3">
+                  <c:v>4.5</c:v>
+                </c:pt>
+              </c:numCache>
+            </c:numRef>
+          </c:val>
+          <c:extLst>
+            <c:ext xmlns:c16="http://schemas.microsoft.com/office/drawing/2014/chart" uri="{C3380CC4-5D6E-409C-BE32-E72D297353CC}">
+              <c16:uniqueId val="{00000000-DB84-4578-AB6D-424CE0E9E35C}"/>
+            </c:ext>
+          </c:extLst>
+        </c:ser>
+        <c:ser>
+          <c:idx val="1"/>
+          <c:order val="1"/>
+          <c:tx>
+            <c:strRef>
+              <c:f>Sheet1!$C$1</c:f>
+              <c:strCache>
+                <c:ptCount val="1"/>
+                <c:pt idx="0">
+                  <c:v>系列 2</c:v>
+                </c:pt>
+              </c:strCache>
+            </c:strRef>
+          </c:tx>
+          <c:spPr>
+            <a:solidFill>
+              <a:schemeClr val="accent2"/>
+            </a:solidFill>
+            <a:ln>
+              <a:noFill/>
+            </a:ln>
+            <a:effectLst/>
+            <a:sp3d/>
+          </c:spPr>
+          <c:invertIfNegative val="0"/>
+          <c:cat>
+            <c:strRef>
+              <c:f>Sheet1!$A$2:$A$5</c:f>
+              <c:strCache>
+                <c:ptCount val="4"/>
+                <c:pt idx="0">
+                  <c:v>类别 1</c:v>
+                </c:pt>
+                <c:pt idx="1">
+                  <c:v>类别 2</c:v>
+                </c:pt>
+                <c:pt idx="2">
+                  <c:v>类别 3</c:v>
+                </c:pt>
+                <c:pt idx="3">
+                  <c:v>类别 4</c:v>
+                </c:pt>
+              </c:strCache>
+            </c:strRef>
+          </c:cat>
+          <c:val>
+            <c:numRef>
+              <c:f>Sheet1!$C$2:$C$5</c:f>
+              <c:numCache>
+                <c:formatCode>General</c:formatCode>
+                <c:ptCount val="4"/>
+                <c:pt idx="0">
+                  <c:v>2.4</c:v>
+                </c:pt>
+                <c:pt idx="1">
+                  <c:v>4.4000000000000004</c:v>
+                </c:pt>
+                <c:pt idx="2">
+                  <c:v>1.8</c:v>
+                </c:pt>
+                <c:pt idx="3">
+                  <c:v>2.8</c:v>
+                </c:pt>
+              </c:numCache>
+            </c:numRef>
+          </c:val>
+          <c:extLst>
+            <c:ext xmlns:c16="http://schemas.microsoft.com/office/drawing/2014/chart" uri="{C3380CC4-5D6E-409C-BE32-E72D297353CC}">
+              <c16:uniqueId val="{00000001-DB84-4578-AB6D-424CE0E9E35C}"/>
+            </c:ext>
+          </c:extLst>
+        </c:ser>
+        <c:ser>
+          <c:idx val="2"/>
+          <c:order val="2"/>
+          <c:tx>
+            <c:strRef>
+              <c:f>Sheet1!$D$1</c:f>
+              <c:strCache>
+                <c:ptCount val="1"/>
+                <c:pt idx="0">
+                  <c:v>系列 3</c:v>
+                </c:pt>
+              </c:strCache>
+            </c:strRef>
+          </c:tx>
+          <c:spPr>
+            <a:solidFill>
+              <a:schemeClr val="accent3"/>
+            </a:solidFill>
+            <a:ln>
+              <a:noFill/>
+            </a:ln>
+            <a:effectLst/>
+            <a:sp3d/>
+          </c:spPr>
+          <c:invertIfNegative val="0"/>
+          <c:cat>
+            <c:strRef>
+              <c:f>Sheet1!$A$2:$A$5</c:f>
+              <c:strCache>
+                <c:ptCount val="4"/>
+                <c:pt idx="0">
+                  <c:v>类别 1</c:v>
+                </c:pt>
+                <c:pt idx="1">
+                  <c:v>类别 2</c:v>
+                </c:pt>
+                <c:pt idx="2">
+                  <c:v>类别 3</c:v>
+                </c:pt>
+                <c:pt idx="3">
+                  <c:v>类别 4</c:v>
+                </c:pt>
+              </c:strCache>
+            </c:strRef>
+          </c:cat>
+          <c:val>
+            <c:numRef>
+              <c:f>Sheet1!$D$2:$D$5</c:f>
+              <c:numCache>
+                <c:formatCode>General</c:formatCode>
+                <c:ptCount val="4"/>
+                <c:pt idx="0">
+                  <c:v>2</c:v>
+                </c:pt>
+                <c:pt idx="1">
+                  <c:v>2</c:v>
+                </c:pt>
+                <c:pt idx="2">
+                  <c:v>3</c:v>
+                </c:pt>
+                <c:pt idx="3">
+                  <c:v>5</c:v>
+                </c:pt>
+              </c:numCache>
+            </c:numRef>
+          </c:val>
+          <c:extLst>
+            <c:ext xmlns:c16="http://schemas.microsoft.com/office/drawing/2014/chart" uri="{C3380CC4-5D6E-409C-BE32-E72D297353CC}">
+              <c16:uniqueId val="{00000002-DB84-4578-AB6D-424CE0E9E35C}"/>
+            </c:ext>
+          </c:extLst>
+        </c:ser>
+        <c:dLbls>
+          <c:showLegendKey val="0"/>
+          <c:showVal val="0"/>
+          <c:showCatName val="0"/>
+          <c:showSerName val="0"/>
+          <c:showPercent val="0"/>
+          <c:showBubbleSize val="0"/>
+        </c:dLbls>
+        <c:gapWidth val="150"/>
+        <c:shape val="box"/>
+        <c:axId val="37427375"/>
+        <c:axId val="37424495"/>
+        <c:axId val="1490209120"/>
+      </c:bar3DChart>
+      <c:catAx>
+        <c:axId val="37427375"/>
+        <c:scaling>
+          <c:orientation val="minMax"/>
+        </c:scaling>
+        <c:delete val="0"/>
+        <c:axPos val="b"/>
+        <c:numFmt formatCode="General" sourceLinked="1"/>
+        <c:majorTickMark val="none"/>
+        <c:minorTickMark val="none"/>
+        <c:tickLblPos val="nextTo"/>
+        <c:spPr>
+          <a:noFill/>
+          <a:ln>
+            <a:noFill/>
+          </a:ln>
+          <a:effectLst/>
+        </c:spPr>
+        <c:txPr>
+          <a:bodyPr rot="-60000000" spcFirstLastPara="1" vertOverflow="ellipsis" vert="horz" wrap="square" anchor="ctr" anchorCtr="1"/>
+          <a:lstStyle/>
+          <a:p>
+            <a:pPr>
+              <a:defRPr sz="1197" b="0" i="0" u="none" strike="noStrike" kern="1200" baseline="0">
+                <a:solidFill>
+                  <a:schemeClr val="tx1">
+                    <a:lumMod val="65000"/>
+                    <a:lumOff val="35000"/>
+                  </a:schemeClr>
+                </a:solidFill>
+                <a:latin typeface="+mn-lt"/>
+                <a:ea typeface="+mn-ea"/>
+                <a:cs typeface="+mn-cs"/>
+              </a:defRPr>
+            </a:pPr>
+            <a:endParaRPr lang="zh-CN"/>
+          </a:p>
+        </c:txPr>
+        <c:crossAx val="37424495"/>
+        <c:crosses val="autoZero"/>
+        <c:auto val="1"/>
+        <c:lblAlgn val="ctr"/>
+        <c:lblOffset val="100"/>
+        <c:noMultiLvlLbl val="0"/>
+      </c:catAx>
+      <c:valAx>
+        <c:axId val="37424495"/>
+        <c:scaling>
+          <c:orientation val="minMax"/>
+        </c:scaling>
+        <c:delete val="0"/>
+        <c:axPos val="l"/>
+        <c:majorGridlines>
+          <c:spPr>
+            <a:ln w="9525" cap="flat" cmpd="sng" algn="ctr">
+              <a:solidFill>
+                <a:schemeClr val="tx1">
+                  <a:lumMod val="15000"/>
+                  <a:lumOff val="85000"/>
+                </a:schemeClr>
+              </a:solidFill>
+              <a:round/>
+            </a:ln>
+            <a:effectLst/>
+          </c:spPr>
+        </c:majorGridlines>
+        <c:numFmt formatCode="General" sourceLinked="1"/>
+        <c:majorTickMark val="none"/>
+        <c:minorTickMark val="none"/>
+        <c:tickLblPos val="nextTo"/>
+        <c:spPr>
+          <a:noFill/>
+          <a:ln>
+            <a:noFill/>
+          </a:ln>
+          <a:effectLst/>
+        </c:spPr>
+        <c:txPr>
+          <a:bodyPr rot="-60000000" spcFirstLastPara="1" vertOverflow="ellipsis" vert="horz" wrap="square" anchor="ctr" anchorCtr="1"/>
+          <a:lstStyle/>
+          <a:p>
+            <a:pPr>
+              <a:defRPr sz="1197" b="0" i="0" u="none" strike="noStrike" kern="1200" baseline="0">
+                <a:solidFill>
+                  <a:schemeClr val="tx1">
+                    <a:lumMod val="65000"/>
+                    <a:lumOff val="35000"/>
+                  </a:schemeClr>
+                </a:solidFill>
+                <a:latin typeface="+mn-lt"/>
+                <a:ea typeface="+mn-ea"/>
+                <a:cs typeface="+mn-cs"/>
+              </a:defRPr>
+            </a:pPr>
+            <a:endParaRPr lang="zh-CN"/>
+          </a:p>
+        </c:txPr>
+        <c:crossAx val="37427375"/>
+        <c:crosses val="autoZero"/>
+        <c:crossBetween val="between"/>
+      </c:valAx>
+      <c:serAx>
+        <c:axId val="1490209120"/>
+        <c:scaling>
+          <c:orientation val="minMax"/>
+        </c:scaling>
+        <c:delete val="0"/>
+        <c:axPos val="b"/>
+        <c:majorTickMark val="none"/>
+        <c:minorTickMark val="none"/>
+        <c:tickLblPos val="nextTo"/>
+        <c:spPr>
+          <a:noFill/>
+          <a:ln>
+            <a:noFill/>
+          </a:ln>
+          <a:effectLst/>
+        </c:spPr>
+        <c:txPr>
+          <a:bodyPr rot="-60000000" spcFirstLastPara="1" vertOverflow="ellipsis" vert="horz" wrap="square" anchor="ctr" anchorCtr="1"/>
+          <a:lstStyle/>
+          <a:p>
+            <a:pPr>
+              <a:defRPr sz="1197" b="0" i="0" u="none" strike="noStrike" kern="1200" baseline="0">
+                <a:solidFill>
+                  <a:schemeClr val="tx1">
+                    <a:lumMod val="65000"/>
+                    <a:lumOff val="35000"/>
+                  </a:schemeClr>
+                </a:solidFill>
+                <a:latin typeface="+mn-lt"/>
+                <a:ea typeface="+mn-ea"/>
+                <a:cs typeface="+mn-cs"/>
+              </a:defRPr>
+            </a:pPr>
+            <a:endParaRPr lang="zh-CN"/>
+          </a:p>
+        </c:txPr>
+        <c:crossAx val="37424495"/>
+        <c:crosses val="autoZero"/>
+      </c:serAx>
+      <c:spPr>
+        <a:noFill/>
+        <a:ln>
+          <a:noFill/>
+        </a:ln>
+        <a:effectLst/>
+      </c:spPr>
+    </c:plotArea>
+    <c:legend>
+      <c:legendPos val="b"/>
+      <c:overlay val="0"/>
+      <c:spPr>
+        <a:noFill/>
+        <a:ln>
+          <a:noFill/>
+        </a:ln>
+        <a:effectLst/>
+      </c:spPr>
+      <c:txPr>
+        <a:bodyPr rot="0" spcFirstLastPara="1" vertOverflow="ellipsis" vert="horz" wrap="square" anchor="ctr" anchorCtr="1"/>
+        <a:lstStyle/>
+        <a:p>
+          <a:pPr>
+            <a:defRPr sz="1197" b="0" i="0" u="none" strike="noStrike" kern="1200" baseline="0">
+              <a:solidFill>
+                <a:schemeClr val="tx1">
+                  <a:lumMod val="65000"/>
+                  <a:lumOff val="35000"/>
+                </a:schemeClr>
+              </a:solidFill>
+              <a:latin typeface="+mn-lt"/>
+              <a:ea typeface="+mn-ea"/>
+              <a:cs typeface="+mn-cs"/>
+            </a:defRPr>
+          </a:pPr>
+          <a:endParaRPr lang="zh-CN"/>
+        </a:p>
+      </c:txPr>
+    </c:legend>
+    <c:plotVisOnly val="1"/>
+    <c:dispBlanksAs val="gap"/>
+    <c:extLst>
+      <c:ext xmlns:c16r3="http://schemas.microsoft.com/office/drawing/2017/03/chart" uri="{56B9EC1D-385E-4148-901F-78D8002777C0}">
+        <c16r3:dataDisplayOptions16>
+          <c16r3:dispNaAsBlank val="1"/>
+        </c16r3:dataDisplayOptions16>
+      </c:ext>
+    </c:extLst>
+    <c:showDLblsOverMax val="0"/>
+  </c:chart>
+  <c:spPr>
+    <a:noFill/>
+    <a:ln>
+      <a:noFill/>
+    </a:ln>
+    <a:effectLst/>
+  </c:spPr>
+  <c:txPr>
+    <a:bodyPr/>
+    <a:lstStyle/>
+    <a:p>
+      <a:pPr>
+        <a:defRPr/>
+      </a:pPr>
+      <a:endParaRPr lang="zh-CN"/>
+    </a:p>
+  </c:txPr>
+  <c:externalData r:id="rId3">
+    <c:autoUpdate val="0"/>
+  </c:externalData>
+</c:chartSpace>
+</file>
+
+<file path=ppt/charts/chart6.xml><?xml version="1.0" encoding="utf-8"?>
+<c:chartSpace xmlns:c="http://schemas.openxmlformats.org/drawingml/2006/chart" xmlns:a="http://schemas.openxmlformats.org/drawingml/2006/main" xmlns:r="http://schemas.openxmlformats.org/officeDocument/2006/relationships" xmlns:c16r2="http://schemas.microsoft.com/office/drawing/2015/06/chart">
+  <c:date1904 val="0"/>
+  <c:lang val="zh-CN"/>
+  <c:roundedCorners val="0"/>
+  <mc:AlternateContent xmlns:mc="http://schemas.openxmlformats.org/markup-compatibility/2006">
+    <mc:Choice xmlns:c14="http://schemas.microsoft.com/office/drawing/2007/8/2/chart" Requires="c14">
+      <c14:style val="102"/>
+    </mc:Choice>
+    <mc:Fallback>
+      <c:style val="2"/>
+    </mc:Fallback>
+  </mc:AlternateContent>
+  <c:chart>
+    <c:autoTitleDeleted val="0"/>
+    <c:view3D>
+      <c:rotX val="15"/>
+      <c:rotY val="20"/>
+      <c:rAngAx val="0"/>
+    </c:view3D>
+    <c:floor>
+      <c:thickness val="0"/>
+      <c:spPr>
+        <a:noFill/>
+        <a:ln>
+          <a:noFill/>
+        </a:ln>
+        <a:effectLst/>
+        <a:sp3d/>
+      </c:spPr>
+    </c:floor>
+    <c:sideWall>
+      <c:thickness val="0"/>
+      <c:spPr>
+        <a:noFill/>
+        <a:ln>
+          <a:noFill/>
+        </a:ln>
+        <a:effectLst/>
+        <a:sp3d/>
+      </c:spPr>
+    </c:sideWall>
+    <c:backWall>
+      <c:thickness val="0"/>
+      <c:spPr>
+        <a:noFill/>
+        <a:ln>
+          <a:noFill/>
+        </a:ln>
+        <a:effectLst/>
+        <a:sp3d/>
+      </c:spPr>
+    </c:backWall>
+    <c:plotArea>
+      <c:layout/>
+      <c:line3DChart>
+        <c:grouping val="standard"/>
+        <c:varyColors val="0"/>
+        <c:ser>
+          <c:idx val="0"/>
+          <c:order val="0"/>
+          <c:tx>
+            <c:strRef>
+              <c:f>Sheet1!$B$1</c:f>
+              <c:strCache>
+                <c:ptCount val="1"/>
+                <c:pt idx="0">
+                  <c:v>系列 1</c:v>
+                </c:pt>
+              </c:strCache>
+            </c:strRef>
+          </c:tx>
+          <c:spPr>
+            <a:solidFill>
+              <a:schemeClr val="accent1"/>
+            </a:solidFill>
+            <a:ln>
+              <a:noFill/>
+            </a:ln>
+            <a:effectLst/>
+            <a:sp3d/>
+          </c:spPr>
+          <c:cat>
+            <c:strRef>
+              <c:f>Sheet1!$A$2:$A$5</c:f>
+              <c:strCache>
+                <c:ptCount val="4"/>
+                <c:pt idx="0">
+                  <c:v>类别 1</c:v>
+                </c:pt>
+                <c:pt idx="1">
+                  <c:v>类别 2</c:v>
+                </c:pt>
+                <c:pt idx="2">
+                  <c:v>类别 3</c:v>
+                </c:pt>
+                <c:pt idx="3">
+                  <c:v>类别 4</c:v>
+                </c:pt>
+              </c:strCache>
+            </c:strRef>
+          </c:cat>
+          <c:val>
+            <c:numRef>
+              <c:f>Sheet1!$B$2:$B$5</c:f>
+              <c:numCache>
+                <c:formatCode>General</c:formatCode>
+                <c:ptCount val="4"/>
+                <c:pt idx="0">
+                  <c:v>4.3</c:v>
+                </c:pt>
+                <c:pt idx="1">
+                  <c:v>2.5</c:v>
+                </c:pt>
+                <c:pt idx="2">
+                  <c:v>3.5</c:v>
+                </c:pt>
+                <c:pt idx="3">
+                  <c:v>4.5</c:v>
+                </c:pt>
+              </c:numCache>
+            </c:numRef>
+          </c:val>
+          <c:smooth val="0"/>
+          <c:extLst>
+            <c:ext xmlns:c16="http://schemas.microsoft.com/office/drawing/2014/chart" uri="{C3380CC4-5D6E-409C-BE32-E72D297353CC}">
+              <c16:uniqueId val="{00000000-C0E0-4D18-929A-1C4F807A6648}"/>
+            </c:ext>
+          </c:extLst>
+        </c:ser>
+        <c:ser>
+          <c:idx val="1"/>
+          <c:order val="1"/>
+          <c:tx>
+            <c:strRef>
+              <c:f>Sheet1!$C$1</c:f>
+              <c:strCache>
+                <c:ptCount val="1"/>
+                <c:pt idx="0">
+                  <c:v>系列 2</c:v>
+                </c:pt>
+              </c:strCache>
+            </c:strRef>
+          </c:tx>
+          <c:spPr>
+            <a:solidFill>
+              <a:schemeClr val="accent2"/>
+            </a:solidFill>
+            <a:ln>
+              <a:noFill/>
+            </a:ln>
+            <a:effectLst/>
+            <a:sp3d/>
+          </c:spPr>
+          <c:cat>
+            <c:strRef>
+              <c:f>Sheet1!$A$2:$A$5</c:f>
+              <c:strCache>
+                <c:ptCount val="4"/>
+                <c:pt idx="0">
+                  <c:v>类别 1</c:v>
+                </c:pt>
+                <c:pt idx="1">
+                  <c:v>类别 2</c:v>
+                </c:pt>
+                <c:pt idx="2">
+                  <c:v>类别 3</c:v>
+                </c:pt>
+                <c:pt idx="3">
+                  <c:v>类别 4</c:v>
+                </c:pt>
+              </c:strCache>
+            </c:strRef>
+          </c:cat>
+          <c:val>
+            <c:numRef>
+              <c:f>Sheet1!$C$2:$C$5</c:f>
+              <c:numCache>
+                <c:formatCode>General</c:formatCode>
+                <c:ptCount val="4"/>
+                <c:pt idx="0">
+                  <c:v>2.4</c:v>
+                </c:pt>
+                <c:pt idx="1">
+                  <c:v>4.4000000000000004</c:v>
+                </c:pt>
+                <c:pt idx="2">
+                  <c:v>1.8</c:v>
+                </c:pt>
+                <c:pt idx="3">
+                  <c:v>2.8</c:v>
+                </c:pt>
+              </c:numCache>
+            </c:numRef>
+          </c:val>
+          <c:smooth val="0"/>
+          <c:extLst>
+            <c:ext xmlns:c16="http://schemas.microsoft.com/office/drawing/2014/chart" uri="{C3380CC4-5D6E-409C-BE32-E72D297353CC}">
+              <c16:uniqueId val="{00000001-C0E0-4D18-929A-1C4F807A6648}"/>
+            </c:ext>
+          </c:extLst>
+        </c:ser>
+        <c:ser>
+          <c:idx val="2"/>
+          <c:order val="2"/>
+          <c:tx>
+            <c:strRef>
+              <c:f>Sheet1!$D$1</c:f>
+              <c:strCache>
+                <c:ptCount val="1"/>
+                <c:pt idx="0">
+                  <c:v>系列 3</c:v>
+                </c:pt>
+              </c:strCache>
+            </c:strRef>
+          </c:tx>
+          <c:spPr>
+            <a:solidFill>
+              <a:schemeClr val="accent3"/>
+            </a:solidFill>
+            <a:ln>
+              <a:noFill/>
+            </a:ln>
+            <a:effectLst/>
+            <a:sp3d/>
+          </c:spPr>
+          <c:cat>
+            <c:strRef>
+              <c:f>Sheet1!$A$2:$A$5</c:f>
+              <c:strCache>
+                <c:ptCount val="4"/>
+                <c:pt idx="0">
+                  <c:v>类别 1</c:v>
+                </c:pt>
+                <c:pt idx="1">
+                  <c:v>类别 2</c:v>
+                </c:pt>
+                <c:pt idx="2">
+                  <c:v>类别 3</c:v>
+                </c:pt>
+                <c:pt idx="3">
+                  <c:v>类别 4</c:v>
+                </c:pt>
+              </c:strCache>
+            </c:strRef>
+          </c:cat>
+          <c:val>
+            <c:numRef>
+              <c:f>Sheet1!$D$2:$D$5</c:f>
+              <c:numCache>
+                <c:formatCode>General</c:formatCode>
+                <c:ptCount val="4"/>
+                <c:pt idx="0">
+                  <c:v>2</c:v>
+                </c:pt>
+                <c:pt idx="1">
+                  <c:v>2</c:v>
+                </c:pt>
+                <c:pt idx="2">
+                  <c:v>3</c:v>
+                </c:pt>
+                <c:pt idx="3">
+                  <c:v>5</c:v>
+                </c:pt>
+              </c:numCache>
+            </c:numRef>
+          </c:val>
+          <c:smooth val="0"/>
+          <c:extLst>
+            <c:ext xmlns:c16="http://schemas.microsoft.com/office/drawing/2014/chart" uri="{C3380CC4-5D6E-409C-BE32-E72D297353CC}">
+              <c16:uniqueId val="{00000002-C0E0-4D18-929A-1C4F807A6648}"/>
+            </c:ext>
+          </c:extLst>
+        </c:ser>
+        <c:dLbls>
+          <c:showLegendKey val="0"/>
+          <c:showVal val="0"/>
+          <c:showCatName val="0"/>
+          <c:showSerName val="0"/>
+          <c:showPercent val="0"/>
+          <c:showBubbleSize val="0"/>
+        </c:dLbls>
+        <c:axId val="37418255"/>
+        <c:axId val="37423535"/>
+        <c:axId val="1490216400"/>
+      </c:line3DChart>
+      <c:catAx>
+        <c:axId val="37418255"/>
+        <c:scaling>
+          <c:orientation val="minMax"/>
+        </c:scaling>
+        <c:delete val="0"/>
+        <c:axPos val="b"/>
+        <c:numFmt formatCode="General" sourceLinked="1"/>
+        <c:majorTickMark val="out"/>
+        <c:minorTickMark val="none"/>
+        <c:tickLblPos val="nextTo"/>
+        <c:spPr>
+          <a:noFill/>
+          <a:ln w="9525" cap="flat" cmpd="sng" algn="ctr">
+            <a:solidFill>
+              <a:schemeClr val="tx1">
+                <a:lumMod val="15000"/>
+                <a:lumOff val="85000"/>
+              </a:schemeClr>
+            </a:solidFill>
+            <a:round/>
+          </a:ln>
+          <a:effectLst/>
+        </c:spPr>
+        <c:txPr>
+          <a:bodyPr rot="-60000000" spcFirstLastPara="1" vertOverflow="ellipsis" vert="horz" wrap="square" anchor="ctr" anchorCtr="1"/>
+          <a:lstStyle/>
+          <a:p>
+            <a:pPr>
+              <a:defRPr sz="1197" b="0" i="0" u="none" strike="noStrike" kern="1200" baseline="0">
+                <a:solidFill>
+                  <a:schemeClr val="tx1">
+                    <a:lumMod val="65000"/>
+                    <a:lumOff val="35000"/>
+                  </a:schemeClr>
+                </a:solidFill>
+                <a:latin typeface="+mn-lt"/>
+                <a:ea typeface="+mn-ea"/>
+                <a:cs typeface="+mn-cs"/>
+              </a:defRPr>
+            </a:pPr>
+            <a:endParaRPr lang="zh-CN"/>
+          </a:p>
+        </c:txPr>
+        <c:crossAx val="37423535"/>
+        <c:crosses val="autoZero"/>
+        <c:auto val="1"/>
+        <c:lblAlgn val="ctr"/>
+        <c:lblOffset val="100"/>
+        <c:noMultiLvlLbl val="0"/>
+      </c:catAx>
+      <c:valAx>
+        <c:axId val="37423535"/>
+        <c:scaling>
+          <c:orientation val="minMax"/>
+        </c:scaling>
+        <c:delete val="0"/>
+        <c:axPos val="l"/>
+        <c:majorGridlines>
+          <c:spPr>
+            <a:ln w="9525" cap="flat" cmpd="sng" algn="ctr">
+              <a:solidFill>
+                <a:schemeClr val="tx1">
+                  <a:lumMod val="15000"/>
+                  <a:lumOff val="85000"/>
+                </a:schemeClr>
+              </a:solidFill>
+              <a:round/>
+            </a:ln>
+            <a:effectLst/>
+          </c:spPr>
+        </c:majorGridlines>
+        <c:numFmt formatCode="General" sourceLinked="1"/>
+        <c:majorTickMark val="none"/>
+        <c:minorTickMark val="none"/>
+        <c:tickLblPos val="nextTo"/>
+        <c:spPr>
+          <a:noFill/>
+          <a:ln>
+            <a:noFill/>
+          </a:ln>
+          <a:effectLst/>
+        </c:spPr>
+        <c:txPr>
+          <a:bodyPr rot="-60000000" spcFirstLastPara="1" vertOverflow="ellipsis" vert="horz" wrap="square" anchor="ctr" anchorCtr="1"/>
+          <a:lstStyle/>
+          <a:p>
+            <a:pPr>
+              <a:defRPr sz="1197" b="0" i="0" u="none" strike="noStrike" kern="1200" baseline="0">
+                <a:solidFill>
+                  <a:schemeClr val="tx1">
+                    <a:lumMod val="65000"/>
+                    <a:lumOff val="35000"/>
+                  </a:schemeClr>
+                </a:solidFill>
+                <a:latin typeface="+mn-lt"/>
+                <a:ea typeface="+mn-ea"/>
+                <a:cs typeface="+mn-cs"/>
+              </a:defRPr>
+            </a:pPr>
+            <a:endParaRPr lang="zh-CN"/>
+          </a:p>
+        </c:txPr>
+        <c:crossAx val="37418255"/>
+        <c:crosses val="autoZero"/>
+        <c:crossBetween val="between"/>
+      </c:valAx>
+      <c:serAx>
+        <c:axId val="1490216400"/>
+        <c:scaling>
+          <c:orientation val="minMax"/>
+        </c:scaling>
+        <c:delete val="0"/>
+        <c:axPos val="b"/>
+        <c:majorTickMark val="out"/>
+        <c:minorTickMark val="none"/>
+        <c:tickLblPos val="nextTo"/>
+        <c:spPr>
+          <a:noFill/>
+          <a:ln w="9525" cap="flat" cmpd="sng" algn="ctr">
+            <a:solidFill>
+              <a:schemeClr val="tx1">
+                <a:lumMod val="15000"/>
+                <a:lumOff val="85000"/>
+              </a:schemeClr>
+            </a:solidFill>
+            <a:round/>
+          </a:ln>
+          <a:effectLst/>
+        </c:spPr>
+        <c:txPr>
+          <a:bodyPr rot="-60000000" spcFirstLastPara="1" vertOverflow="ellipsis" vert="horz" wrap="square" anchor="ctr" anchorCtr="1"/>
+          <a:lstStyle/>
+          <a:p>
+            <a:pPr>
+              <a:defRPr sz="1197" b="0" i="0" u="none" strike="noStrike" kern="1200" baseline="0">
+                <a:solidFill>
+                  <a:schemeClr val="tx1">
+                    <a:lumMod val="65000"/>
+                    <a:lumOff val="35000"/>
+                  </a:schemeClr>
+                </a:solidFill>
+                <a:latin typeface="+mn-lt"/>
+                <a:ea typeface="+mn-ea"/>
+                <a:cs typeface="+mn-cs"/>
+              </a:defRPr>
+            </a:pPr>
+            <a:endParaRPr lang="zh-CN"/>
+          </a:p>
+        </c:txPr>
+        <c:crossAx val="37423535"/>
+        <c:crosses val="autoZero"/>
+      </c:serAx>
       <c:spPr>
         <a:noFill/>
         <a:ln>
@@ -963,6 +2909,166 @@
 </cs:colorStyle>
 </file>
 
+<file path=ppt/charts/colors3.xml><?xml version="1.0" encoding="utf-8"?>
+<cs:colorStyle xmlns:cs="http://schemas.microsoft.com/office/drawing/2012/chartStyle" xmlns:a="http://schemas.openxmlformats.org/drawingml/2006/main" meth="cycle" id="10">
+  <a:schemeClr val="accent1"/>
+  <a:schemeClr val="accent2"/>
+  <a:schemeClr val="accent3"/>
+  <a:schemeClr val="accent4"/>
+  <a:schemeClr val="accent5"/>
+  <a:schemeClr val="accent6"/>
+  <cs:variation/>
+  <cs:variation>
+    <a:lumMod val="60000"/>
+  </cs:variation>
+  <cs:variation>
+    <a:lumMod val="80000"/>
+    <a:lumOff val="20000"/>
+  </cs:variation>
+  <cs:variation>
+    <a:lumMod val="80000"/>
+  </cs:variation>
+  <cs:variation>
+    <a:lumMod val="60000"/>
+    <a:lumOff val="40000"/>
+  </cs:variation>
+  <cs:variation>
+    <a:lumMod val="50000"/>
+  </cs:variation>
+  <cs:variation>
+    <a:lumMod val="70000"/>
+    <a:lumOff val="30000"/>
+  </cs:variation>
+  <cs:variation>
+    <a:lumMod val="70000"/>
+  </cs:variation>
+  <cs:variation>
+    <a:lumMod val="50000"/>
+    <a:lumOff val="50000"/>
+  </cs:variation>
+</cs:colorStyle>
+</file>
+
+<file path=ppt/charts/colors4.xml><?xml version="1.0" encoding="utf-8"?>
+<cs:colorStyle xmlns:cs="http://schemas.microsoft.com/office/drawing/2012/chartStyle" xmlns:a="http://schemas.openxmlformats.org/drawingml/2006/main" meth="cycle" id="10">
+  <a:schemeClr val="accent1"/>
+  <a:schemeClr val="accent2"/>
+  <a:schemeClr val="accent3"/>
+  <a:schemeClr val="accent4"/>
+  <a:schemeClr val="accent5"/>
+  <a:schemeClr val="accent6"/>
+  <cs:variation/>
+  <cs:variation>
+    <a:lumMod val="60000"/>
+  </cs:variation>
+  <cs:variation>
+    <a:lumMod val="80000"/>
+    <a:lumOff val="20000"/>
+  </cs:variation>
+  <cs:variation>
+    <a:lumMod val="80000"/>
+  </cs:variation>
+  <cs:variation>
+    <a:lumMod val="60000"/>
+    <a:lumOff val="40000"/>
+  </cs:variation>
+  <cs:variation>
+    <a:lumMod val="50000"/>
+  </cs:variation>
+  <cs:variation>
+    <a:lumMod val="70000"/>
+    <a:lumOff val="30000"/>
+  </cs:variation>
+  <cs:variation>
+    <a:lumMod val="70000"/>
+  </cs:variation>
+  <cs:variation>
+    <a:lumMod val="50000"/>
+    <a:lumOff val="50000"/>
+  </cs:variation>
+</cs:colorStyle>
+</file>
+
+<file path=ppt/charts/colors5.xml><?xml version="1.0" encoding="utf-8"?>
+<cs:colorStyle xmlns:cs="http://schemas.microsoft.com/office/drawing/2012/chartStyle" xmlns:a="http://schemas.openxmlformats.org/drawingml/2006/main" meth="cycle" id="10">
+  <a:schemeClr val="accent1"/>
+  <a:schemeClr val="accent2"/>
+  <a:schemeClr val="accent3"/>
+  <a:schemeClr val="accent4"/>
+  <a:schemeClr val="accent5"/>
+  <a:schemeClr val="accent6"/>
+  <cs:variation/>
+  <cs:variation>
+    <a:lumMod val="60000"/>
+  </cs:variation>
+  <cs:variation>
+    <a:lumMod val="80000"/>
+    <a:lumOff val="20000"/>
+  </cs:variation>
+  <cs:variation>
+    <a:lumMod val="80000"/>
+  </cs:variation>
+  <cs:variation>
+    <a:lumMod val="60000"/>
+    <a:lumOff val="40000"/>
+  </cs:variation>
+  <cs:variation>
+    <a:lumMod val="50000"/>
+  </cs:variation>
+  <cs:variation>
+    <a:lumMod val="70000"/>
+    <a:lumOff val="30000"/>
+  </cs:variation>
+  <cs:variation>
+    <a:lumMod val="70000"/>
+  </cs:variation>
+  <cs:variation>
+    <a:lumMod val="50000"/>
+    <a:lumOff val="50000"/>
+  </cs:variation>
+</cs:colorStyle>
+</file>
+
+<file path=ppt/charts/colors6.xml><?xml version="1.0" encoding="utf-8"?>
+<cs:colorStyle xmlns:cs="http://schemas.microsoft.com/office/drawing/2012/chartStyle" xmlns:a="http://schemas.openxmlformats.org/drawingml/2006/main" meth="cycle" id="10">
+  <a:schemeClr val="accent1"/>
+  <a:schemeClr val="accent2"/>
+  <a:schemeClr val="accent3"/>
+  <a:schemeClr val="accent4"/>
+  <a:schemeClr val="accent5"/>
+  <a:schemeClr val="accent6"/>
+  <cs:variation/>
+  <cs:variation>
+    <a:lumMod val="60000"/>
+  </cs:variation>
+  <cs:variation>
+    <a:lumMod val="80000"/>
+    <a:lumOff val="20000"/>
+  </cs:variation>
+  <cs:variation>
+    <a:lumMod val="80000"/>
+  </cs:variation>
+  <cs:variation>
+    <a:lumMod val="60000"/>
+    <a:lumOff val="40000"/>
+  </cs:variation>
+  <cs:variation>
+    <a:lumMod val="50000"/>
+  </cs:variation>
+  <cs:variation>
+    <a:lumMod val="70000"/>
+    <a:lumOff val="30000"/>
+  </cs:variation>
+  <cs:variation>
+    <a:lumMod val="70000"/>
+  </cs:variation>
+  <cs:variation>
+    <a:lumMod val="50000"/>
+    <a:lumOff val="50000"/>
+  </cs:variation>
+</cs:colorStyle>
+</file>
+
 <file path=ppt/charts/style1.xml><?xml version="1.0" encoding="utf-8"?>
 <cs:chartStyle xmlns:cs="http://schemas.microsoft.com/office/drawing/2012/chartStyle" xmlns:a="http://schemas.openxmlformats.org/drawingml/2006/main" id="262">
   <cs:axisTitle>
@@ -1862,6 +3968,2004 @@
         <a:lumOff val="35000"/>
       </a:schemeClr>
     </cs:fontRef>
+    <cs:defRPr sz="1197" kern="1200"/>
+  </cs:seriesAxis>
+  <cs:seriesLine>
+    <cs:lnRef idx="0"/>
+    <cs:fillRef idx="0"/>
+    <cs:effectRef idx="0"/>
+    <cs:fontRef idx="minor">
+      <a:schemeClr val="tx1"/>
+    </cs:fontRef>
+    <cs:spPr>
+      <a:ln w="9525" cap="flat" cmpd="sng" algn="ctr">
+        <a:solidFill>
+          <a:schemeClr val="tx1">
+            <a:lumMod val="35000"/>
+            <a:lumOff val="65000"/>
+          </a:schemeClr>
+        </a:solidFill>
+        <a:round/>
+      </a:ln>
+    </cs:spPr>
+  </cs:seriesLine>
+  <cs:title>
+    <cs:lnRef idx="0"/>
+    <cs:fillRef idx="0"/>
+    <cs:effectRef idx="0"/>
+    <cs:fontRef idx="minor">
+      <a:schemeClr val="tx1">
+        <a:lumMod val="65000"/>
+        <a:lumOff val="35000"/>
+      </a:schemeClr>
+    </cs:fontRef>
+    <cs:defRPr sz="1862" b="0" kern="1200" spc="0" baseline="0"/>
+  </cs:title>
+  <cs:trendline>
+    <cs:lnRef idx="0">
+      <cs:styleClr val="auto"/>
+    </cs:lnRef>
+    <cs:fillRef idx="0"/>
+    <cs:effectRef idx="0"/>
+    <cs:fontRef idx="minor">
+      <a:schemeClr val="tx1"/>
+    </cs:fontRef>
+    <cs:spPr>
+      <a:ln w="19050" cap="rnd">
+        <a:solidFill>
+          <a:schemeClr val="phClr"/>
+        </a:solidFill>
+        <a:prstDash val="sysDot"/>
+      </a:ln>
+    </cs:spPr>
+  </cs:trendline>
+  <cs:trendlineLabel>
+    <cs:lnRef idx="0"/>
+    <cs:fillRef idx="0"/>
+    <cs:effectRef idx="0"/>
+    <cs:fontRef idx="minor">
+      <a:schemeClr val="tx1">
+        <a:lumMod val="65000"/>
+        <a:lumOff val="35000"/>
+      </a:schemeClr>
+    </cs:fontRef>
+    <cs:defRPr sz="1197" kern="1200"/>
+  </cs:trendlineLabel>
+  <cs:upBar>
+    <cs:lnRef idx="0"/>
+    <cs:fillRef idx="0"/>
+    <cs:effectRef idx="0"/>
+    <cs:fontRef idx="minor">
+      <a:schemeClr val="tx1"/>
+    </cs:fontRef>
+    <cs:spPr>
+      <a:solidFill>
+        <a:schemeClr val="lt1"/>
+      </a:solidFill>
+      <a:ln w="9525" cap="flat" cmpd="sng" algn="ctr">
+        <a:solidFill>
+          <a:schemeClr val="tx1">
+            <a:lumMod val="65000"/>
+            <a:lumOff val="35000"/>
+          </a:schemeClr>
+        </a:solidFill>
+        <a:round/>
+      </a:ln>
+    </cs:spPr>
+  </cs:upBar>
+  <cs:valueAxis>
+    <cs:lnRef idx="0"/>
+    <cs:fillRef idx="0"/>
+    <cs:effectRef idx="0"/>
+    <cs:fontRef idx="minor">
+      <a:schemeClr val="tx1">
+        <a:lumMod val="65000"/>
+        <a:lumOff val="35000"/>
+      </a:schemeClr>
+    </cs:fontRef>
+    <cs:defRPr sz="1197" kern="1200"/>
+  </cs:valueAxis>
+  <cs:wall>
+    <cs:lnRef idx="0"/>
+    <cs:fillRef idx="0"/>
+    <cs:effectRef idx="0"/>
+    <cs:fontRef idx="minor">
+      <a:schemeClr val="tx1"/>
+    </cs:fontRef>
+    <cs:spPr>
+      <a:noFill/>
+      <a:ln>
+        <a:noFill/>
+      </a:ln>
+    </cs:spPr>
+  </cs:wall>
+</cs:chartStyle>
+</file>
+
+<file path=ppt/charts/style3.xml><?xml version="1.0" encoding="utf-8"?>
+<cs:chartStyle xmlns:cs="http://schemas.microsoft.com/office/drawing/2012/chartStyle" xmlns:a="http://schemas.openxmlformats.org/drawingml/2006/main" id="286">
+  <cs:axisTitle>
+    <cs:lnRef idx="0"/>
+    <cs:fillRef idx="0"/>
+    <cs:effectRef idx="0"/>
+    <cs:fontRef idx="minor">
+      <a:schemeClr val="tx1">
+        <a:lumMod val="65000"/>
+        <a:lumOff val="35000"/>
+      </a:schemeClr>
+    </cs:fontRef>
+    <cs:defRPr sz="1330" kern="1200"/>
+  </cs:axisTitle>
+  <cs:categoryAxis>
+    <cs:lnRef idx="0"/>
+    <cs:fillRef idx="0"/>
+    <cs:effectRef idx="0"/>
+    <cs:fontRef idx="minor">
+      <a:schemeClr val="tx1">
+        <a:lumMod val="65000"/>
+        <a:lumOff val="35000"/>
+      </a:schemeClr>
+    </cs:fontRef>
+    <cs:defRPr sz="1197" kern="1200"/>
+  </cs:categoryAxis>
+  <cs:chartArea mods="allowNoFillOverride allowNoLineOverride">
+    <cs:lnRef idx="0"/>
+    <cs:fillRef idx="0"/>
+    <cs:effectRef idx="0"/>
+    <cs:fontRef idx="minor">
+      <a:schemeClr val="tx1"/>
+    </cs:fontRef>
+    <cs:spPr>
+      <a:solidFill>
+        <a:schemeClr val="bg1"/>
+      </a:solidFill>
+      <a:ln w="9525" cap="flat" cmpd="sng" algn="ctr">
+        <a:solidFill>
+          <a:schemeClr val="tx1">
+            <a:lumMod val="15000"/>
+            <a:lumOff val="85000"/>
+          </a:schemeClr>
+        </a:solidFill>
+        <a:round/>
+      </a:ln>
+    </cs:spPr>
+    <cs:defRPr sz="1330" kern="1200"/>
+  </cs:chartArea>
+  <cs:dataLabel>
+    <cs:lnRef idx="0"/>
+    <cs:fillRef idx="0"/>
+    <cs:effectRef idx="0"/>
+    <cs:fontRef idx="minor">
+      <a:schemeClr val="tx1">
+        <a:lumMod val="75000"/>
+        <a:lumOff val="25000"/>
+      </a:schemeClr>
+    </cs:fontRef>
+    <cs:defRPr sz="1197" kern="1200"/>
+  </cs:dataLabel>
+  <cs:dataLabelCallout>
+    <cs:lnRef idx="0"/>
+    <cs:fillRef idx="0"/>
+    <cs:effectRef idx="0"/>
+    <cs:fontRef idx="minor">
+      <a:schemeClr val="dk1">
+        <a:lumMod val="65000"/>
+        <a:lumOff val="35000"/>
+      </a:schemeClr>
+    </cs:fontRef>
+    <cs:spPr>
+      <a:solidFill>
+        <a:schemeClr val="lt1"/>
+      </a:solidFill>
+      <a:ln>
+        <a:solidFill>
+          <a:schemeClr val="dk1">
+            <a:lumMod val="25000"/>
+            <a:lumOff val="75000"/>
+          </a:schemeClr>
+        </a:solidFill>
+      </a:ln>
+    </cs:spPr>
+    <cs:defRPr sz="1197" kern="1200"/>
+    <cs:bodyPr rot="0" spcFirstLastPara="1" vertOverflow="clip" horzOverflow="clip" vert="horz" wrap="square" lIns="36576" tIns="18288" rIns="36576" bIns="18288" anchor="ctr" anchorCtr="1">
+      <a:spAutoFit/>
+    </cs:bodyPr>
+  </cs:dataLabelCallout>
+  <cs:dataPoint>
+    <cs:lnRef idx="0"/>
+    <cs:fillRef idx="1">
+      <cs:styleClr val="auto"/>
+    </cs:fillRef>
+    <cs:effectRef idx="0"/>
+    <cs:fontRef idx="minor">
+      <a:schemeClr val="tx1"/>
+    </cs:fontRef>
+  </cs:dataPoint>
+  <cs:dataPoint3D>
+    <cs:lnRef idx="0"/>
+    <cs:fillRef idx="1">
+      <cs:styleClr val="auto"/>
+    </cs:fillRef>
+    <cs:effectRef idx="0"/>
+    <cs:fontRef idx="minor">
+      <a:schemeClr val="tx1"/>
+    </cs:fontRef>
+  </cs:dataPoint3D>
+  <cs:dataPointLine>
+    <cs:lnRef idx="0">
+      <cs:styleClr val="auto"/>
+    </cs:lnRef>
+    <cs:fillRef idx="1"/>
+    <cs:effectRef idx="0"/>
+    <cs:fontRef idx="minor">
+      <a:schemeClr val="tx1"/>
+    </cs:fontRef>
+    <cs:spPr>
+      <a:ln w="28575" cap="rnd">
+        <a:solidFill>
+          <a:schemeClr val="phClr"/>
+        </a:solidFill>
+        <a:round/>
+      </a:ln>
+    </cs:spPr>
+  </cs:dataPointLine>
+  <cs:dataPointMarker>
+    <cs:lnRef idx="0">
+      <cs:styleClr val="auto"/>
+    </cs:lnRef>
+    <cs:fillRef idx="1">
+      <cs:styleClr val="auto"/>
+    </cs:fillRef>
+    <cs:effectRef idx="0"/>
+    <cs:fontRef idx="minor">
+      <a:schemeClr val="tx1"/>
+    </cs:fontRef>
+    <cs:spPr>
+      <a:ln w="9525">
+        <a:solidFill>
+          <a:schemeClr val="phClr"/>
+        </a:solidFill>
+      </a:ln>
+    </cs:spPr>
+  </cs:dataPointMarker>
+  <cs:dataPointMarkerLayout symbol="circle" size="5"/>
+  <cs:dataPointWireframe>
+    <cs:lnRef idx="0">
+      <cs:styleClr val="auto"/>
+    </cs:lnRef>
+    <cs:fillRef idx="1"/>
+    <cs:effectRef idx="0"/>
+    <cs:fontRef idx="minor">
+      <a:schemeClr val="tx1"/>
+    </cs:fontRef>
+    <cs:spPr>
+      <a:ln w="9525" cap="rnd">
+        <a:solidFill>
+          <a:schemeClr val="phClr"/>
+        </a:solidFill>
+        <a:round/>
+      </a:ln>
+    </cs:spPr>
+  </cs:dataPointWireframe>
+  <cs:dataTable>
+    <cs:lnRef idx="0"/>
+    <cs:fillRef idx="0"/>
+    <cs:effectRef idx="0"/>
+    <cs:fontRef idx="minor">
+      <a:schemeClr val="tx1">
+        <a:lumMod val="65000"/>
+        <a:lumOff val="35000"/>
+      </a:schemeClr>
+    </cs:fontRef>
+    <cs:spPr>
+      <a:noFill/>
+      <a:ln w="9525" cap="flat" cmpd="sng" algn="ctr">
+        <a:solidFill>
+          <a:schemeClr val="tx1">
+            <a:lumMod val="15000"/>
+            <a:lumOff val="85000"/>
+          </a:schemeClr>
+        </a:solidFill>
+        <a:round/>
+      </a:ln>
+    </cs:spPr>
+    <cs:defRPr sz="1197" kern="1200"/>
+  </cs:dataTable>
+  <cs:downBar>
+    <cs:lnRef idx="0"/>
+    <cs:fillRef idx="0"/>
+    <cs:effectRef idx="0"/>
+    <cs:fontRef idx="minor">
+      <a:schemeClr val="tx1"/>
+    </cs:fontRef>
+    <cs:spPr>
+      <a:solidFill>
+        <a:schemeClr val="dk1">
+          <a:lumMod val="75000"/>
+          <a:lumOff val="25000"/>
+        </a:schemeClr>
+      </a:solidFill>
+      <a:ln w="9525" cap="flat" cmpd="sng" algn="ctr">
+        <a:solidFill>
+          <a:schemeClr val="tx1">
+            <a:lumMod val="65000"/>
+            <a:lumOff val="35000"/>
+          </a:schemeClr>
+        </a:solidFill>
+        <a:round/>
+      </a:ln>
+    </cs:spPr>
+  </cs:downBar>
+  <cs:dropLine>
+    <cs:lnRef idx="0"/>
+    <cs:fillRef idx="0"/>
+    <cs:effectRef idx="0"/>
+    <cs:fontRef idx="minor">
+      <a:schemeClr val="tx1"/>
+    </cs:fontRef>
+    <cs:spPr>
+      <a:ln w="9525" cap="flat" cmpd="sng" algn="ctr">
+        <a:solidFill>
+          <a:schemeClr val="tx1">
+            <a:lumMod val="35000"/>
+            <a:lumOff val="65000"/>
+          </a:schemeClr>
+        </a:solidFill>
+        <a:round/>
+      </a:ln>
+    </cs:spPr>
+  </cs:dropLine>
+  <cs:errorBar>
+    <cs:lnRef idx="0"/>
+    <cs:fillRef idx="0"/>
+    <cs:effectRef idx="0"/>
+    <cs:fontRef idx="minor">
+      <a:schemeClr val="tx1"/>
+    </cs:fontRef>
+    <cs:spPr>
+      <a:ln w="9525" cap="flat" cmpd="sng" algn="ctr">
+        <a:solidFill>
+          <a:schemeClr val="tx1">
+            <a:lumMod val="65000"/>
+            <a:lumOff val="35000"/>
+          </a:schemeClr>
+        </a:solidFill>
+        <a:round/>
+      </a:ln>
+    </cs:spPr>
+  </cs:errorBar>
+  <cs:floor>
+    <cs:lnRef idx="0"/>
+    <cs:fillRef idx="0"/>
+    <cs:effectRef idx="0"/>
+    <cs:fontRef idx="minor">
+      <a:schemeClr val="tx1"/>
+    </cs:fontRef>
+    <cs:spPr>
+      <a:noFill/>
+      <a:ln>
+        <a:noFill/>
+      </a:ln>
+    </cs:spPr>
+  </cs:floor>
+  <cs:gridlineMajor>
+    <cs:lnRef idx="0"/>
+    <cs:fillRef idx="0"/>
+    <cs:effectRef idx="0"/>
+    <cs:fontRef idx="minor">
+      <a:schemeClr val="tx1"/>
+    </cs:fontRef>
+    <cs:spPr>
+      <a:ln w="9525" cap="flat" cmpd="sng" algn="ctr">
+        <a:solidFill>
+          <a:schemeClr val="tx1">
+            <a:lumMod val="15000"/>
+            <a:lumOff val="85000"/>
+          </a:schemeClr>
+        </a:solidFill>
+        <a:round/>
+      </a:ln>
+    </cs:spPr>
+  </cs:gridlineMajor>
+  <cs:gridlineMinor>
+    <cs:lnRef idx="0"/>
+    <cs:fillRef idx="0"/>
+    <cs:effectRef idx="0"/>
+    <cs:fontRef idx="minor">
+      <a:schemeClr val="tx1"/>
+    </cs:fontRef>
+    <cs:spPr>
+      <a:ln w="9525" cap="flat" cmpd="sng" algn="ctr">
+        <a:solidFill>
+          <a:schemeClr val="tx1">
+            <a:lumMod val="5000"/>
+            <a:lumOff val="95000"/>
+          </a:schemeClr>
+        </a:solidFill>
+        <a:round/>
+      </a:ln>
+    </cs:spPr>
+  </cs:gridlineMinor>
+  <cs:hiLoLine>
+    <cs:lnRef idx="0"/>
+    <cs:fillRef idx="0"/>
+    <cs:effectRef idx="0"/>
+    <cs:fontRef idx="minor">
+      <a:schemeClr val="tx1"/>
+    </cs:fontRef>
+    <cs:spPr>
+      <a:ln w="9525" cap="flat" cmpd="sng" algn="ctr">
+        <a:solidFill>
+          <a:schemeClr val="tx1">
+            <a:lumMod val="50000"/>
+            <a:lumOff val="50000"/>
+          </a:schemeClr>
+        </a:solidFill>
+        <a:round/>
+      </a:ln>
+    </cs:spPr>
+  </cs:hiLoLine>
+  <cs:leaderLine>
+    <cs:lnRef idx="0"/>
+    <cs:fillRef idx="0"/>
+    <cs:effectRef idx="0"/>
+    <cs:fontRef idx="minor">
+      <a:schemeClr val="tx1"/>
+    </cs:fontRef>
+    <cs:spPr>
+      <a:ln w="9525" cap="flat" cmpd="sng" algn="ctr">
+        <a:solidFill>
+          <a:schemeClr val="tx1">
+            <a:lumMod val="35000"/>
+            <a:lumOff val="65000"/>
+          </a:schemeClr>
+        </a:solidFill>
+        <a:round/>
+      </a:ln>
+    </cs:spPr>
+  </cs:leaderLine>
+  <cs:legend>
+    <cs:lnRef idx="0"/>
+    <cs:fillRef idx="0"/>
+    <cs:effectRef idx="0"/>
+    <cs:fontRef idx="minor">
+      <a:schemeClr val="tx1">
+        <a:lumMod val="65000"/>
+        <a:lumOff val="35000"/>
+      </a:schemeClr>
+    </cs:fontRef>
+    <cs:defRPr sz="1197" kern="1200"/>
+  </cs:legend>
+  <cs:plotArea mods="allowNoFillOverride allowNoLineOverride">
+    <cs:lnRef idx="0"/>
+    <cs:fillRef idx="0"/>
+    <cs:effectRef idx="0"/>
+    <cs:fontRef idx="minor">
+      <a:schemeClr val="tx1"/>
+    </cs:fontRef>
+  </cs:plotArea>
+  <cs:plotArea3D mods="allowNoFillOverride allowNoLineOverride">
+    <cs:lnRef idx="0"/>
+    <cs:fillRef idx="0"/>
+    <cs:effectRef idx="0"/>
+    <cs:fontRef idx="minor">
+      <a:schemeClr val="tx1"/>
+    </cs:fontRef>
+  </cs:plotArea3D>
+  <cs:seriesAxis>
+    <cs:lnRef idx="0"/>
+    <cs:fillRef idx="0"/>
+    <cs:effectRef idx="0"/>
+    <cs:fontRef idx="minor">
+      <a:schemeClr val="tx1">
+        <a:lumMod val="65000"/>
+        <a:lumOff val="35000"/>
+      </a:schemeClr>
+    </cs:fontRef>
+    <cs:defRPr sz="1197" kern="1200"/>
+  </cs:seriesAxis>
+  <cs:seriesLine>
+    <cs:lnRef idx="0"/>
+    <cs:fillRef idx="0"/>
+    <cs:effectRef idx="0"/>
+    <cs:fontRef idx="minor">
+      <a:schemeClr val="tx1"/>
+    </cs:fontRef>
+    <cs:spPr>
+      <a:ln w="9525" cap="flat" cmpd="sng" algn="ctr">
+        <a:solidFill>
+          <a:schemeClr val="tx1">
+            <a:lumMod val="35000"/>
+            <a:lumOff val="65000"/>
+          </a:schemeClr>
+        </a:solidFill>
+        <a:round/>
+      </a:ln>
+    </cs:spPr>
+  </cs:seriesLine>
+  <cs:title>
+    <cs:lnRef idx="0"/>
+    <cs:fillRef idx="0"/>
+    <cs:effectRef idx="0"/>
+    <cs:fontRef idx="minor">
+      <a:schemeClr val="tx1">
+        <a:lumMod val="65000"/>
+        <a:lumOff val="35000"/>
+      </a:schemeClr>
+    </cs:fontRef>
+    <cs:defRPr sz="1862" b="0" kern="1200" spc="0" baseline="0"/>
+  </cs:title>
+  <cs:trendline>
+    <cs:lnRef idx="0">
+      <cs:styleClr val="auto"/>
+    </cs:lnRef>
+    <cs:fillRef idx="0"/>
+    <cs:effectRef idx="0"/>
+    <cs:fontRef idx="minor">
+      <a:schemeClr val="tx1"/>
+    </cs:fontRef>
+    <cs:spPr>
+      <a:ln w="19050" cap="rnd">
+        <a:solidFill>
+          <a:schemeClr val="phClr"/>
+        </a:solidFill>
+        <a:prstDash val="sysDot"/>
+      </a:ln>
+    </cs:spPr>
+  </cs:trendline>
+  <cs:trendlineLabel>
+    <cs:lnRef idx="0"/>
+    <cs:fillRef idx="0"/>
+    <cs:effectRef idx="0"/>
+    <cs:fontRef idx="minor">
+      <a:schemeClr val="tx1">
+        <a:lumMod val="65000"/>
+        <a:lumOff val="35000"/>
+      </a:schemeClr>
+    </cs:fontRef>
+    <cs:defRPr sz="1197" kern="1200"/>
+  </cs:trendlineLabel>
+  <cs:upBar>
+    <cs:lnRef idx="0"/>
+    <cs:fillRef idx="0"/>
+    <cs:effectRef idx="0"/>
+    <cs:fontRef idx="minor">
+      <a:schemeClr val="tx1"/>
+    </cs:fontRef>
+    <cs:spPr>
+      <a:solidFill>
+        <a:schemeClr val="lt1"/>
+      </a:solidFill>
+      <a:ln w="9525" cap="flat" cmpd="sng" algn="ctr">
+        <a:solidFill>
+          <a:schemeClr val="tx1">
+            <a:lumMod val="65000"/>
+            <a:lumOff val="35000"/>
+          </a:schemeClr>
+        </a:solidFill>
+        <a:round/>
+      </a:ln>
+    </cs:spPr>
+  </cs:upBar>
+  <cs:valueAxis>
+    <cs:lnRef idx="0"/>
+    <cs:fillRef idx="0"/>
+    <cs:effectRef idx="0"/>
+    <cs:fontRef idx="minor">
+      <a:schemeClr val="tx1">
+        <a:lumMod val="65000"/>
+        <a:lumOff val="35000"/>
+      </a:schemeClr>
+    </cs:fontRef>
+    <cs:defRPr sz="1197" kern="1200"/>
+  </cs:valueAxis>
+  <cs:wall>
+    <cs:lnRef idx="0"/>
+    <cs:fillRef idx="0"/>
+    <cs:effectRef idx="0"/>
+    <cs:fontRef idx="minor">
+      <a:schemeClr val="tx1"/>
+    </cs:fontRef>
+    <cs:spPr>
+      <a:noFill/>
+      <a:ln>
+        <a:noFill/>
+      </a:ln>
+    </cs:spPr>
+  </cs:wall>
+</cs:chartStyle>
+</file>
+
+<file path=ppt/charts/style4.xml><?xml version="1.0" encoding="utf-8"?>
+<cs:chartStyle xmlns:cs="http://schemas.microsoft.com/office/drawing/2012/chartStyle" xmlns:a="http://schemas.openxmlformats.org/drawingml/2006/main" id="286">
+  <cs:axisTitle>
+    <cs:lnRef idx="0"/>
+    <cs:fillRef idx="0"/>
+    <cs:effectRef idx="0"/>
+    <cs:fontRef idx="minor">
+      <a:schemeClr val="tx1">
+        <a:lumMod val="65000"/>
+        <a:lumOff val="35000"/>
+      </a:schemeClr>
+    </cs:fontRef>
+    <cs:defRPr sz="1330" kern="1200"/>
+  </cs:axisTitle>
+  <cs:categoryAxis>
+    <cs:lnRef idx="0"/>
+    <cs:fillRef idx="0"/>
+    <cs:effectRef idx="0"/>
+    <cs:fontRef idx="minor">
+      <a:schemeClr val="tx1">
+        <a:lumMod val="65000"/>
+        <a:lumOff val="35000"/>
+      </a:schemeClr>
+    </cs:fontRef>
+    <cs:defRPr sz="1197" kern="1200"/>
+  </cs:categoryAxis>
+  <cs:chartArea mods="allowNoFillOverride allowNoLineOverride">
+    <cs:lnRef idx="0"/>
+    <cs:fillRef idx="0"/>
+    <cs:effectRef idx="0"/>
+    <cs:fontRef idx="minor">
+      <a:schemeClr val="tx1"/>
+    </cs:fontRef>
+    <cs:spPr>
+      <a:solidFill>
+        <a:schemeClr val="bg1"/>
+      </a:solidFill>
+      <a:ln w="9525" cap="flat" cmpd="sng" algn="ctr">
+        <a:solidFill>
+          <a:schemeClr val="tx1">
+            <a:lumMod val="15000"/>
+            <a:lumOff val="85000"/>
+          </a:schemeClr>
+        </a:solidFill>
+        <a:round/>
+      </a:ln>
+    </cs:spPr>
+    <cs:defRPr sz="1330" kern="1200"/>
+  </cs:chartArea>
+  <cs:dataLabel>
+    <cs:lnRef idx="0"/>
+    <cs:fillRef idx="0"/>
+    <cs:effectRef idx="0"/>
+    <cs:fontRef idx="minor">
+      <a:schemeClr val="tx1">
+        <a:lumMod val="75000"/>
+        <a:lumOff val="25000"/>
+      </a:schemeClr>
+    </cs:fontRef>
+    <cs:defRPr sz="1197" kern="1200"/>
+  </cs:dataLabel>
+  <cs:dataLabelCallout>
+    <cs:lnRef idx="0"/>
+    <cs:fillRef idx="0"/>
+    <cs:effectRef idx="0"/>
+    <cs:fontRef idx="minor">
+      <a:schemeClr val="dk1">
+        <a:lumMod val="65000"/>
+        <a:lumOff val="35000"/>
+      </a:schemeClr>
+    </cs:fontRef>
+    <cs:spPr>
+      <a:solidFill>
+        <a:schemeClr val="lt1"/>
+      </a:solidFill>
+      <a:ln>
+        <a:solidFill>
+          <a:schemeClr val="dk1">
+            <a:lumMod val="25000"/>
+            <a:lumOff val="75000"/>
+          </a:schemeClr>
+        </a:solidFill>
+      </a:ln>
+    </cs:spPr>
+    <cs:defRPr sz="1197" kern="1200"/>
+    <cs:bodyPr rot="0" spcFirstLastPara="1" vertOverflow="clip" horzOverflow="clip" vert="horz" wrap="square" lIns="36576" tIns="18288" rIns="36576" bIns="18288" anchor="ctr" anchorCtr="1">
+      <a:spAutoFit/>
+    </cs:bodyPr>
+  </cs:dataLabelCallout>
+  <cs:dataPoint>
+    <cs:lnRef idx="0"/>
+    <cs:fillRef idx="1">
+      <cs:styleClr val="auto"/>
+    </cs:fillRef>
+    <cs:effectRef idx="0"/>
+    <cs:fontRef idx="minor">
+      <a:schemeClr val="tx1"/>
+    </cs:fontRef>
+  </cs:dataPoint>
+  <cs:dataPoint3D>
+    <cs:lnRef idx="0"/>
+    <cs:fillRef idx="1">
+      <cs:styleClr val="auto"/>
+    </cs:fillRef>
+    <cs:effectRef idx="0"/>
+    <cs:fontRef idx="minor">
+      <a:schemeClr val="tx1"/>
+    </cs:fontRef>
+  </cs:dataPoint3D>
+  <cs:dataPointLine>
+    <cs:lnRef idx="0">
+      <cs:styleClr val="auto"/>
+    </cs:lnRef>
+    <cs:fillRef idx="1"/>
+    <cs:effectRef idx="0"/>
+    <cs:fontRef idx="minor">
+      <a:schemeClr val="tx1"/>
+    </cs:fontRef>
+    <cs:spPr>
+      <a:ln w="28575" cap="rnd">
+        <a:solidFill>
+          <a:schemeClr val="phClr"/>
+        </a:solidFill>
+        <a:round/>
+      </a:ln>
+    </cs:spPr>
+  </cs:dataPointLine>
+  <cs:dataPointMarker>
+    <cs:lnRef idx="0">
+      <cs:styleClr val="auto"/>
+    </cs:lnRef>
+    <cs:fillRef idx="1">
+      <cs:styleClr val="auto"/>
+    </cs:fillRef>
+    <cs:effectRef idx="0"/>
+    <cs:fontRef idx="minor">
+      <a:schemeClr val="tx1"/>
+    </cs:fontRef>
+    <cs:spPr>
+      <a:ln w="9525">
+        <a:solidFill>
+          <a:schemeClr val="phClr"/>
+        </a:solidFill>
+      </a:ln>
+    </cs:spPr>
+  </cs:dataPointMarker>
+  <cs:dataPointMarkerLayout symbol="circle" size="5"/>
+  <cs:dataPointWireframe>
+    <cs:lnRef idx="0">
+      <cs:styleClr val="auto"/>
+    </cs:lnRef>
+    <cs:fillRef idx="1"/>
+    <cs:effectRef idx="0"/>
+    <cs:fontRef idx="minor">
+      <a:schemeClr val="tx1"/>
+    </cs:fontRef>
+    <cs:spPr>
+      <a:ln w="9525" cap="rnd">
+        <a:solidFill>
+          <a:schemeClr val="phClr"/>
+        </a:solidFill>
+        <a:round/>
+      </a:ln>
+    </cs:spPr>
+  </cs:dataPointWireframe>
+  <cs:dataTable>
+    <cs:lnRef idx="0"/>
+    <cs:fillRef idx="0"/>
+    <cs:effectRef idx="0"/>
+    <cs:fontRef idx="minor">
+      <a:schemeClr val="tx1">
+        <a:lumMod val="65000"/>
+        <a:lumOff val="35000"/>
+      </a:schemeClr>
+    </cs:fontRef>
+    <cs:spPr>
+      <a:noFill/>
+      <a:ln w="9525" cap="flat" cmpd="sng" algn="ctr">
+        <a:solidFill>
+          <a:schemeClr val="tx1">
+            <a:lumMod val="15000"/>
+            <a:lumOff val="85000"/>
+          </a:schemeClr>
+        </a:solidFill>
+        <a:round/>
+      </a:ln>
+    </cs:spPr>
+    <cs:defRPr sz="1197" kern="1200"/>
+  </cs:dataTable>
+  <cs:downBar>
+    <cs:lnRef idx="0"/>
+    <cs:fillRef idx="0"/>
+    <cs:effectRef idx="0"/>
+    <cs:fontRef idx="minor">
+      <a:schemeClr val="tx1"/>
+    </cs:fontRef>
+    <cs:spPr>
+      <a:solidFill>
+        <a:schemeClr val="dk1">
+          <a:lumMod val="75000"/>
+          <a:lumOff val="25000"/>
+        </a:schemeClr>
+      </a:solidFill>
+      <a:ln w="9525" cap="flat" cmpd="sng" algn="ctr">
+        <a:solidFill>
+          <a:schemeClr val="tx1">
+            <a:lumMod val="65000"/>
+            <a:lumOff val="35000"/>
+          </a:schemeClr>
+        </a:solidFill>
+        <a:round/>
+      </a:ln>
+    </cs:spPr>
+  </cs:downBar>
+  <cs:dropLine>
+    <cs:lnRef idx="0"/>
+    <cs:fillRef idx="0"/>
+    <cs:effectRef idx="0"/>
+    <cs:fontRef idx="minor">
+      <a:schemeClr val="tx1"/>
+    </cs:fontRef>
+    <cs:spPr>
+      <a:ln w="9525" cap="flat" cmpd="sng" algn="ctr">
+        <a:solidFill>
+          <a:schemeClr val="tx1">
+            <a:lumMod val="35000"/>
+            <a:lumOff val="65000"/>
+          </a:schemeClr>
+        </a:solidFill>
+        <a:round/>
+      </a:ln>
+    </cs:spPr>
+  </cs:dropLine>
+  <cs:errorBar>
+    <cs:lnRef idx="0"/>
+    <cs:fillRef idx="0"/>
+    <cs:effectRef idx="0"/>
+    <cs:fontRef idx="minor">
+      <a:schemeClr val="tx1"/>
+    </cs:fontRef>
+    <cs:spPr>
+      <a:ln w="9525" cap="flat" cmpd="sng" algn="ctr">
+        <a:solidFill>
+          <a:schemeClr val="tx1">
+            <a:lumMod val="65000"/>
+            <a:lumOff val="35000"/>
+          </a:schemeClr>
+        </a:solidFill>
+        <a:round/>
+      </a:ln>
+    </cs:spPr>
+  </cs:errorBar>
+  <cs:floor>
+    <cs:lnRef idx="0"/>
+    <cs:fillRef idx="0"/>
+    <cs:effectRef idx="0"/>
+    <cs:fontRef idx="minor">
+      <a:schemeClr val="tx1"/>
+    </cs:fontRef>
+    <cs:spPr>
+      <a:noFill/>
+      <a:ln>
+        <a:noFill/>
+      </a:ln>
+    </cs:spPr>
+  </cs:floor>
+  <cs:gridlineMajor>
+    <cs:lnRef idx="0"/>
+    <cs:fillRef idx="0"/>
+    <cs:effectRef idx="0"/>
+    <cs:fontRef idx="minor">
+      <a:schemeClr val="tx1"/>
+    </cs:fontRef>
+    <cs:spPr>
+      <a:ln w="9525" cap="flat" cmpd="sng" algn="ctr">
+        <a:solidFill>
+          <a:schemeClr val="tx1">
+            <a:lumMod val="15000"/>
+            <a:lumOff val="85000"/>
+          </a:schemeClr>
+        </a:solidFill>
+        <a:round/>
+      </a:ln>
+    </cs:spPr>
+  </cs:gridlineMajor>
+  <cs:gridlineMinor>
+    <cs:lnRef idx="0"/>
+    <cs:fillRef idx="0"/>
+    <cs:effectRef idx="0"/>
+    <cs:fontRef idx="minor">
+      <a:schemeClr val="tx1"/>
+    </cs:fontRef>
+    <cs:spPr>
+      <a:ln w="9525" cap="flat" cmpd="sng" algn="ctr">
+        <a:solidFill>
+          <a:schemeClr val="tx1">
+            <a:lumMod val="5000"/>
+            <a:lumOff val="95000"/>
+          </a:schemeClr>
+        </a:solidFill>
+        <a:round/>
+      </a:ln>
+    </cs:spPr>
+  </cs:gridlineMinor>
+  <cs:hiLoLine>
+    <cs:lnRef idx="0"/>
+    <cs:fillRef idx="0"/>
+    <cs:effectRef idx="0"/>
+    <cs:fontRef idx="minor">
+      <a:schemeClr val="tx1"/>
+    </cs:fontRef>
+    <cs:spPr>
+      <a:ln w="9525" cap="flat" cmpd="sng" algn="ctr">
+        <a:solidFill>
+          <a:schemeClr val="tx1">
+            <a:lumMod val="50000"/>
+            <a:lumOff val="50000"/>
+          </a:schemeClr>
+        </a:solidFill>
+        <a:round/>
+      </a:ln>
+    </cs:spPr>
+  </cs:hiLoLine>
+  <cs:leaderLine>
+    <cs:lnRef idx="0"/>
+    <cs:fillRef idx="0"/>
+    <cs:effectRef idx="0"/>
+    <cs:fontRef idx="minor">
+      <a:schemeClr val="tx1"/>
+    </cs:fontRef>
+    <cs:spPr>
+      <a:ln w="9525" cap="flat" cmpd="sng" algn="ctr">
+        <a:solidFill>
+          <a:schemeClr val="tx1">
+            <a:lumMod val="35000"/>
+            <a:lumOff val="65000"/>
+          </a:schemeClr>
+        </a:solidFill>
+        <a:round/>
+      </a:ln>
+    </cs:spPr>
+  </cs:leaderLine>
+  <cs:legend>
+    <cs:lnRef idx="0"/>
+    <cs:fillRef idx="0"/>
+    <cs:effectRef idx="0"/>
+    <cs:fontRef idx="minor">
+      <a:schemeClr val="tx1">
+        <a:lumMod val="65000"/>
+        <a:lumOff val="35000"/>
+      </a:schemeClr>
+    </cs:fontRef>
+    <cs:defRPr sz="1197" kern="1200"/>
+  </cs:legend>
+  <cs:plotArea mods="allowNoFillOverride allowNoLineOverride">
+    <cs:lnRef idx="0"/>
+    <cs:fillRef idx="0"/>
+    <cs:effectRef idx="0"/>
+    <cs:fontRef idx="minor">
+      <a:schemeClr val="tx1"/>
+    </cs:fontRef>
+  </cs:plotArea>
+  <cs:plotArea3D mods="allowNoFillOverride allowNoLineOverride">
+    <cs:lnRef idx="0"/>
+    <cs:fillRef idx="0"/>
+    <cs:effectRef idx="0"/>
+    <cs:fontRef idx="minor">
+      <a:schemeClr val="tx1"/>
+    </cs:fontRef>
+  </cs:plotArea3D>
+  <cs:seriesAxis>
+    <cs:lnRef idx="0"/>
+    <cs:fillRef idx="0"/>
+    <cs:effectRef idx="0"/>
+    <cs:fontRef idx="minor">
+      <a:schemeClr val="tx1">
+        <a:lumMod val="65000"/>
+        <a:lumOff val="35000"/>
+      </a:schemeClr>
+    </cs:fontRef>
+    <cs:defRPr sz="1197" kern="1200"/>
+  </cs:seriesAxis>
+  <cs:seriesLine>
+    <cs:lnRef idx="0"/>
+    <cs:fillRef idx="0"/>
+    <cs:effectRef idx="0"/>
+    <cs:fontRef idx="minor">
+      <a:schemeClr val="tx1"/>
+    </cs:fontRef>
+    <cs:spPr>
+      <a:ln w="9525" cap="flat" cmpd="sng" algn="ctr">
+        <a:solidFill>
+          <a:schemeClr val="tx1">
+            <a:lumMod val="35000"/>
+            <a:lumOff val="65000"/>
+          </a:schemeClr>
+        </a:solidFill>
+        <a:round/>
+      </a:ln>
+    </cs:spPr>
+  </cs:seriesLine>
+  <cs:title>
+    <cs:lnRef idx="0"/>
+    <cs:fillRef idx="0"/>
+    <cs:effectRef idx="0"/>
+    <cs:fontRef idx="minor">
+      <a:schemeClr val="tx1">
+        <a:lumMod val="65000"/>
+        <a:lumOff val="35000"/>
+      </a:schemeClr>
+    </cs:fontRef>
+    <cs:defRPr sz="1862" b="0" kern="1200" spc="0" baseline="0"/>
+  </cs:title>
+  <cs:trendline>
+    <cs:lnRef idx="0">
+      <cs:styleClr val="auto"/>
+    </cs:lnRef>
+    <cs:fillRef idx="0"/>
+    <cs:effectRef idx="0"/>
+    <cs:fontRef idx="minor">
+      <a:schemeClr val="tx1"/>
+    </cs:fontRef>
+    <cs:spPr>
+      <a:ln w="19050" cap="rnd">
+        <a:solidFill>
+          <a:schemeClr val="phClr"/>
+        </a:solidFill>
+        <a:prstDash val="sysDot"/>
+      </a:ln>
+    </cs:spPr>
+  </cs:trendline>
+  <cs:trendlineLabel>
+    <cs:lnRef idx="0"/>
+    <cs:fillRef idx="0"/>
+    <cs:effectRef idx="0"/>
+    <cs:fontRef idx="minor">
+      <a:schemeClr val="tx1">
+        <a:lumMod val="65000"/>
+        <a:lumOff val="35000"/>
+      </a:schemeClr>
+    </cs:fontRef>
+    <cs:defRPr sz="1197" kern="1200"/>
+  </cs:trendlineLabel>
+  <cs:upBar>
+    <cs:lnRef idx="0"/>
+    <cs:fillRef idx="0"/>
+    <cs:effectRef idx="0"/>
+    <cs:fontRef idx="minor">
+      <a:schemeClr val="tx1"/>
+    </cs:fontRef>
+    <cs:spPr>
+      <a:solidFill>
+        <a:schemeClr val="lt1"/>
+      </a:solidFill>
+      <a:ln w="9525" cap="flat" cmpd="sng" algn="ctr">
+        <a:solidFill>
+          <a:schemeClr val="tx1">
+            <a:lumMod val="65000"/>
+            <a:lumOff val="35000"/>
+          </a:schemeClr>
+        </a:solidFill>
+        <a:round/>
+      </a:ln>
+    </cs:spPr>
+  </cs:upBar>
+  <cs:valueAxis>
+    <cs:lnRef idx="0"/>
+    <cs:fillRef idx="0"/>
+    <cs:effectRef idx="0"/>
+    <cs:fontRef idx="minor">
+      <a:schemeClr val="tx1">
+        <a:lumMod val="65000"/>
+        <a:lumOff val="35000"/>
+      </a:schemeClr>
+    </cs:fontRef>
+    <cs:defRPr sz="1197" kern="1200"/>
+  </cs:valueAxis>
+  <cs:wall>
+    <cs:lnRef idx="0"/>
+    <cs:fillRef idx="0"/>
+    <cs:effectRef idx="0"/>
+    <cs:fontRef idx="minor">
+      <a:schemeClr val="tx1"/>
+    </cs:fontRef>
+    <cs:spPr>
+      <a:noFill/>
+      <a:ln>
+        <a:noFill/>
+      </a:ln>
+    </cs:spPr>
+  </cs:wall>
+</cs:chartStyle>
+</file>
+
+<file path=ppt/charts/style5.xml><?xml version="1.0" encoding="utf-8"?>
+<cs:chartStyle xmlns:cs="http://schemas.microsoft.com/office/drawing/2012/chartStyle" xmlns:a="http://schemas.openxmlformats.org/drawingml/2006/main" id="286">
+  <cs:axisTitle>
+    <cs:lnRef idx="0"/>
+    <cs:fillRef idx="0"/>
+    <cs:effectRef idx="0"/>
+    <cs:fontRef idx="minor">
+      <a:schemeClr val="tx1">
+        <a:lumMod val="65000"/>
+        <a:lumOff val="35000"/>
+      </a:schemeClr>
+    </cs:fontRef>
+    <cs:defRPr sz="1330" kern="1200"/>
+  </cs:axisTitle>
+  <cs:categoryAxis>
+    <cs:lnRef idx="0"/>
+    <cs:fillRef idx="0"/>
+    <cs:effectRef idx="0"/>
+    <cs:fontRef idx="minor">
+      <a:schemeClr val="tx1">
+        <a:lumMod val="65000"/>
+        <a:lumOff val="35000"/>
+      </a:schemeClr>
+    </cs:fontRef>
+    <cs:defRPr sz="1197" kern="1200"/>
+  </cs:categoryAxis>
+  <cs:chartArea mods="allowNoFillOverride allowNoLineOverride">
+    <cs:lnRef idx="0"/>
+    <cs:fillRef idx="0"/>
+    <cs:effectRef idx="0"/>
+    <cs:fontRef idx="minor">
+      <a:schemeClr val="tx1"/>
+    </cs:fontRef>
+    <cs:spPr>
+      <a:solidFill>
+        <a:schemeClr val="bg1"/>
+      </a:solidFill>
+      <a:ln w="9525" cap="flat" cmpd="sng" algn="ctr">
+        <a:solidFill>
+          <a:schemeClr val="tx1">
+            <a:lumMod val="15000"/>
+            <a:lumOff val="85000"/>
+          </a:schemeClr>
+        </a:solidFill>
+        <a:round/>
+      </a:ln>
+    </cs:spPr>
+    <cs:defRPr sz="1330" kern="1200"/>
+  </cs:chartArea>
+  <cs:dataLabel>
+    <cs:lnRef idx="0"/>
+    <cs:fillRef idx="0"/>
+    <cs:effectRef idx="0"/>
+    <cs:fontRef idx="minor">
+      <a:schemeClr val="tx1">
+        <a:lumMod val="75000"/>
+        <a:lumOff val="25000"/>
+      </a:schemeClr>
+    </cs:fontRef>
+    <cs:defRPr sz="1197" kern="1200"/>
+  </cs:dataLabel>
+  <cs:dataLabelCallout>
+    <cs:lnRef idx="0"/>
+    <cs:fillRef idx="0"/>
+    <cs:effectRef idx="0"/>
+    <cs:fontRef idx="minor">
+      <a:schemeClr val="dk1">
+        <a:lumMod val="65000"/>
+        <a:lumOff val="35000"/>
+      </a:schemeClr>
+    </cs:fontRef>
+    <cs:spPr>
+      <a:solidFill>
+        <a:schemeClr val="lt1"/>
+      </a:solidFill>
+      <a:ln>
+        <a:solidFill>
+          <a:schemeClr val="dk1">
+            <a:lumMod val="25000"/>
+            <a:lumOff val="75000"/>
+          </a:schemeClr>
+        </a:solidFill>
+      </a:ln>
+    </cs:spPr>
+    <cs:defRPr sz="1197" kern="1200"/>
+    <cs:bodyPr rot="0" spcFirstLastPara="1" vertOverflow="clip" horzOverflow="clip" vert="horz" wrap="square" lIns="36576" tIns="18288" rIns="36576" bIns="18288" anchor="ctr" anchorCtr="1">
+      <a:spAutoFit/>
+    </cs:bodyPr>
+  </cs:dataLabelCallout>
+  <cs:dataPoint>
+    <cs:lnRef idx="0"/>
+    <cs:fillRef idx="1">
+      <cs:styleClr val="auto"/>
+    </cs:fillRef>
+    <cs:effectRef idx="0"/>
+    <cs:fontRef idx="minor">
+      <a:schemeClr val="tx1"/>
+    </cs:fontRef>
+  </cs:dataPoint>
+  <cs:dataPoint3D>
+    <cs:lnRef idx="0"/>
+    <cs:fillRef idx="1">
+      <cs:styleClr val="auto"/>
+    </cs:fillRef>
+    <cs:effectRef idx="0"/>
+    <cs:fontRef idx="minor">
+      <a:schemeClr val="tx1"/>
+    </cs:fontRef>
+  </cs:dataPoint3D>
+  <cs:dataPointLine>
+    <cs:lnRef idx="0">
+      <cs:styleClr val="auto"/>
+    </cs:lnRef>
+    <cs:fillRef idx="1"/>
+    <cs:effectRef idx="0"/>
+    <cs:fontRef idx="minor">
+      <a:schemeClr val="tx1"/>
+    </cs:fontRef>
+    <cs:spPr>
+      <a:ln w="28575" cap="rnd">
+        <a:solidFill>
+          <a:schemeClr val="phClr"/>
+        </a:solidFill>
+        <a:round/>
+      </a:ln>
+    </cs:spPr>
+  </cs:dataPointLine>
+  <cs:dataPointMarker>
+    <cs:lnRef idx="0">
+      <cs:styleClr val="auto"/>
+    </cs:lnRef>
+    <cs:fillRef idx="1">
+      <cs:styleClr val="auto"/>
+    </cs:fillRef>
+    <cs:effectRef idx="0"/>
+    <cs:fontRef idx="minor">
+      <a:schemeClr val="tx1"/>
+    </cs:fontRef>
+    <cs:spPr>
+      <a:ln w="9525">
+        <a:solidFill>
+          <a:schemeClr val="phClr"/>
+        </a:solidFill>
+      </a:ln>
+    </cs:spPr>
+  </cs:dataPointMarker>
+  <cs:dataPointMarkerLayout symbol="circle" size="5"/>
+  <cs:dataPointWireframe>
+    <cs:lnRef idx="0">
+      <cs:styleClr val="auto"/>
+    </cs:lnRef>
+    <cs:fillRef idx="1"/>
+    <cs:effectRef idx="0"/>
+    <cs:fontRef idx="minor">
+      <a:schemeClr val="tx1"/>
+    </cs:fontRef>
+    <cs:spPr>
+      <a:ln w="9525" cap="rnd">
+        <a:solidFill>
+          <a:schemeClr val="phClr"/>
+        </a:solidFill>
+        <a:round/>
+      </a:ln>
+    </cs:spPr>
+  </cs:dataPointWireframe>
+  <cs:dataTable>
+    <cs:lnRef idx="0"/>
+    <cs:fillRef idx="0"/>
+    <cs:effectRef idx="0"/>
+    <cs:fontRef idx="minor">
+      <a:schemeClr val="tx1">
+        <a:lumMod val="65000"/>
+        <a:lumOff val="35000"/>
+      </a:schemeClr>
+    </cs:fontRef>
+    <cs:spPr>
+      <a:noFill/>
+      <a:ln w="9525" cap="flat" cmpd="sng" algn="ctr">
+        <a:solidFill>
+          <a:schemeClr val="tx1">
+            <a:lumMod val="15000"/>
+            <a:lumOff val="85000"/>
+          </a:schemeClr>
+        </a:solidFill>
+        <a:round/>
+      </a:ln>
+    </cs:spPr>
+    <cs:defRPr sz="1197" kern="1200"/>
+  </cs:dataTable>
+  <cs:downBar>
+    <cs:lnRef idx="0"/>
+    <cs:fillRef idx="0"/>
+    <cs:effectRef idx="0"/>
+    <cs:fontRef idx="minor">
+      <a:schemeClr val="tx1"/>
+    </cs:fontRef>
+    <cs:spPr>
+      <a:solidFill>
+        <a:schemeClr val="dk1">
+          <a:lumMod val="75000"/>
+          <a:lumOff val="25000"/>
+        </a:schemeClr>
+      </a:solidFill>
+      <a:ln w="9525" cap="flat" cmpd="sng" algn="ctr">
+        <a:solidFill>
+          <a:schemeClr val="tx1">
+            <a:lumMod val="65000"/>
+            <a:lumOff val="35000"/>
+          </a:schemeClr>
+        </a:solidFill>
+        <a:round/>
+      </a:ln>
+    </cs:spPr>
+  </cs:downBar>
+  <cs:dropLine>
+    <cs:lnRef idx="0"/>
+    <cs:fillRef idx="0"/>
+    <cs:effectRef idx="0"/>
+    <cs:fontRef idx="minor">
+      <a:schemeClr val="tx1"/>
+    </cs:fontRef>
+    <cs:spPr>
+      <a:ln w="9525" cap="flat" cmpd="sng" algn="ctr">
+        <a:solidFill>
+          <a:schemeClr val="tx1">
+            <a:lumMod val="35000"/>
+            <a:lumOff val="65000"/>
+          </a:schemeClr>
+        </a:solidFill>
+        <a:round/>
+      </a:ln>
+    </cs:spPr>
+  </cs:dropLine>
+  <cs:errorBar>
+    <cs:lnRef idx="0"/>
+    <cs:fillRef idx="0"/>
+    <cs:effectRef idx="0"/>
+    <cs:fontRef idx="minor">
+      <a:schemeClr val="tx1"/>
+    </cs:fontRef>
+    <cs:spPr>
+      <a:ln w="9525" cap="flat" cmpd="sng" algn="ctr">
+        <a:solidFill>
+          <a:schemeClr val="tx1">
+            <a:lumMod val="65000"/>
+            <a:lumOff val="35000"/>
+          </a:schemeClr>
+        </a:solidFill>
+        <a:round/>
+      </a:ln>
+    </cs:spPr>
+  </cs:errorBar>
+  <cs:floor>
+    <cs:lnRef idx="0"/>
+    <cs:fillRef idx="0"/>
+    <cs:effectRef idx="0"/>
+    <cs:fontRef idx="minor">
+      <a:schemeClr val="tx1"/>
+    </cs:fontRef>
+    <cs:spPr>
+      <a:noFill/>
+      <a:ln>
+        <a:noFill/>
+      </a:ln>
+    </cs:spPr>
+  </cs:floor>
+  <cs:gridlineMajor>
+    <cs:lnRef idx="0"/>
+    <cs:fillRef idx="0"/>
+    <cs:effectRef idx="0"/>
+    <cs:fontRef idx="minor">
+      <a:schemeClr val="tx1"/>
+    </cs:fontRef>
+    <cs:spPr>
+      <a:ln w="9525" cap="flat" cmpd="sng" algn="ctr">
+        <a:solidFill>
+          <a:schemeClr val="tx1">
+            <a:lumMod val="15000"/>
+            <a:lumOff val="85000"/>
+          </a:schemeClr>
+        </a:solidFill>
+        <a:round/>
+      </a:ln>
+    </cs:spPr>
+  </cs:gridlineMajor>
+  <cs:gridlineMinor>
+    <cs:lnRef idx="0"/>
+    <cs:fillRef idx="0"/>
+    <cs:effectRef idx="0"/>
+    <cs:fontRef idx="minor">
+      <a:schemeClr val="tx1"/>
+    </cs:fontRef>
+    <cs:spPr>
+      <a:ln w="9525" cap="flat" cmpd="sng" algn="ctr">
+        <a:solidFill>
+          <a:schemeClr val="tx1">
+            <a:lumMod val="5000"/>
+            <a:lumOff val="95000"/>
+          </a:schemeClr>
+        </a:solidFill>
+        <a:round/>
+      </a:ln>
+    </cs:spPr>
+  </cs:gridlineMinor>
+  <cs:hiLoLine>
+    <cs:lnRef idx="0"/>
+    <cs:fillRef idx="0"/>
+    <cs:effectRef idx="0"/>
+    <cs:fontRef idx="minor">
+      <a:schemeClr val="tx1"/>
+    </cs:fontRef>
+    <cs:spPr>
+      <a:ln w="9525" cap="flat" cmpd="sng" algn="ctr">
+        <a:solidFill>
+          <a:schemeClr val="tx1">
+            <a:lumMod val="50000"/>
+            <a:lumOff val="50000"/>
+          </a:schemeClr>
+        </a:solidFill>
+        <a:round/>
+      </a:ln>
+    </cs:spPr>
+  </cs:hiLoLine>
+  <cs:leaderLine>
+    <cs:lnRef idx="0"/>
+    <cs:fillRef idx="0"/>
+    <cs:effectRef idx="0"/>
+    <cs:fontRef idx="minor">
+      <a:schemeClr val="tx1"/>
+    </cs:fontRef>
+    <cs:spPr>
+      <a:ln w="9525" cap="flat" cmpd="sng" algn="ctr">
+        <a:solidFill>
+          <a:schemeClr val="tx1">
+            <a:lumMod val="35000"/>
+            <a:lumOff val="65000"/>
+          </a:schemeClr>
+        </a:solidFill>
+        <a:round/>
+      </a:ln>
+    </cs:spPr>
+  </cs:leaderLine>
+  <cs:legend>
+    <cs:lnRef idx="0"/>
+    <cs:fillRef idx="0"/>
+    <cs:effectRef idx="0"/>
+    <cs:fontRef idx="minor">
+      <a:schemeClr val="tx1">
+        <a:lumMod val="65000"/>
+        <a:lumOff val="35000"/>
+      </a:schemeClr>
+    </cs:fontRef>
+    <cs:defRPr sz="1197" kern="1200"/>
+  </cs:legend>
+  <cs:plotArea mods="allowNoFillOverride allowNoLineOverride">
+    <cs:lnRef idx="0"/>
+    <cs:fillRef idx="0"/>
+    <cs:effectRef idx="0"/>
+    <cs:fontRef idx="minor">
+      <a:schemeClr val="tx1"/>
+    </cs:fontRef>
+  </cs:plotArea>
+  <cs:plotArea3D mods="allowNoFillOverride allowNoLineOverride">
+    <cs:lnRef idx="0"/>
+    <cs:fillRef idx="0"/>
+    <cs:effectRef idx="0"/>
+    <cs:fontRef idx="minor">
+      <a:schemeClr val="tx1"/>
+    </cs:fontRef>
+  </cs:plotArea3D>
+  <cs:seriesAxis>
+    <cs:lnRef idx="0"/>
+    <cs:fillRef idx="0"/>
+    <cs:effectRef idx="0"/>
+    <cs:fontRef idx="minor">
+      <a:schemeClr val="tx1">
+        <a:lumMod val="65000"/>
+        <a:lumOff val="35000"/>
+      </a:schemeClr>
+    </cs:fontRef>
+    <cs:defRPr sz="1197" kern="1200"/>
+  </cs:seriesAxis>
+  <cs:seriesLine>
+    <cs:lnRef idx="0"/>
+    <cs:fillRef idx="0"/>
+    <cs:effectRef idx="0"/>
+    <cs:fontRef idx="minor">
+      <a:schemeClr val="tx1"/>
+    </cs:fontRef>
+    <cs:spPr>
+      <a:ln w="9525" cap="flat" cmpd="sng" algn="ctr">
+        <a:solidFill>
+          <a:schemeClr val="tx1">
+            <a:lumMod val="35000"/>
+            <a:lumOff val="65000"/>
+          </a:schemeClr>
+        </a:solidFill>
+        <a:round/>
+      </a:ln>
+    </cs:spPr>
+  </cs:seriesLine>
+  <cs:title>
+    <cs:lnRef idx="0"/>
+    <cs:fillRef idx="0"/>
+    <cs:effectRef idx="0"/>
+    <cs:fontRef idx="minor">
+      <a:schemeClr val="tx1">
+        <a:lumMod val="65000"/>
+        <a:lumOff val="35000"/>
+      </a:schemeClr>
+    </cs:fontRef>
+    <cs:defRPr sz="1862" b="0" kern="1200" spc="0" baseline="0"/>
+  </cs:title>
+  <cs:trendline>
+    <cs:lnRef idx="0">
+      <cs:styleClr val="auto"/>
+    </cs:lnRef>
+    <cs:fillRef idx="0"/>
+    <cs:effectRef idx="0"/>
+    <cs:fontRef idx="minor">
+      <a:schemeClr val="tx1"/>
+    </cs:fontRef>
+    <cs:spPr>
+      <a:ln w="19050" cap="rnd">
+        <a:solidFill>
+          <a:schemeClr val="phClr"/>
+        </a:solidFill>
+        <a:prstDash val="sysDot"/>
+      </a:ln>
+    </cs:spPr>
+  </cs:trendline>
+  <cs:trendlineLabel>
+    <cs:lnRef idx="0"/>
+    <cs:fillRef idx="0"/>
+    <cs:effectRef idx="0"/>
+    <cs:fontRef idx="minor">
+      <a:schemeClr val="tx1">
+        <a:lumMod val="65000"/>
+        <a:lumOff val="35000"/>
+      </a:schemeClr>
+    </cs:fontRef>
+    <cs:defRPr sz="1197" kern="1200"/>
+  </cs:trendlineLabel>
+  <cs:upBar>
+    <cs:lnRef idx="0"/>
+    <cs:fillRef idx="0"/>
+    <cs:effectRef idx="0"/>
+    <cs:fontRef idx="minor">
+      <a:schemeClr val="tx1"/>
+    </cs:fontRef>
+    <cs:spPr>
+      <a:solidFill>
+        <a:schemeClr val="lt1"/>
+      </a:solidFill>
+      <a:ln w="9525" cap="flat" cmpd="sng" algn="ctr">
+        <a:solidFill>
+          <a:schemeClr val="tx1">
+            <a:lumMod val="65000"/>
+            <a:lumOff val="35000"/>
+          </a:schemeClr>
+        </a:solidFill>
+        <a:round/>
+      </a:ln>
+    </cs:spPr>
+  </cs:upBar>
+  <cs:valueAxis>
+    <cs:lnRef idx="0"/>
+    <cs:fillRef idx="0"/>
+    <cs:effectRef idx="0"/>
+    <cs:fontRef idx="minor">
+      <a:schemeClr val="tx1">
+        <a:lumMod val="65000"/>
+        <a:lumOff val="35000"/>
+      </a:schemeClr>
+    </cs:fontRef>
+    <cs:defRPr sz="1197" kern="1200"/>
+  </cs:valueAxis>
+  <cs:wall>
+    <cs:lnRef idx="0"/>
+    <cs:fillRef idx="0"/>
+    <cs:effectRef idx="0"/>
+    <cs:fontRef idx="minor">
+      <a:schemeClr val="tx1"/>
+    </cs:fontRef>
+    <cs:spPr>
+      <a:noFill/>
+      <a:ln>
+        <a:noFill/>
+      </a:ln>
+    </cs:spPr>
+  </cs:wall>
+</cs:chartStyle>
+</file>
+
+<file path=ppt/charts/style6.xml><?xml version="1.0" encoding="utf-8"?>
+<cs:chartStyle xmlns:cs="http://schemas.microsoft.com/office/drawing/2012/chartStyle" xmlns:a="http://schemas.openxmlformats.org/drawingml/2006/main" id="307">
+  <cs:axisTitle>
+    <cs:lnRef idx="0"/>
+    <cs:fillRef idx="0"/>
+    <cs:effectRef idx="0"/>
+    <cs:fontRef idx="minor">
+      <a:schemeClr val="tx1">
+        <a:lumMod val="65000"/>
+        <a:lumOff val="35000"/>
+      </a:schemeClr>
+    </cs:fontRef>
+    <cs:defRPr sz="1330" kern="1200"/>
+  </cs:axisTitle>
+  <cs:categoryAxis>
+    <cs:lnRef idx="0"/>
+    <cs:fillRef idx="0"/>
+    <cs:effectRef idx="0"/>
+    <cs:fontRef idx="minor">
+      <a:schemeClr val="tx1">
+        <a:lumMod val="65000"/>
+        <a:lumOff val="35000"/>
+      </a:schemeClr>
+    </cs:fontRef>
+    <cs:spPr>
+      <a:ln w="9525" cap="flat" cmpd="sng" algn="ctr">
+        <a:solidFill>
+          <a:schemeClr val="tx1">
+            <a:lumMod val="15000"/>
+            <a:lumOff val="85000"/>
+          </a:schemeClr>
+        </a:solidFill>
+        <a:round/>
+      </a:ln>
+    </cs:spPr>
+    <cs:defRPr sz="1197" kern="1200"/>
+  </cs:categoryAxis>
+  <cs:chartArea mods="allowNoFillOverride allowNoLineOverride">
+    <cs:lnRef idx="0"/>
+    <cs:fillRef idx="0"/>
+    <cs:effectRef idx="0"/>
+    <cs:fontRef idx="minor">
+      <a:schemeClr val="tx1"/>
+    </cs:fontRef>
+    <cs:spPr>
+      <a:solidFill>
+        <a:schemeClr val="bg1"/>
+      </a:solidFill>
+      <a:ln w="9525" cap="flat" cmpd="sng" algn="ctr">
+        <a:solidFill>
+          <a:schemeClr val="tx1">
+            <a:lumMod val="15000"/>
+            <a:lumOff val="85000"/>
+          </a:schemeClr>
+        </a:solidFill>
+        <a:round/>
+      </a:ln>
+    </cs:spPr>
+    <cs:defRPr sz="1330" kern="1200"/>
+  </cs:chartArea>
+  <cs:dataLabel>
+    <cs:lnRef idx="0"/>
+    <cs:fillRef idx="0"/>
+    <cs:effectRef idx="0"/>
+    <cs:fontRef idx="minor">
+      <a:schemeClr val="tx1">
+        <a:lumMod val="75000"/>
+        <a:lumOff val="25000"/>
+      </a:schemeClr>
+    </cs:fontRef>
+    <cs:defRPr sz="1197" kern="1200"/>
+  </cs:dataLabel>
+  <cs:dataLabelCallout>
+    <cs:lnRef idx="0"/>
+    <cs:fillRef idx="0"/>
+    <cs:effectRef idx="0"/>
+    <cs:fontRef idx="minor">
+      <a:schemeClr val="dk1">
+        <a:lumMod val="65000"/>
+        <a:lumOff val="35000"/>
+      </a:schemeClr>
+    </cs:fontRef>
+    <cs:spPr>
+      <a:solidFill>
+        <a:schemeClr val="lt1"/>
+      </a:solidFill>
+      <a:ln>
+        <a:solidFill>
+          <a:schemeClr val="dk1">
+            <a:lumMod val="25000"/>
+            <a:lumOff val="75000"/>
+          </a:schemeClr>
+        </a:solidFill>
+      </a:ln>
+    </cs:spPr>
+    <cs:defRPr sz="1197" kern="1200"/>
+    <cs:bodyPr rot="0" spcFirstLastPara="1" vertOverflow="clip" horzOverflow="clip" vert="horz" wrap="square" lIns="36576" tIns="18288" rIns="36576" bIns="18288" anchor="ctr" anchorCtr="1">
+      <a:spAutoFit/>
+    </cs:bodyPr>
+  </cs:dataLabelCallout>
+  <cs:dataPoint>
+    <cs:lnRef idx="0"/>
+    <cs:fillRef idx="1">
+      <cs:styleClr val="auto"/>
+    </cs:fillRef>
+    <cs:effectRef idx="0"/>
+    <cs:fontRef idx="minor">
+      <a:schemeClr val="tx1"/>
+    </cs:fontRef>
+  </cs:dataPoint>
+  <cs:dataPoint3D>
+    <cs:lnRef idx="0"/>
+    <cs:fillRef idx="1">
+      <cs:styleClr val="auto"/>
+    </cs:fillRef>
+    <cs:effectRef idx="0"/>
+    <cs:fontRef idx="minor">
+      <a:schemeClr val="tx1"/>
+    </cs:fontRef>
+  </cs:dataPoint3D>
+  <cs:dataPointLine>
+    <cs:lnRef idx="0">
+      <cs:styleClr val="auto"/>
+    </cs:lnRef>
+    <cs:fillRef idx="1"/>
+    <cs:effectRef idx="0"/>
+    <cs:fontRef idx="minor">
+      <a:schemeClr val="tx1"/>
+    </cs:fontRef>
+    <cs:spPr>
+      <a:ln w="28575" cap="rnd">
+        <a:solidFill>
+          <a:schemeClr val="phClr"/>
+        </a:solidFill>
+        <a:round/>
+      </a:ln>
+    </cs:spPr>
+  </cs:dataPointLine>
+  <cs:dataPointMarker>
+    <cs:lnRef idx="0">
+      <cs:styleClr val="auto"/>
+    </cs:lnRef>
+    <cs:fillRef idx="1">
+      <cs:styleClr val="auto"/>
+    </cs:fillRef>
+    <cs:effectRef idx="0"/>
+    <cs:fontRef idx="minor">
+      <a:schemeClr val="tx1"/>
+    </cs:fontRef>
+    <cs:spPr>
+      <a:ln w="9525">
+        <a:solidFill>
+          <a:schemeClr val="phClr"/>
+        </a:solidFill>
+      </a:ln>
+    </cs:spPr>
+  </cs:dataPointMarker>
+  <cs:dataPointMarkerLayout symbol="circle" size="5"/>
+  <cs:dataPointWireframe>
+    <cs:lnRef idx="0">
+      <cs:styleClr val="auto"/>
+    </cs:lnRef>
+    <cs:fillRef idx="1"/>
+    <cs:effectRef idx="0"/>
+    <cs:fontRef idx="minor">
+      <a:schemeClr val="tx1"/>
+    </cs:fontRef>
+    <cs:spPr>
+      <a:ln w="9525" cap="rnd">
+        <a:solidFill>
+          <a:schemeClr val="phClr"/>
+        </a:solidFill>
+        <a:round/>
+      </a:ln>
+    </cs:spPr>
+  </cs:dataPointWireframe>
+  <cs:dataTable>
+    <cs:lnRef idx="0"/>
+    <cs:fillRef idx="0"/>
+    <cs:effectRef idx="0"/>
+    <cs:fontRef idx="minor">
+      <a:schemeClr val="tx1">
+        <a:lumMod val="65000"/>
+        <a:lumOff val="35000"/>
+      </a:schemeClr>
+    </cs:fontRef>
+    <cs:spPr>
+      <a:noFill/>
+      <a:ln w="9525" cap="flat" cmpd="sng" algn="ctr">
+        <a:solidFill>
+          <a:schemeClr val="tx1">
+            <a:lumMod val="15000"/>
+            <a:lumOff val="85000"/>
+          </a:schemeClr>
+        </a:solidFill>
+        <a:round/>
+      </a:ln>
+    </cs:spPr>
+    <cs:defRPr sz="1197" kern="1200"/>
+  </cs:dataTable>
+  <cs:downBar>
+    <cs:lnRef idx="0"/>
+    <cs:fillRef idx="0"/>
+    <cs:effectRef idx="0"/>
+    <cs:fontRef idx="minor">
+      <a:schemeClr val="tx1"/>
+    </cs:fontRef>
+    <cs:spPr>
+      <a:solidFill>
+        <a:schemeClr val="dk1">
+          <a:lumMod val="75000"/>
+          <a:lumOff val="25000"/>
+        </a:schemeClr>
+      </a:solidFill>
+      <a:ln w="9525" cap="flat" cmpd="sng" algn="ctr">
+        <a:solidFill>
+          <a:schemeClr val="tx1">
+            <a:lumMod val="65000"/>
+            <a:lumOff val="35000"/>
+          </a:schemeClr>
+        </a:solidFill>
+        <a:round/>
+      </a:ln>
+    </cs:spPr>
+  </cs:downBar>
+  <cs:dropLine>
+    <cs:lnRef idx="0"/>
+    <cs:fillRef idx="0"/>
+    <cs:effectRef idx="0"/>
+    <cs:fontRef idx="minor">
+      <a:schemeClr val="tx1"/>
+    </cs:fontRef>
+    <cs:spPr>
+      <a:ln w="9525" cap="flat" cmpd="sng" algn="ctr">
+        <a:solidFill>
+          <a:schemeClr val="tx1">
+            <a:lumMod val="35000"/>
+            <a:lumOff val="65000"/>
+          </a:schemeClr>
+        </a:solidFill>
+        <a:round/>
+      </a:ln>
+    </cs:spPr>
+  </cs:dropLine>
+  <cs:errorBar>
+    <cs:lnRef idx="0"/>
+    <cs:fillRef idx="0"/>
+    <cs:effectRef idx="0"/>
+    <cs:fontRef idx="minor">
+      <a:schemeClr val="tx1"/>
+    </cs:fontRef>
+    <cs:spPr>
+      <a:ln w="9525" cap="flat" cmpd="sng" algn="ctr">
+        <a:solidFill>
+          <a:schemeClr val="tx1">
+            <a:lumMod val="65000"/>
+            <a:lumOff val="35000"/>
+          </a:schemeClr>
+        </a:solidFill>
+        <a:round/>
+      </a:ln>
+    </cs:spPr>
+  </cs:errorBar>
+  <cs:floor>
+    <cs:lnRef idx="0"/>
+    <cs:fillRef idx="0"/>
+    <cs:effectRef idx="0"/>
+    <cs:fontRef idx="minor">
+      <a:schemeClr val="tx1"/>
+    </cs:fontRef>
+    <cs:spPr>
+      <a:noFill/>
+      <a:ln>
+        <a:noFill/>
+      </a:ln>
+    </cs:spPr>
+  </cs:floor>
+  <cs:gridlineMajor>
+    <cs:lnRef idx="0"/>
+    <cs:fillRef idx="0"/>
+    <cs:effectRef idx="0"/>
+    <cs:fontRef idx="minor">
+      <a:schemeClr val="tx1"/>
+    </cs:fontRef>
+    <cs:spPr>
+      <a:ln w="9525" cap="flat" cmpd="sng" algn="ctr">
+        <a:solidFill>
+          <a:schemeClr val="tx1">
+            <a:lumMod val="15000"/>
+            <a:lumOff val="85000"/>
+          </a:schemeClr>
+        </a:solidFill>
+        <a:round/>
+      </a:ln>
+    </cs:spPr>
+  </cs:gridlineMajor>
+  <cs:gridlineMinor>
+    <cs:lnRef idx="0"/>
+    <cs:fillRef idx="0"/>
+    <cs:effectRef idx="0"/>
+    <cs:fontRef idx="minor">
+      <a:schemeClr val="tx1"/>
+    </cs:fontRef>
+    <cs:spPr>
+      <a:ln w="9525" cap="flat" cmpd="sng" algn="ctr">
+        <a:solidFill>
+          <a:schemeClr val="tx1">
+            <a:lumMod val="5000"/>
+            <a:lumOff val="95000"/>
+          </a:schemeClr>
+        </a:solidFill>
+        <a:round/>
+      </a:ln>
+    </cs:spPr>
+  </cs:gridlineMinor>
+  <cs:hiLoLine>
+    <cs:lnRef idx="0"/>
+    <cs:fillRef idx="0"/>
+    <cs:effectRef idx="0"/>
+    <cs:fontRef idx="minor">
+      <a:schemeClr val="tx1"/>
+    </cs:fontRef>
+    <cs:spPr>
+      <a:ln w="9525" cap="flat" cmpd="sng" algn="ctr">
+        <a:solidFill>
+          <a:schemeClr val="tx1">
+            <a:lumMod val="50000"/>
+            <a:lumOff val="50000"/>
+          </a:schemeClr>
+        </a:solidFill>
+        <a:round/>
+      </a:ln>
+    </cs:spPr>
+  </cs:hiLoLine>
+  <cs:leaderLine>
+    <cs:lnRef idx="0"/>
+    <cs:fillRef idx="0"/>
+    <cs:effectRef idx="0"/>
+    <cs:fontRef idx="minor">
+      <a:schemeClr val="tx1"/>
+    </cs:fontRef>
+    <cs:spPr>
+      <a:ln w="9525" cap="flat" cmpd="sng" algn="ctr">
+        <a:solidFill>
+          <a:schemeClr val="tx1">
+            <a:lumMod val="35000"/>
+            <a:lumOff val="65000"/>
+          </a:schemeClr>
+        </a:solidFill>
+        <a:round/>
+      </a:ln>
+    </cs:spPr>
+  </cs:leaderLine>
+  <cs:legend>
+    <cs:lnRef idx="0"/>
+    <cs:fillRef idx="0"/>
+    <cs:effectRef idx="0"/>
+    <cs:fontRef idx="minor">
+      <a:schemeClr val="tx1">
+        <a:lumMod val="65000"/>
+        <a:lumOff val="35000"/>
+      </a:schemeClr>
+    </cs:fontRef>
+    <cs:defRPr sz="1197" kern="1200"/>
+  </cs:legend>
+  <cs:plotArea mods="allowNoFillOverride allowNoLineOverride">
+    <cs:lnRef idx="0"/>
+    <cs:fillRef idx="0"/>
+    <cs:effectRef idx="0"/>
+    <cs:fontRef idx="minor">
+      <a:schemeClr val="tx1"/>
+    </cs:fontRef>
+  </cs:plotArea>
+  <cs:plotArea3D mods="allowNoFillOverride allowNoLineOverride">
+    <cs:lnRef idx="0"/>
+    <cs:fillRef idx="0"/>
+    <cs:effectRef idx="0"/>
+    <cs:fontRef idx="minor">
+      <a:schemeClr val="tx1"/>
+    </cs:fontRef>
+  </cs:plotArea3D>
+  <cs:seriesAxis>
+    <cs:lnRef idx="0"/>
+    <cs:fillRef idx="0"/>
+    <cs:effectRef idx="0"/>
+    <cs:fontRef idx="minor">
+      <a:schemeClr val="tx1">
+        <a:lumMod val="65000"/>
+        <a:lumOff val="35000"/>
+      </a:schemeClr>
+    </cs:fontRef>
+    <cs:spPr>
+      <a:ln w="9525" cap="flat" cmpd="sng" algn="ctr">
+        <a:solidFill>
+          <a:schemeClr val="tx1">
+            <a:lumMod val="15000"/>
+            <a:lumOff val="85000"/>
+          </a:schemeClr>
+        </a:solidFill>
+        <a:round/>
+      </a:ln>
+    </cs:spPr>
     <cs:defRPr sz="1197" kern="1200"/>
   </cs:seriesAxis>
   <cs:seriesLine>
@@ -1998,7 +6102,7 @@
           <p:cNvPr id="2" name="标题 1">
             <a:extLst>
               <a:ext uri="{FF2B5EF4-FFF2-40B4-BE49-F238E27FC236}">
-                <a16:creationId xmlns:a16="http://schemas.microsoft.com/office/drawing/2014/main" id="{7B71B03F-548F-378F-8694-0600B240C03C}"/>
+                <a16:creationId xmlns:a16="http://schemas.microsoft.com/office/drawing/2014/main" id="{F5684E9D-1530-E516-5318-276B20955C03}"/>
               </a:ext>
             </a:extLst>
           </p:cNvPr>
@@ -2035,7 +6139,7 @@
           <p:cNvPr id="3" name="副标题 2">
             <a:extLst>
               <a:ext uri="{FF2B5EF4-FFF2-40B4-BE49-F238E27FC236}">
-                <a16:creationId xmlns:a16="http://schemas.microsoft.com/office/drawing/2014/main" id="{EDCE8B92-4768-0A8A-4BA9-66B18A8C6EB5}"/>
+                <a16:creationId xmlns:a16="http://schemas.microsoft.com/office/drawing/2014/main" id="{26BE4076-11F2-72A6-BEA6-66AB0B483D7D}"/>
               </a:ext>
             </a:extLst>
           </p:cNvPr>
@@ -2105,7 +6209,7 @@
           <p:cNvPr id="4" name="日期占位符 3">
             <a:extLst>
               <a:ext uri="{FF2B5EF4-FFF2-40B4-BE49-F238E27FC236}">
-                <a16:creationId xmlns:a16="http://schemas.microsoft.com/office/drawing/2014/main" id="{5D20B848-BF0F-6FD4-DF8F-80B39A1192E5}"/>
+                <a16:creationId xmlns:a16="http://schemas.microsoft.com/office/drawing/2014/main" id="{24052ACD-A4F4-B338-F82E-F10A95860A1E}"/>
               </a:ext>
             </a:extLst>
           </p:cNvPr>
@@ -2121,7 +6225,7 @@
           <a:bodyPr/>
           <a:lstStyle/>
           <a:p>
-            <a:fld id="{E6B2637C-FD9A-44A8-9DCF-999336935D67}" type="datetimeFigureOut">
+            <a:fld id="{58C5DA8D-58CC-49A0-9908-23330BA06404}" type="datetimeFigureOut">
               <a:rPr lang="zh-CN" altLang="en-US" smtClean="0"/>
               <a:t>2026/10/14</a:t>
             </a:fld>
@@ -2134,7 +6238,7 @@
           <p:cNvPr id="5" name="页脚占位符 4">
             <a:extLst>
               <a:ext uri="{FF2B5EF4-FFF2-40B4-BE49-F238E27FC236}">
-                <a16:creationId xmlns:a16="http://schemas.microsoft.com/office/drawing/2014/main" id="{9D5F80FB-08ED-CF15-7E02-58EC728142E4}"/>
+                <a16:creationId xmlns:a16="http://schemas.microsoft.com/office/drawing/2014/main" id="{CB39C7EC-41CB-69BD-B511-AE17C53DBDE4}"/>
               </a:ext>
             </a:extLst>
           </p:cNvPr>
@@ -2159,7 +6263,7 @@
           <p:cNvPr id="6" name="灯片编号占位符 5">
             <a:extLst>
               <a:ext uri="{FF2B5EF4-FFF2-40B4-BE49-F238E27FC236}">
-                <a16:creationId xmlns:a16="http://schemas.microsoft.com/office/drawing/2014/main" id="{5A1154FB-A70D-0C69-DFD3-4CF55D998914}"/>
+                <a16:creationId xmlns:a16="http://schemas.microsoft.com/office/drawing/2014/main" id="{125B5340-3088-A526-81DC-920411D1BCE1}"/>
               </a:ext>
             </a:extLst>
           </p:cNvPr>
@@ -2175,7 +6279,7 @@
           <a:bodyPr/>
           <a:lstStyle/>
           <a:p>
-            <a:fld id="{95F3B61A-DB7F-49DF-86D5-DB7BEACE9328}" type="slidenum">
+            <a:fld id="{2C717C2F-95E2-4CA1-A6B9-3702D161CAA1}" type="slidenum">
               <a:rPr lang="zh-CN" altLang="en-US" smtClean="0"/>
               <a:t>‹#›</a:t>
             </a:fld>
@@ -2186,7 +6290,7 @@
     </p:spTree>
     <p:extLst>
       <p:ext uri="{BB962C8B-B14F-4D97-AF65-F5344CB8AC3E}">
-        <p14:creationId xmlns:p14="http://schemas.microsoft.com/office/powerpoint/2010/main" val="1345121271"/>
+        <p14:creationId xmlns:p14="http://schemas.microsoft.com/office/powerpoint/2010/main" val="3653422897"/>
       </p:ext>
     </p:extLst>
   </p:cSld>
@@ -2218,7 +6322,7 @@
           <p:cNvPr id="2" name="标题 1">
             <a:extLst>
               <a:ext uri="{FF2B5EF4-FFF2-40B4-BE49-F238E27FC236}">
-                <a16:creationId xmlns:a16="http://schemas.microsoft.com/office/drawing/2014/main" id="{3A50357C-37A4-34A5-DF4D-25C7D8A075E6}"/>
+                <a16:creationId xmlns:a16="http://schemas.microsoft.com/office/drawing/2014/main" id="{66F43DCB-9F64-3FFB-DB38-8A3191B2BF98}"/>
               </a:ext>
             </a:extLst>
           </p:cNvPr>
@@ -2246,7 +6350,7 @@
           <p:cNvPr id="3" name="竖排文字占位符 2">
             <a:extLst>
               <a:ext uri="{FF2B5EF4-FFF2-40B4-BE49-F238E27FC236}">
-                <a16:creationId xmlns:a16="http://schemas.microsoft.com/office/drawing/2014/main" id="{381AB49E-E73D-752D-308C-EB9D1DC5C691}"/>
+                <a16:creationId xmlns:a16="http://schemas.microsoft.com/office/drawing/2014/main" id="{603157A5-0210-1073-9F00-4271C6F895B3}"/>
               </a:ext>
             </a:extLst>
           </p:cNvPr>
@@ -2303,7 +6407,7 @@
           <p:cNvPr id="4" name="日期占位符 3">
             <a:extLst>
               <a:ext uri="{FF2B5EF4-FFF2-40B4-BE49-F238E27FC236}">
-                <a16:creationId xmlns:a16="http://schemas.microsoft.com/office/drawing/2014/main" id="{4195E2A2-3CAF-CC50-FED3-9F7228AA8D61}"/>
+                <a16:creationId xmlns:a16="http://schemas.microsoft.com/office/drawing/2014/main" id="{80581FA3-1288-6AE4-39AB-0EC2CBF40C58}"/>
               </a:ext>
             </a:extLst>
           </p:cNvPr>
@@ -2319,7 +6423,7 @@
           <a:bodyPr/>
           <a:lstStyle/>
           <a:p>
-            <a:fld id="{E6B2637C-FD9A-44A8-9DCF-999336935D67}" type="datetimeFigureOut">
+            <a:fld id="{58C5DA8D-58CC-49A0-9908-23330BA06404}" type="datetimeFigureOut">
               <a:rPr lang="zh-CN" altLang="en-US" smtClean="0"/>
               <a:t>2026/10/14</a:t>
             </a:fld>
@@ -2332,7 +6436,7 @@
           <p:cNvPr id="5" name="页脚占位符 4">
             <a:extLst>
               <a:ext uri="{FF2B5EF4-FFF2-40B4-BE49-F238E27FC236}">
-                <a16:creationId xmlns:a16="http://schemas.microsoft.com/office/drawing/2014/main" id="{623A3986-4CA4-8167-EEA7-C87FECAC6930}"/>
+                <a16:creationId xmlns:a16="http://schemas.microsoft.com/office/drawing/2014/main" id="{17A4FAE3-0318-408D-3D4C-AA160E7DEF77}"/>
               </a:ext>
             </a:extLst>
           </p:cNvPr>
@@ -2357,7 +6461,7 @@
           <p:cNvPr id="6" name="灯片编号占位符 5">
             <a:extLst>
               <a:ext uri="{FF2B5EF4-FFF2-40B4-BE49-F238E27FC236}">
-                <a16:creationId xmlns:a16="http://schemas.microsoft.com/office/drawing/2014/main" id="{CEA36CA7-E059-2A73-600B-1ACEB7A8F67B}"/>
+                <a16:creationId xmlns:a16="http://schemas.microsoft.com/office/drawing/2014/main" id="{FF8BABE3-8FFB-3D1A-78BC-ED86BA425E6B}"/>
               </a:ext>
             </a:extLst>
           </p:cNvPr>
@@ -2373,7 +6477,7 @@
           <a:bodyPr/>
           <a:lstStyle/>
           <a:p>
-            <a:fld id="{95F3B61A-DB7F-49DF-86D5-DB7BEACE9328}" type="slidenum">
+            <a:fld id="{2C717C2F-95E2-4CA1-A6B9-3702D161CAA1}" type="slidenum">
               <a:rPr lang="zh-CN" altLang="en-US" smtClean="0"/>
               <a:t>‹#›</a:t>
             </a:fld>
@@ -2384,7 +6488,7 @@
     </p:spTree>
     <p:extLst>
       <p:ext uri="{BB962C8B-B14F-4D97-AF65-F5344CB8AC3E}">
-        <p14:creationId xmlns:p14="http://schemas.microsoft.com/office/powerpoint/2010/main" val="1565904642"/>
+        <p14:creationId xmlns:p14="http://schemas.microsoft.com/office/powerpoint/2010/main" val="1349610349"/>
       </p:ext>
     </p:extLst>
   </p:cSld>
@@ -2416,7 +6520,7 @@
           <p:cNvPr id="2" name="竖排标题 1">
             <a:extLst>
               <a:ext uri="{FF2B5EF4-FFF2-40B4-BE49-F238E27FC236}">
-                <a16:creationId xmlns:a16="http://schemas.microsoft.com/office/drawing/2014/main" id="{A793F195-8C27-C4F9-5CCB-8C47D62F083E}"/>
+                <a16:creationId xmlns:a16="http://schemas.microsoft.com/office/drawing/2014/main" id="{6DEECB23-970B-1BDF-ACD5-7F7EA59A31AB}"/>
               </a:ext>
             </a:extLst>
           </p:cNvPr>
@@ -2449,7 +6553,7 @@
           <p:cNvPr id="3" name="竖排文字占位符 2">
             <a:extLst>
               <a:ext uri="{FF2B5EF4-FFF2-40B4-BE49-F238E27FC236}">
-                <a16:creationId xmlns:a16="http://schemas.microsoft.com/office/drawing/2014/main" id="{2610B19D-424A-86A0-BEBA-56224BB6DB7D}"/>
+                <a16:creationId xmlns:a16="http://schemas.microsoft.com/office/drawing/2014/main" id="{7D3857D3-CF3A-7D9B-CF3A-5D49A82DC080}"/>
               </a:ext>
             </a:extLst>
           </p:cNvPr>
@@ -2511,7 +6615,7 @@
           <p:cNvPr id="4" name="日期占位符 3">
             <a:extLst>
               <a:ext uri="{FF2B5EF4-FFF2-40B4-BE49-F238E27FC236}">
-                <a16:creationId xmlns:a16="http://schemas.microsoft.com/office/drawing/2014/main" id="{C8CDB7C3-55B4-B0E3-679E-1C9ACDC1D4A1}"/>
+                <a16:creationId xmlns:a16="http://schemas.microsoft.com/office/drawing/2014/main" id="{08F34D81-92D2-353B-00F2-734169DCDDCB}"/>
               </a:ext>
             </a:extLst>
           </p:cNvPr>
@@ -2527,7 +6631,7 @@
           <a:bodyPr/>
           <a:lstStyle/>
           <a:p>
-            <a:fld id="{E6B2637C-FD9A-44A8-9DCF-999336935D67}" type="datetimeFigureOut">
+            <a:fld id="{58C5DA8D-58CC-49A0-9908-23330BA06404}" type="datetimeFigureOut">
               <a:rPr lang="zh-CN" altLang="en-US" smtClean="0"/>
               <a:t>2026/10/14</a:t>
             </a:fld>
@@ -2540,7 +6644,7 @@
           <p:cNvPr id="5" name="页脚占位符 4">
             <a:extLst>
               <a:ext uri="{FF2B5EF4-FFF2-40B4-BE49-F238E27FC236}">
-                <a16:creationId xmlns:a16="http://schemas.microsoft.com/office/drawing/2014/main" id="{3E738208-E588-F7DD-A0C9-F35FDA65304D}"/>
+                <a16:creationId xmlns:a16="http://schemas.microsoft.com/office/drawing/2014/main" id="{86221C40-F878-44A0-E910-36F8D201DDF7}"/>
               </a:ext>
             </a:extLst>
           </p:cNvPr>
@@ -2565,7 +6669,7 @@
           <p:cNvPr id="6" name="灯片编号占位符 5">
             <a:extLst>
               <a:ext uri="{FF2B5EF4-FFF2-40B4-BE49-F238E27FC236}">
-                <a16:creationId xmlns:a16="http://schemas.microsoft.com/office/drawing/2014/main" id="{39BED553-D020-7DFD-EF53-3C43D2B17B8F}"/>
+                <a16:creationId xmlns:a16="http://schemas.microsoft.com/office/drawing/2014/main" id="{718D57E4-EE71-A8C5-7579-A3FAD0F9A9A4}"/>
               </a:ext>
             </a:extLst>
           </p:cNvPr>
@@ -2581,7 +6685,7 @@
           <a:bodyPr/>
           <a:lstStyle/>
           <a:p>
-            <a:fld id="{95F3B61A-DB7F-49DF-86D5-DB7BEACE9328}" type="slidenum">
+            <a:fld id="{2C717C2F-95E2-4CA1-A6B9-3702D161CAA1}" type="slidenum">
               <a:rPr lang="zh-CN" altLang="en-US" smtClean="0"/>
               <a:t>‹#›</a:t>
             </a:fld>
@@ -2592,7 +6696,7 @@
     </p:spTree>
     <p:extLst>
       <p:ext uri="{BB962C8B-B14F-4D97-AF65-F5344CB8AC3E}">
-        <p14:creationId xmlns:p14="http://schemas.microsoft.com/office/powerpoint/2010/main" val="1987561626"/>
+        <p14:creationId xmlns:p14="http://schemas.microsoft.com/office/powerpoint/2010/main" val="1781814398"/>
       </p:ext>
     </p:extLst>
   </p:cSld>
@@ -2624,7 +6728,7 @@
           <p:cNvPr id="2" name="标题 1">
             <a:extLst>
               <a:ext uri="{FF2B5EF4-FFF2-40B4-BE49-F238E27FC236}">
-                <a16:creationId xmlns:a16="http://schemas.microsoft.com/office/drawing/2014/main" id="{BFF3D9FE-7EA4-07AD-6E9F-5314E85668EC}"/>
+                <a16:creationId xmlns:a16="http://schemas.microsoft.com/office/drawing/2014/main" id="{2FD487E6-8248-DE90-9C03-5F42A7365AAF}"/>
               </a:ext>
             </a:extLst>
           </p:cNvPr>
@@ -2652,7 +6756,7 @@
           <p:cNvPr id="3" name="内容占位符 2">
             <a:extLst>
               <a:ext uri="{FF2B5EF4-FFF2-40B4-BE49-F238E27FC236}">
-                <a16:creationId xmlns:a16="http://schemas.microsoft.com/office/drawing/2014/main" id="{9EFCE70C-C087-6ED3-7787-6F96D528A8B3}"/>
+                <a16:creationId xmlns:a16="http://schemas.microsoft.com/office/drawing/2014/main" id="{E5A6A992-BC71-7C29-6A09-97816327B2FB}"/>
               </a:ext>
             </a:extLst>
           </p:cNvPr>
@@ -2709,7 +6813,7 @@
           <p:cNvPr id="4" name="日期占位符 3">
             <a:extLst>
               <a:ext uri="{FF2B5EF4-FFF2-40B4-BE49-F238E27FC236}">
-                <a16:creationId xmlns:a16="http://schemas.microsoft.com/office/drawing/2014/main" id="{349453A0-96F9-0165-124A-7B201C09192D}"/>
+                <a16:creationId xmlns:a16="http://schemas.microsoft.com/office/drawing/2014/main" id="{F210F990-D11F-BEEF-1E58-EAFA68FB5E8B}"/>
               </a:ext>
             </a:extLst>
           </p:cNvPr>
@@ -2725,7 +6829,7 @@
           <a:bodyPr/>
           <a:lstStyle/>
           <a:p>
-            <a:fld id="{E6B2637C-FD9A-44A8-9DCF-999336935D67}" type="datetimeFigureOut">
+            <a:fld id="{58C5DA8D-58CC-49A0-9908-23330BA06404}" type="datetimeFigureOut">
               <a:rPr lang="zh-CN" altLang="en-US" smtClean="0"/>
               <a:t>2026/10/14</a:t>
             </a:fld>
@@ -2738,7 +6842,7 @@
           <p:cNvPr id="5" name="页脚占位符 4">
             <a:extLst>
               <a:ext uri="{FF2B5EF4-FFF2-40B4-BE49-F238E27FC236}">
-                <a16:creationId xmlns:a16="http://schemas.microsoft.com/office/drawing/2014/main" id="{FFCD40A5-A5D4-6D21-A9D4-473131A0FEFF}"/>
+                <a16:creationId xmlns:a16="http://schemas.microsoft.com/office/drawing/2014/main" id="{0D7623B7-4DFF-042A-F50E-D63AF624D9E7}"/>
               </a:ext>
             </a:extLst>
           </p:cNvPr>
@@ -2763,7 +6867,7 @@
           <p:cNvPr id="6" name="灯片编号占位符 5">
             <a:extLst>
               <a:ext uri="{FF2B5EF4-FFF2-40B4-BE49-F238E27FC236}">
-                <a16:creationId xmlns:a16="http://schemas.microsoft.com/office/drawing/2014/main" id="{21532DC1-FC58-5F7E-D388-57EB5C4D83E9}"/>
+                <a16:creationId xmlns:a16="http://schemas.microsoft.com/office/drawing/2014/main" id="{5F2D74E7-B74A-A196-A966-3EBC9ABAD933}"/>
               </a:ext>
             </a:extLst>
           </p:cNvPr>
@@ -2779,7 +6883,7 @@
           <a:bodyPr/>
           <a:lstStyle/>
           <a:p>
-            <a:fld id="{95F3B61A-DB7F-49DF-86D5-DB7BEACE9328}" type="slidenum">
+            <a:fld id="{2C717C2F-95E2-4CA1-A6B9-3702D161CAA1}" type="slidenum">
               <a:rPr lang="zh-CN" altLang="en-US" smtClean="0"/>
               <a:t>‹#›</a:t>
             </a:fld>
@@ -2790,7 +6894,7 @@
     </p:spTree>
     <p:extLst>
       <p:ext uri="{BB962C8B-B14F-4D97-AF65-F5344CB8AC3E}">
-        <p14:creationId xmlns:p14="http://schemas.microsoft.com/office/powerpoint/2010/main" val="2888752878"/>
+        <p14:creationId xmlns:p14="http://schemas.microsoft.com/office/powerpoint/2010/main" val="3251223731"/>
       </p:ext>
     </p:extLst>
   </p:cSld>
@@ -2822,7 +6926,7 @@
           <p:cNvPr id="2" name="标题 1">
             <a:extLst>
               <a:ext uri="{FF2B5EF4-FFF2-40B4-BE49-F238E27FC236}">
-                <a16:creationId xmlns:a16="http://schemas.microsoft.com/office/drawing/2014/main" id="{DF118B4C-A8BB-DBAC-F6A8-B5A51BCC2168}"/>
+                <a16:creationId xmlns:a16="http://schemas.microsoft.com/office/drawing/2014/main" id="{B45CEA51-48C3-D15E-D147-A43131E974F8}"/>
               </a:ext>
             </a:extLst>
           </p:cNvPr>
@@ -2859,7 +6963,7 @@
           <p:cNvPr id="3" name="文本占位符 2">
             <a:extLst>
               <a:ext uri="{FF2B5EF4-FFF2-40B4-BE49-F238E27FC236}">
-                <a16:creationId xmlns:a16="http://schemas.microsoft.com/office/drawing/2014/main" id="{9761B77F-C581-84E6-779B-5ABED4BD2B63}"/>
+                <a16:creationId xmlns:a16="http://schemas.microsoft.com/office/drawing/2014/main" id="{83D26BD2-FDE7-3D1A-C55B-E005935CCCEF}"/>
               </a:ext>
             </a:extLst>
           </p:cNvPr>
@@ -2984,7 +7088,7 @@
           <p:cNvPr id="4" name="日期占位符 3">
             <a:extLst>
               <a:ext uri="{FF2B5EF4-FFF2-40B4-BE49-F238E27FC236}">
-                <a16:creationId xmlns:a16="http://schemas.microsoft.com/office/drawing/2014/main" id="{73E362FB-97F6-EF57-4085-0124546B4F26}"/>
+                <a16:creationId xmlns:a16="http://schemas.microsoft.com/office/drawing/2014/main" id="{92772B62-AA25-FD64-F0C5-EBADD686DA84}"/>
               </a:ext>
             </a:extLst>
           </p:cNvPr>
@@ -3000,7 +7104,7 @@
           <a:bodyPr/>
           <a:lstStyle/>
           <a:p>
-            <a:fld id="{E6B2637C-FD9A-44A8-9DCF-999336935D67}" type="datetimeFigureOut">
+            <a:fld id="{58C5DA8D-58CC-49A0-9908-23330BA06404}" type="datetimeFigureOut">
               <a:rPr lang="zh-CN" altLang="en-US" smtClean="0"/>
               <a:t>2026/10/14</a:t>
             </a:fld>
@@ -3013,7 +7117,7 @@
           <p:cNvPr id="5" name="页脚占位符 4">
             <a:extLst>
               <a:ext uri="{FF2B5EF4-FFF2-40B4-BE49-F238E27FC236}">
-                <a16:creationId xmlns:a16="http://schemas.microsoft.com/office/drawing/2014/main" id="{709A09E8-FBD9-ABC5-52BC-A8989153B18E}"/>
+                <a16:creationId xmlns:a16="http://schemas.microsoft.com/office/drawing/2014/main" id="{4DCE7517-F51A-7137-D22D-D00104F0F1E4}"/>
               </a:ext>
             </a:extLst>
           </p:cNvPr>
@@ -3038,7 +7142,7 @@
           <p:cNvPr id="6" name="灯片编号占位符 5">
             <a:extLst>
               <a:ext uri="{FF2B5EF4-FFF2-40B4-BE49-F238E27FC236}">
-                <a16:creationId xmlns:a16="http://schemas.microsoft.com/office/drawing/2014/main" id="{81481F7D-1BB9-F937-EB2B-69F1F93DEE97}"/>
+                <a16:creationId xmlns:a16="http://schemas.microsoft.com/office/drawing/2014/main" id="{745FB3F9-D761-8071-E4F1-AE757A0071B8}"/>
               </a:ext>
             </a:extLst>
           </p:cNvPr>
@@ -3054,7 +7158,7 @@
           <a:bodyPr/>
           <a:lstStyle/>
           <a:p>
-            <a:fld id="{95F3B61A-DB7F-49DF-86D5-DB7BEACE9328}" type="slidenum">
+            <a:fld id="{2C717C2F-95E2-4CA1-A6B9-3702D161CAA1}" type="slidenum">
               <a:rPr lang="zh-CN" altLang="en-US" smtClean="0"/>
               <a:t>‹#›</a:t>
             </a:fld>
@@ -3065,7 +7169,7 @@
     </p:spTree>
     <p:extLst>
       <p:ext uri="{BB962C8B-B14F-4D97-AF65-F5344CB8AC3E}">
-        <p14:creationId xmlns:p14="http://schemas.microsoft.com/office/powerpoint/2010/main" val="1435060673"/>
+        <p14:creationId xmlns:p14="http://schemas.microsoft.com/office/powerpoint/2010/main" val="967059873"/>
       </p:ext>
     </p:extLst>
   </p:cSld>
@@ -3097,7 +7201,7 @@
           <p:cNvPr id="2" name="标题 1">
             <a:extLst>
               <a:ext uri="{FF2B5EF4-FFF2-40B4-BE49-F238E27FC236}">
-                <a16:creationId xmlns:a16="http://schemas.microsoft.com/office/drawing/2014/main" id="{77D01089-E967-FFD6-72B8-CE547A92796C}"/>
+                <a16:creationId xmlns:a16="http://schemas.microsoft.com/office/drawing/2014/main" id="{AC7425CA-1ADA-D137-1AA5-B12C0C46A87A}"/>
               </a:ext>
             </a:extLst>
           </p:cNvPr>
@@ -3125,7 +7229,7 @@
           <p:cNvPr id="3" name="内容占位符 2">
             <a:extLst>
               <a:ext uri="{FF2B5EF4-FFF2-40B4-BE49-F238E27FC236}">
-                <a16:creationId xmlns:a16="http://schemas.microsoft.com/office/drawing/2014/main" id="{4DF693D4-453E-F340-6231-0E5E74480A51}"/>
+                <a16:creationId xmlns:a16="http://schemas.microsoft.com/office/drawing/2014/main" id="{9FC7EFDB-6EC5-6421-633E-FEFBA0A6F7CC}"/>
               </a:ext>
             </a:extLst>
           </p:cNvPr>
@@ -3187,7 +7291,7 @@
           <p:cNvPr id="4" name="内容占位符 3">
             <a:extLst>
               <a:ext uri="{FF2B5EF4-FFF2-40B4-BE49-F238E27FC236}">
-                <a16:creationId xmlns:a16="http://schemas.microsoft.com/office/drawing/2014/main" id="{3EA2C553-8576-E775-402E-34647EF89C14}"/>
+                <a16:creationId xmlns:a16="http://schemas.microsoft.com/office/drawing/2014/main" id="{8E5C4A0E-50BF-A2F9-6BCD-0A8F3B0FF4EC}"/>
               </a:ext>
             </a:extLst>
           </p:cNvPr>
@@ -3249,7 +7353,7 @@
           <p:cNvPr id="5" name="日期占位符 4">
             <a:extLst>
               <a:ext uri="{FF2B5EF4-FFF2-40B4-BE49-F238E27FC236}">
-                <a16:creationId xmlns:a16="http://schemas.microsoft.com/office/drawing/2014/main" id="{5D7FC861-916D-F0F9-5470-DA692A130947}"/>
+                <a16:creationId xmlns:a16="http://schemas.microsoft.com/office/drawing/2014/main" id="{D469C07B-4495-C396-CB26-F37F6DC0B3E1}"/>
               </a:ext>
             </a:extLst>
           </p:cNvPr>
@@ -3265,7 +7369,7 @@
           <a:bodyPr/>
           <a:lstStyle/>
           <a:p>
-            <a:fld id="{E6B2637C-FD9A-44A8-9DCF-999336935D67}" type="datetimeFigureOut">
+            <a:fld id="{58C5DA8D-58CC-49A0-9908-23330BA06404}" type="datetimeFigureOut">
               <a:rPr lang="zh-CN" altLang="en-US" smtClean="0"/>
               <a:t>2026/10/14</a:t>
             </a:fld>
@@ -3278,7 +7382,7 @@
           <p:cNvPr id="6" name="页脚占位符 5">
             <a:extLst>
               <a:ext uri="{FF2B5EF4-FFF2-40B4-BE49-F238E27FC236}">
-                <a16:creationId xmlns:a16="http://schemas.microsoft.com/office/drawing/2014/main" id="{EE6233BA-62F1-ED45-D27C-337CE48D5582}"/>
+                <a16:creationId xmlns:a16="http://schemas.microsoft.com/office/drawing/2014/main" id="{38CA737C-A550-0E50-4673-04309D1BB0FC}"/>
               </a:ext>
             </a:extLst>
           </p:cNvPr>
@@ -3303,7 +7407,7 @@
           <p:cNvPr id="7" name="灯片编号占位符 6">
             <a:extLst>
               <a:ext uri="{FF2B5EF4-FFF2-40B4-BE49-F238E27FC236}">
-                <a16:creationId xmlns:a16="http://schemas.microsoft.com/office/drawing/2014/main" id="{8CF904FD-355C-078E-A411-1772E1AB2AE5}"/>
+                <a16:creationId xmlns:a16="http://schemas.microsoft.com/office/drawing/2014/main" id="{056F4BB4-4ABE-390A-EA4E-97AF4021C554}"/>
               </a:ext>
             </a:extLst>
           </p:cNvPr>
@@ -3319,7 +7423,7 @@
           <a:bodyPr/>
           <a:lstStyle/>
           <a:p>
-            <a:fld id="{95F3B61A-DB7F-49DF-86D5-DB7BEACE9328}" type="slidenum">
+            <a:fld id="{2C717C2F-95E2-4CA1-A6B9-3702D161CAA1}" type="slidenum">
               <a:rPr lang="zh-CN" altLang="en-US" smtClean="0"/>
               <a:t>‹#›</a:t>
             </a:fld>
@@ -3330,7 +7434,7 @@
     </p:spTree>
     <p:extLst>
       <p:ext uri="{BB962C8B-B14F-4D97-AF65-F5344CB8AC3E}">
-        <p14:creationId xmlns:p14="http://schemas.microsoft.com/office/powerpoint/2010/main" val="3131178963"/>
+        <p14:creationId xmlns:p14="http://schemas.microsoft.com/office/powerpoint/2010/main" val="3841797177"/>
       </p:ext>
     </p:extLst>
   </p:cSld>
@@ -3362,7 +7466,7 @@
           <p:cNvPr id="2" name="标题 1">
             <a:extLst>
               <a:ext uri="{FF2B5EF4-FFF2-40B4-BE49-F238E27FC236}">
-                <a16:creationId xmlns:a16="http://schemas.microsoft.com/office/drawing/2014/main" id="{AAE0C2C2-0447-2E96-44AD-73E00D5A8679}"/>
+                <a16:creationId xmlns:a16="http://schemas.microsoft.com/office/drawing/2014/main" id="{88371918-7D3F-1827-C8AC-72FC9D01EC3D}"/>
               </a:ext>
             </a:extLst>
           </p:cNvPr>
@@ -3395,7 +7499,7 @@
           <p:cNvPr id="3" name="文本占位符 2">
             <a:extLst>
               <a:ext uri="{FF2B5EF4-FFF2-40B4-BE49-F238E27FC236}">
-                <a16:creationId xmlns:a16="http://schemas.microsoft.com/office/drawing/2014/main" id="{F230DA1D-B44E-29C4-1C34-67874C00250F}"/>
+                <a16:creationId xmlns:a16="http://schemas.microsoft.com/office/drawing/2014/main" id="{729E3738-AD23-4AD5-C565-543E246CF1E5}"/>
               </a:ext>
             </a:extLst>
           </p:cNvPr>
@@ -3466,7 +7570,7 @@
           <p:cNvPr id="4" name="内容占位符 3">
             <a:extLst>
               <a:ext uri="{FF2B5EF4-FFF2-40B4-BE49-F238E27FC236}">
-                <a16:creationId xmlns:a16="http://schemas.microsoft.com/office/drawing/2014/main" id="{BEA82EEC-0033-92B3-8B37-A9C555287E30}"/>
+                <a16:creationId xmlns:a16="http://schemas.microsoft.com/office/drawing/2014/main" id="{4AE85574-90D0-739D-7267-A107218E6CD1}"/>
               </a:ext>
             </a:extLst>
           </p:cNvPr>
@@ -3528,7 +7632,7 @@
           <p:cNvPr id="5" name="文本占位符 4">
             <a:extLst>
               <a:ext uri="{FF2B5EF4-FFF2-40B4-BE49-F238E27FC236}">
-                <a16:creationId xmlns:a16="http://schemas.microsoft.com/office/drawing/2014/main" id="{EA4CF109-A7F5-B7F7-8D03-D4E6FAF42A06}"/>
+                <a16:creationId xmlns:a16="http://schemas.microsoft.com/office/drawing/2014/main" id="{E01A991C-EB7B-472D-DD4C-F413BABE8B4B}"/>
               </a:ext>
             </a:extLst>
           </p:cNvPr>
@@ -3599,7 +7703,7 @@
           <p:cNvPr id="6" name="内容占位符 5">
             <a:extLst>
               <a:ext uri="{FF2B5EF4-FFF2-40B4-BE49-F238E27FC236}">
-                <a16:creationId xmlns:a16="http://schemas.microsoft.com/office/drawing/2014/main" id="{E3704979-6423-CC2B-6319-52463AF80681}"/>
+                <a16:creationId xmlns:a16="http://schemas.microsoft.com/office/drawing/2014/main" id="{F6833932-2A69-7E4B-7F1D-833B85D89BF6}"/>
               </a:ext>
             </a:extLst>
           </p:cNvPr>
@@ -3661,7 +7765,7 @@
           <p:cNvPr id="7" name="日期占位符 6">
             <a:extLst>
               <a:ext uri="{FF2B5EF4-FFF2-40B4-BE49-F238E27FC236}">
-                <a16:creationId xmlns:a16="http://schemas.microsoft.com/office/drawing/2014/main" id="{0203E2A1-DB6D-75C0-D5FB-42221FF661FF}"/>
+                <a16:creationId xmlns:a16="http://schemas.microsoft.com/office/drawing/2014/main" id="{571900BD-C56F-73B6-1677-D0AAAFB15B34}"/>
               </a:ext>
             </a:extLst>
           </p:cNvPr>
@@ -3677,7 +7781,7 @@
           <a:bodyPr/>
           <a:lstStyle/>
           <a:p>
-            <a:fld id="{E6B2637C-FD9A-44A8-9DCF-999336935D67}" type="datetimeFigureOut">
+            <a:fld id="{58C5DA8D-58CC-49A0-9908-23330BA06404}" type="datetimeFigureOut">
               <a:rPr lang="zh-CN" altLang="en-US" smtClean="0"/>
               <a:t>2026/10/14</a:t>
             </a:fld>
@@ -3690,7 +7794,7 @@
           <p:cNvPr id="8" name="页脚占位符 7">
             <a:extLst>
               <a:ext uri="{FF2B5EF4-FFF2-40B4-BE49-F238E27FC236}">
-                <a16:creationId xmlns:a16="http://schemas.microsoft.com/office/drawing/2014/main" id="{5F11CFA5-16A5-A7C7-64BD-DB170FED97DC}"/>
+                <a16:creationId xmlns:a16="http://schemas.microsoft.com/office/drawing/2014/main" id="{8E3D6A30-C638-5490-E2FA-96AC1D511DE8}"/>
               </a:ext>
             </a:extLst>
           </p:cNvPr>
@@ -3715,7 +7819,7 @@
           <p:cNvPr id="9" name="灯片编号占位符 8">
             <a:extLst>
               <a:ext uri="{FF2B5EF4-FFF2-40B4-BE49-F238E27FC236}">
-                <a16:creationId xmlns:a16="http://schemas.microsoft.com/office/drawing/2014/main" id="{DB9526B4-DF5E-665F-5D3F-2F49DF70301F}"/>
+                <a16:creationId xmlns:a16="http://schemas.microsoft.com/office/drawing/2014/main" id="{28CC6038-2DE6-89F9-9D57-05BFEABBFB28}"/>
               </a:ext>
             </a:extLst>
           </p:cNvPr>
@@ -3731,7 +7835,7 @@
           <a:bodyPr/>
           <a:lstStyle/>
           <a:p>
-            <a:fld id="{95F3B61A-DB7F-49DF-86D5-DB7BEACE9328}" type="slidenum">
+            <a:fld id="{2C717C2F-95E2-4CA1-A6B9-3702D161CAA1}" type="slidenum">
               <a:rPr lang="zh-CN" altLang="en-US" smtClean="0"/>
               <a:t>‹#›</a:t>
             </a:fld>
@@ -3742,7 +7846,7 @@
     </p:spTree>
     <p:extLst>
       <p:ext uri="{BB962C8B-B14F-4D97-AF65-F5344CB8AC3E}">
-        <p14:creationId xmlns:p14="http://schemas.microsoft.com/office/powerpoint/2010/main" val="104516643"/>
+        <p14:creationId xmlns:p14="http://schemas.microsoft.com/office/powerpoint/2010/main" val="2922981944"/>
       </p:ext>
     </p:extLst>
   </p:cSld>
@@ -3774,7 +7878,7 @@
           <p:cNvPr id="2" name="标题 1">
             <a:extLst>
               <a:ext uri="{FF2B5EF4-FFF2-40B4-BE49-F238E27FC236}">
-                <a16:creationId xmlns:a16="http://schemas.microsoft.com/office/drawing/2014/main" id="{AFC59309-1B3A-BA66-23B1-B3465F3DDFB8}"/>
+                <a16:creationId xmlns:a16="http://schemas.microsoft.com/office/drawing/2014/main" id="{B437B28C-30A7-3B75-F2E2-A9D712A3A59D}"/>
               </a:ext>
             </a:extLst>
           </p:cNvPr>
@@ -3802,7 +7906,7 @@
           <p:cNvPr id="3" name="日期占位符 2">
             <a:extLst>
               <a:ext uri="{FF2B5EF4-FFF2-40B4-BE49-F238E27FC236}">
-                <a16:creationId xmlns:a16="http://schemas.microsoft.com/office/drawing/2014/main" id="{7E5785CB-1F21-2597-7149-E4EF40F327F7}"/>
+                <a16:creationId xmlns:a16="http://schemas.microsoft.com/office/drawing/2014/main" id="{21157E06-7EFE-4571-EEE0-8A43060BE8F5}"/>
               </a:ext>
             </a:extLst>
           </p:cNvPr>
@@ -3818,7 +7922,7 @@
           <a:bodyPr/>
           <a:lstStyle/>
           <a:p>
-            <a:fld id="{E6B2637C-FD9A-44A8-9DCF-999336935D67}" type="datetimeFigureOut">
+            <a:fld id="{58C5DA8D-58CC-49A0-9908-23330BA06404}" type="datetimeFigureOut">
               <a:rPr lang="zh-CN" altLang="en-US" smtClean="0"/>
               <a:t>2026/10/14</a:t>
             </a:fld>
@@ -3831,7 +7935,7 @@
           <p:cNvPr id="4" name="页脚占位符 3">
             <a:extLst>
               <a:ext uri="{FF2B5EF4-FFF2-40B4-BE49-F238E27FC236}">
-                <a16:creationId xmlns:a16="http://schemas.microsoft.com/office/drawing/2014/main" id="{0E50F05D-5EE5-7761-032F-D9A64639A810}"/>
+                <a16:creationId xmlns:a16="http://schemas.microsoft.com/office/drawing/2014/main" id="{9AB818BB-6FA5-EF70-3A73-6620C11C000C}"/>
               </a:ext>
             </a:extLst>
           </p:cNvPr>
@@ -3856,7 +7960,7 @@
           <p:cNvPr id="5" name="灯片编号占位符 4">
             <a:extLst>
               <a:ext uri="{FF2B5EF4-FFF2-40B4-BE49-F238E27FC236}">
-                <a16:creationId xmlns:a16="http://schemas.microsoft.com/office/drawing/2014/main" id="{03384507-F922-D5AA-378F-3FD62F31223B}"/>
+                <a16:creationId xmlns:a16="http://schemas.microsoft.com/office/drawing/2014/main" id="{E5CF70FE-E154-9D3D-86E1-0D1269FC316C}"/>
               </a:ext>
             </a:extLst>
           </p:cNvPr>
@@ -3872,7 +7976,7 @@
           <a:bodyPr/>
           <a:lstStyle/>
           <a:p>
-            <a:fld id="{95F3B61A-DB7F-49DF-86D5-DB7BEACE9328}" type="slidenum">
+            <a:fld id="{2C717C2F-95E2-4CA1-A6B9-3702D161CAA1}" type="slidenum">
               <a:rPr lang="zh-CN" altLang="en-US" smtClean="0"/>
               <a:t>‹#›</a:t>
             </a:fld>
@@ -3883,7 +7987,7 @@
     </p:spTree>
     <p:extLst>
       <p:ext uri="{BB962C8B-B14F-4D97-AF65-F5344CB8AC3E}">
-        <p14:creationId xmlns:p14="http://schemas.microsoft.com/office/powerpoint/2010/main" val="1947200050"/>
+        <p14:creationId xmlns:p14="http://schemas.microsoft.com/office/powerpoint/2010/main" val="2386123227"/>
       </p:ext>
     </p:extLst>
   </p:cSld>
@@ -3915,7 +8019,7 @@
           <p:cNvPr id="2" name="日期占位符 1">
             <a:extLst>
               <a:ext uri="{FF2B5EF4-FFF2-40B4-BE49-F238E27FC236}">
-                <a16:creationId xmlns:a16="http://schemas.microsoft.com/office/drawing/2014/main" id="{A3FECE66-0EB5-0019-7521-F5E4291EAB2C}"/>
+                <a16:creationId xmlns:a16="http://schemas.microsoft.com/office/drawing/2014/main" id="{CD0EAF53-A34B-D2A5-8D21-4C22DE5B447E}"/>
               </a:ext>
             </a:extLst>
           </p:cNvPr>
@@ -3931,7 +8035,7 @@
           <a:bodyPr/>
           <a:lstStyle/>
           <a:p>
-            <a:fld id="{E6B2637C-FD9A-44A8-9DCF-999336935D67}" type="datetimeFigureOut">
+            <a:fld id="{58C5DA8D-58CC-49A0-9908-23330BA06404}" type="datetimeFigureOut">
               <a:rPr lang="zh-CN" altLang="en-US" smtClean="0"/>
               <a:t>2026/10/14</a:t>
             </a:fld>
@@ -3944,7 +8048,7 @@
           <p:cNvPr id="3" name="页脚占位符 2">
             <a:extLst>
               <a:ext uri="{FF2B5EF4-FFF2-40B4-BE49-F238E27FC236}">
-                <a16:creationId xmlns:a16="http://schemas.microsoft.com/office/drawing/2014/main" id="{6B3BE526-C206-8EBD-8D9F-51F40B75F68F}"/>
+                <a16:creationId xmlns:a16="http://schemas.microsoft.com/office/drawing/2014/main" id="{9C223F92-CE76-05AC-70A6-D079EFD11F5B}"/>
               </a:ext>
             </a:extLst>
           </p:cNvPr>
@@ -3969,7 +8073,7 @@
           <p:cNvPr id="4" name="灯片编号占位符 3">
             <a:extLst>
               <a:ext uri="{FF2B5EF4-FFF2-40B4-BE49-F238E27FC236}">
-                <a16:creationId xmlns:a16="http://schemas.microsoft.com/office/drawing/2014/main" id="{C918BE27-7000-03F6-29F7-47EE5DA9D45C}"/>
+                <a16:creationId xmlns:a16="http://schemas.microsoft.com/office/drawing/2014/main" id="{BC7683A5-1270-4481-8CC7-4074367E07CE}"/>
               </a:ext>
             </a:extLst>
           </p:cNvPr>
@@ -3985,7 +8089,7 @@
           <a:bodyPr/>
           <a:lstStyle/>
           <a:p>
-            <a:fld id="{95F3B61A-DB7F-49DF-86D5-DB7BEACE9328}" type="slidenum">
+            <a:fld id="{2C717C2F-95E2-4CA1-A6B9-3702D161CAA1}" type="slidenum">
               <a:rPr lang="zh-CN" altLang="en-US" smtClean="0"/>
               <a:t>‹#›</a:t>
             </a:fld>
@@ -3996,7 +8100,7 @@
     </p:spTree>
     <p:extLst>
       <p:ext uri="{BB962C8B-B14F-4D97-AF65-F5344CB8AC3E}">
-        <p14:creationId xmlns:p14="http://schemas.microsoft.com/office/powerpoint/2010/main" val="919897511"/>
+        <p14:creationId xmlns:p14="http://schemas.microsoft.com/office/powerpoint/2010/main" val="3563833072"/>
       </p:ext>
     </p:extLst>
   </p:cSld>
@@ -4028,7 +8132,7 @@
           <p:cNvPr id="2" name="标题 1">
             <a:extLst>
               <a:ext uri="{FF2B5EF4-FFF2-40B4-BE49-F238E27FC236}">
-                <a16:creationId xmlns:a16="http://schemas.microsoft.com/office/drawing/2014/main" id="{5C61F84E-62FB-CB42-23E1-A6F49D9F78DB}"/>
+                <a16:creationId xmlns:a16="http://schemas.microsoft.com/office/drawing/2014/main" id="{6A6BDF58-D820-BFA0-4B02-4BA19EAA4373}"/>
               </a:ext>
             </a:extLst>
           </p:cNvPr>
@@ -4065,7 +8169,7 @@
           <p:cNvPr id="3" name="内容占位符 2">
             <a:extLst>
               <a:ext uri="{FF2B5EF4-FFF2-40B4-BE49-F238E27FC236}">
-                <a16:creationId xmlns:a16="http://schemas.microsoft.com/office/drawing/2014/main" id="{8A9E1A20-60E7-BE4C-EA12-76C384D3B9D6}"/>
+                <a16:creationId xmlns:a16="http://schemas.microsoft.com/office/drawing/2014/main" id="{47D70555-2E66-FE08-BEE0-E658041E0074}"/>
               </a:ext>
             </a:extLst>
           </p:cNvPr>
@@ -4155,7 +8259,7 @@
           <p:cNvPr id="4" name="文本占位符 3">
             <a:extLst>
               <a:ext uri="{FF2B5EF4-FFF2-40B4-BE49-F238E27FC236}">
-                <a16:creationId xmlns:a16="http://schemas.microsoft.com/office/drawing/2014/main" id="{4A9D8ED6-A26B-659E-04C8-3A58D027FAE1}"/>
+                <a16:creationId xmlns:a16="http://schemas.microsoft.com/office/drawing/2014/main" id="{9A7E898E-2D8D-DAF3-EC41-B515CADB4BEF}"/>
               </a:ext>
             </a:extLst>
           </p:cNvPr>
@@ -4226,7 +8330,7 @@
           <p:cNvPr id="5" name="日期占位符 4">
             <a:extLst>
               <a:ext uri="{FF2B5EF4-FFF2-40B4-BE49-F238E27FC236}">
-                <a16:creationId xmlns:a16="http://schemas.microsoft.com/office/drawing/2014/main" id="{CE181767-89E0-031A-8B4E-9614C32C9313}"/>
+                <a16:creationId xmlns:a16="http://schemas.microsoft.com/office/drawing/2014/main" id="{0BE476BB-FCF5-9067-99D4-19DBFB89E434}"/>
               </a:ext>
             </a:extLst>
           </p:cNvPr>
@@ -4242,7 +8346,7 @@
           <a:bodyPr/>
           <a:lstStyle/>
           <a:p>
-            <a:fld id="{E6B2637C-FD9A-44A8-9DCF-999336935D67}" type="datetimeFigureOut">
+            <a:fld id="{58C5DA8D-58CC-49A0-9908-23330BA06404}" type="datetimeFigureOut">
               <a:rPr lang="zh-CN" altLang="en-US" smtClean="0"/>
               <a:t>2026/10/14</a:t>
             </a:fld>
@@ -4255,7 +8359,7 @@
           <p:cNvPr id="6" name="页脚占位符 5">
             <a:extLst>
               <a:ext uri="{FF2B5EF4-FFF2-40B4-BE49-F238E27FC236}">
-                <a16:creationId xmlns:a16="http://schemas.microsoft.com/office/drawing/2014/main" id="{3DD253CA-D5F3-46A6-B745-2AEB2F920E1F}"/>
+                <a16:creationId xmlns:a16="http://schemas.microsoft.com/office/drawing/2014/main" id="{A3509E69-98DC-BB25-BD8D-E5AD82ACF4BD}"/>
               </a:ext>
             </a:extLst>
           </p:cNvPr>
@@ -4280,7 +8384,7 @@
           <p:cNvPr id="7" name="灯片编号占位符 6">
             <a:extLst>
               <a:ext uri="{FF2B5EF4-FFF2-40B4-BE49-F238E27FC236}">
-                <a16:creationId xmlns:a16="http://schemas.microsoft.com/office/drawing/2014/main" id="{BD2CE89C-68A2-B283-0C69-C44F62B7BF35}"/>
+                <a16:creationId xmlns:a16="http://schemas.microsoft.com/office/drawing/2014/main" id="{D3616BDE-B8EB-56A7-E1B0-A0702E288D81}"/>
               </a:ext>
             </a:extLst>
           </p:cNvPr>
@@ -4296,7 +8400,7 @@
           <a:bodyPr/>
           <a:lstStyle/>
           <a:p>
-            <a:fld id="{95F3B61A-DB7F-49DF-86D5-DB7BEACE9328}" type="slidenum">
+            <a:fld id="{2C717C2F-95E2-4CA1-A6B9-3702D161CAA1}" type="slidenum">
               <a:rPr lang="zh-CN" altLang="en-US" smtClean="0"/>
               <a:t>‹#›</a:t>
             </a:fld>
@@ -4307,7 +8411,7 @@
     </p:spTree>
     <p:extLst>
       <p:ext uri="{BB962C8B-B14F-4D97-AF65-F5344CB8AC3E}">
-        <p14:creationId xmlns:p14="http://schemas.microsoft.com/office/powerpoint/2010/main" val="121061005"/>
+        <p14:creationId xmlns:p14="http://schemas.microsoft.com/office/powerpoint/2010/main" val="293937304"/>
       </p:ext>
     </p:extLst>
   </p:cSld>
@@ -4339,7 +8443,7 @@
           <p:cNvPr id="2" name="标题 1">
             <a:extLst>
               <a:ext uri="{FF2B5EF4-FFF2-40B4-BE49-F238E27FC236}">
-                <a16:creationId xmlns:a16="http://schemas.microsoft.com/office/drawing/2014/main" id="{FABF0CF0-9026-0660-7783-12ED429FF011}"/>
+                <a16:creationId xmlns:a16="http://schemas.microsoft.com/office/drawing/2014/main" id="{385F9547-9A68-49AB-55FD-4AE66816E353}"/>
               </a:ext>
             </a:extLst>
           </p:cNvPr>
@@ -4376,7 +8480,7 @@
           <p:cNvPr id="3" name="图片占位符 2">
             <a:extLst>
               <a:ext uri="{FF2B5EF4-FFF2-40B4-BE49-F238E27FC236}">
-                <a16:creationId xmlns:a16="http://schemas.microsoft.com/office/drawing/2014/main" id="{08ABD498-942C-0A9A-EC61-30DFEB03C818}"/>
+                <a16:creationId xmlns:a16="http://schemas.microsoft.com/office/drawing/2014/main" id="{832B3933-B2F2-DEDB-D478-780D597C651F}"/>
               </a:ext>
             </a:extLst>
           </p:cNvPr>
@@ -4443,7 +8547,7 @@
           <p:cNvPr id="4" name="文本占位符 3">
             <a:extLst>
               <a:ext uri="{FF2B5EF4-FFF2-40B4-BE49-F238E27FC236}">
-                <a16:creationId xmlns:a16="http://schemas.microsoft.com/office/drawing/2014/main" id="{329C3B72-D7AF-3890-37AF-BFE45018A3BB}"/>
+                <a16:creationId xmlns:a16="http://schemas.microsoft.com/office/drawing/2014/main" id="{7AB22629-ED83-52E5-232D-130E55A1D3FD}"/>
               </a:ext>
             </a:extLst>
           </p:cNvPr>
@@ -4514,7 +8618,7 @@
           <p:cNvPr id="5" name="日期占位符 4">
             <a:extLst>
               <a:ext uri="{FF2B5EF4-FFF2-40B4-BE49-F238E27FC236}">
-                <a16:creationId xmlns:a16="http://schemas.microsoft.com/office/drawing/2014/main" id="{70A3889D-5032-92E4-35ED-4A415A8C5A35}"/>
+                <a16:creationId xmlns:a16="http://schemas.microsoft.com/office/drawing/2014/main" id="{EAD68BCF-C395-B1AE-422F-103E44BD4211}"/>
               </a:ext>
             </a:extLst>
           </p:cNvPr>
@@ -4530,7 +8634,7 @@
           <a:bodyPr/>
           <a:lstStyle/>
           <a:p>
-            <a:fld id="{E6B2637C-FD9A-44A8-9DCF-999336935D67}" type="datetimeFigureOut">
+            <a:fld id="{58C5DA8D-58CC-49A0-9908-23330BA06404}" type="datetimeFigureOut">
               <a:rPr lang="zh-CN" altLang="en-US" smtClean="0"/>
               <a:t>2026/10/14</a:t>
             </a:fld>
@@ -4543,7 +8647,7 @@
           <p:cNvPr id="6" name="页脚占位符 5">
             <a:extLst>
               <a:ext uri="{FF2B5EF4-FFF2-40B4-BE49-F238E27FC236}">
-                <a16:creationId xmlns:a16="http://schemas.microsoft.com/office/drawing/2014/main" id="{6A324525-D012-02C3-4244-262CBD2EFB68}"/>
+                <a16:creationId xmlns:a16="http://schemas.microsoft.com/office/drawing/2014/main" id="{9DD21C80-FC49-9F88-A204-481D943CE54B}"/>
               </a:ext>
             </a:extLst>
           </p:cNvPr>
@@ -4568,7 +8672,7 @@
           <p:cNvPr id="7" name="灯片编号占位符 6">
             <a:extLst>
               <a:ext uri="{FF2B5EF4-FFF2-40B4-BE49-F238E27FC236}">
-                <a16:creationId xmlns:a16="http://schemas.microsoft.com/office/drawing/2014/main" id="{FBC9DBE0-CB48-3319-7847-8425049D32AA}"/>
+                <a16:creationId xmlns:a16="http://schemas.microsoft.com/office/drawing/2014/main" id="{20389F25-C282-6BA3-8A3A-C6DBE3E28A07}"/>
               </a:ext>
             </a:extLst>
           </p:cNvPr>
@@ -4584,7 +8688,7 @@
           <a:bodyPr/>
           <a:lstStyle/>
           <a:p>
-            <a:fld id="{95F3B61A-DB7F-49DF-86D5-DB7BEACE9328}" type="slidenum">
+            <a:fld id="{2C717C2F-95E2-4CA1-A6B9-3702D161CAA1}" type="slidenum">
               <a:rPr lang="zh-CN" altLang="en-US" smtClean="0"/>
               <a:t>‹#›</a:t>
             </a:fld>
@@ -4595,7 +8699,7 @@
     </p:spTree>
     <p:extLst>
       <p:ext uri="{BB962C8B-B14F-4D97-AF65-F5344CB8AC3E}">
-        <p14:creationId xmlns:p14="http://schemas.microsoft.com/office/powerpoint/2010/main" val="4230814049"/>
+        <p14:creationId xmlns:p14="http://schemas.microsoft.com/office/powerpoint/2010/main" val="1229448515"/>
       </p:ext>
     </p:extLst>
   </p:cSld>
@@ -4632,7 +8736,7 @@
           <p:cNvPr id="2" name="标题占位符 1">
             <a:extLst>
               <a:ext uri="{FF2B5EF4-FFF2-40B4-BE49-F238E27FC236}">
-                <a16:creationId xmlns:a16="http://schemas.microsoft.com/office/drawing/2014/main" id="{299C1A7D-17B7-3772-C585-196E28821088}"/>
+                <a16:creationId xmlns:a16="http://schemas.microsoft.com/office/drawing/2014/main" id="{D9B91BA9-E817-445A-2814-392A522DCA55}"/>
               </a:ext>
             </a:extLst>
           </p:cNvPr>
@@ -4670,7 +8774,7 @@
           <p:cNvPr id="3" name="文本占位符 2">
             <a:extLst>
               <a:ext uri="{FF2B5EF4-FFF2-40B4-BE49-F238E27FC236}">
-                <a16:creationId xmlns:a16="http://schemas.microsoft.com/office/drawing/2014/main" id="{5F0FDC66-D1B5-BF81-7EE2-68BBD470D2DA}"/>
+                <a16:creationId xmlns:a16="http://schemas.microsoft.com/office/drawing/2014/main" id="{0BFA7647-6C4D-D76F-1A71-DCB22E149173}"/>
               </a:ext>
             </a:extLst>
           </p:cNvPr>
@@ -4737,7 +8841,7 @@
           <p:cNvPr id="4" name="日期占位符 3">
             <a:extLst>
               <a:ext uri="{FF2B5EF4-FFF2-40B4-BE49-F238E27FC236}">
-                <a16:creationId xmlns:a16="http://schemas.microsoft.com/office/drawing/2014/main" id="{4B38140F-9948-4668-69A2-EFA83C46DE4D}"/>
+                <a16:creationId xmlns:a16="http://schemas.microsoft.com/office/drawing/2014/main" id="{A888A08E-A907-44B6-E0F9-1DE347CD6D3D}"/>
               </a:ext>
             </a:extLst>
           </p:cNvPr>
@@ -4771,7 +8875,7 @@
             </a:lvl1pPr>
           </a:lstStyle>
           <a:p>
-            <a:fld id="{E6B2637C-FD9A-44A8-9DCF-999336935D67}" type="datetimeFigureOut">
+            <a:fld id="{58C5DA8D-58CC-49A0-9908-23330BA06404}" type="datetimeFigureOut">
               <a:rPr lang="zh-CN" altLang="en-US" smtClean="0"/>
               <a:t>2026/10/14</a:t>
             </a:fld>
@@ -4784,7 +8888,7 @@
           <p:cNvPr id="5" name="页脚占位符 4">
             <a:extLst>
               <a:ext uri="{FF2B5EF4-FFF2-40B4-BE49-F238E27FC236}">
-                <a16:creationId xmlns:a16="http://schemas.microsoft.com/office/drawing/2014/main" id="{3869C217-7AEC-4F93-FB5F-5DB5E09375EB}"/>
+                <a16:creationId xmlns:a16="http://schemas.microsoft.com/office/drawing/2014/main" id="{489143D3-2C36-248F-564E-9B5007DEC627}"/>
               </a:ext>
             </a:extLst>
           </p:cNvPr>
@@ -4827,7 +8931,7 @@
           <p:cNvPr id="6" name="灯片编号占位符 5">
             <a:extLst>
               <a:ext uri="{FF2B5EF4-FFF2-40B4-BE49-F238E27FC236}">
-                <a16:creationId xmlns:a16="http://schemas.microsoft.com/office/drawing/2014/main" id="{71D8A1B4-032B-AC4D-01EC-214A127499F7}"/>
+                <a16:creationId xmlns:a16="http://schemas.microsoft.com/office/drawing/2014/main" id="{92932425-148A-0133-464E-FEB3812115FE}"/>
               </a:ext>
             </a:extLst>
           </p:cNvPr>
@@ -4861,7 +8965,7 @@
             </a:lvl1pPr>
           </a:lstStyle>
           <a:p>
-            <a:fld id="{95F3B61A-DB7F-49DF-86D5-DB7BEACE9328}" type="slidenum">
+            <a:fld id="{2C717C2F-95E2-4CA1-A6B9-3702D161CAA1}" type="slidenum">
               <a:rPr lang="zh-CN" altLang="en-US" smtClean="0"/>
               <a:t>‹#›</a:t>
             </a:fld>
@@ -4872,7 +8976,7 @@
     </p:spTree>
     <p:extLst>
       <p:ext uri="{BB962C8B-B14F-4D97-AF65-F5344CB8AC3E}">
-        <p14:creationId xmlns:p14="http://schemas.microsoft.com/office/powerpoint/2010/main" val="981896823"/>
+        <p14:creationId xmlns:p14="http://schemas.microsoft.com/office/powerpoint/2010/main" val="2855405888"/>
       </p:ext>
     </p:extLst>
   </p:cSld>
@@ -5195,7 +9299,7 @@
           <p:cNvPr id="2" name="图表 1">
             <a:extLst>
               <a:ext uri="{FF2B5EF4-FFF2-40B4-BE49-F238E27FC236}">
-                <a16:creationId xmlns:a16="http://schemas.microsoft.com/office/drawing/2014/main" id="{7AAE7135-C1E5-2995-F3AE-48365C6968D2}"/>
+                <a16:creationId xmlns:a16="http://schemas.microsoft.com/office/drawing/2014/main" id="{A227CCE1-0BE7-B431-8337-32C0D8A0290A}"/>
               </a:ext>
             </a:extLst>
           </p:cNvPr>
@@ -5203,7 +9307,7 @@
           <p:nvPr>
             <p:extLst>
               <p:ext uri="{D42A27DB-BD31-4B8C-83A1-F6EECF244321}">
-                <p14:modId xmlns:p14="http://schemas.microsoft.com/office/powerpoint/2010/main" val="2442114328"/>
+                <p14:modId xmlns:p14="http://schemas.microsoft.com/office/powerpoint/2010/main" val="3553849934"/>
               </p:ext>
             </p:extLst>
           </p:nvPr>
@@ -5223,7 +9327,7 @@
           <p:cNvPr id="3" name="图表 2">
             <a:extLst>
               <a:ext uri="{FF2B5EF4-FFF2-40B4-BE49-F238E27FC236}">
-                <a16:creationId xmlns:a16="http://schemas.microsoft.com/office/drawing/2014/main" id="{E0AC24A0-490C-67BF-6D63-0962D9568F5E}"/>
+                <a16:creationId xmlns:a16="http://schemas.microsoft.com/office/drawing/2014/main" id="{709E93CF-D38D-6D96-A581-1ECA2683019C}"/>
               </a:ext>
             </a:extLst>
           </p:cNvPr>
@@ -5231,7 +9335,7 @@
           <p:nvPr>
             <p:extLst>
               <p:ext uri="{D42A27DB-BD31-4B8C-83A1-F6EECF244321}">
-                <p14:modId xmlns:p14="http://schemas.microsoft.com/office/powerpoint/2010/main" val="921148181"/>
+                <p14:modId xmlns:p14="http://schemas.microsoft.com/office/powerpoint/2010/main" val="2923249641"/>
               </p:ext>
             </p:extLst>
           </p:nvPr>
@@ -5249,7 +9353,179 @@
     </p:spTree>
     <p:extLst>
       <p:ext uri="{BB962C8B-B14F-4D97-AF65-F5344CB8AC3E}">
-        <p14:creationId xmlns:p14="http://schemas.microsoft.com/office/powerpoint/2010/main" val="3720038560"/>
+        <p14:creationId xmlns:p14="http://schemas.microsoft.com/office/powerpoint/2010/main" val="1552403143"/>
+      </p:ext>
+    </p:extLst>
+  </p:cSld>
+  <p:clrMapOvr>
+    <a:masterClrMapping/>
+  </p:clrMapOvr>
+</p:sld>
+</file>
+
+<file path=ppt/slides/slide2.xml><?xml version="1.0" encoding="utf-8"?>
+<p:sld xmlns:a="http://schemas.openxmlformats.org/drawingml/2006/main" xmlns:r="http://schemas.openxmlformats.org/officeDocument/2006/relationships" xmlns:p="http://schemas.openxmlformats.org/presentationml/2006/main">
+  <p:cSld>
+    <p:spTree>
+      <p:nvGrpSpPr>
+        <p:cNvPr id="1" name=""/>
+        <p:cNvGrpSpPr/>
+        <p:nvPr/>
+      </p:nvGrpSpPr>
+      <p:grpSpPr>
+        <a:xfrm>
+          <a:off x="0" y="0"/>
+          <a:ext cx="0" cy="0"/>
+          <a:chOff x="0" y="0"/>
+          <a:chExt cx="0" cy="0"/>
+        </a:xfrm>
+      </p:grpSpPr>
+      <p:graphicFrame>
+        <p:nvGraphicFramePr>
+          <p:cNvPr id="2" name="图表 1">
+            <a:extLst>
+              <a:ext uri="{FF2B5EF4-FFF2-40B4-BE49-F238E27FC236}">
+                <a16:creationId xmlns:a16="http://schemas.microsoft.com/office/drawing/2014/main" id="{7DAF5C20-56DF-EFA8-1BEB-EA98A6EB7011}"/>
+              </a:ext>
+            </a:extLst>
+          </p:cNvPr>
+          <p:cNvGraphicFramePr/>
+          <p:nvPr>
+            <p:extLst>
+              <p:ext uri="{D42A27DB-BD31-4B8C-83A1-F6EECF244321}">
+                <p14:modId xmlns:p14="http://schemas.microsoft.com/office/powerpoint/2010/main" val="101819569"/>
+              </p:ext>
+            </p:extLst>
+          </p:nvPr>
+        </p:nvGraphicFramePr>
+        <p:xfrm>
+          <a:off x="254000" y="508000"/>
+          <a:ext cx="5715000" cy="5588000"/>
+        </p:xfrm>
+        <a:graphic>
+          <a:graphicData uri="http://schemas.openxmlformats.org/drawingml/2006/chart">
+            <c:chart xmlns:c="http://schemas.openxmlformats.org/drawingml/2006/chart" xmlns:r="http://schemas.openxmlformats.org/officeDocument/2006/relationships" r:id="rId2"/>
+          </a:graphicData>
+        </a:graphic>
+      </p:graphicFrame>
+      <p:graphicFrame>
+        <p:nvGraphicFramePr>
+          <p:cNvPr id="3" name="图表 2">
+            <a:extLst>
+              <a:ext uri="{FF2B5EF4-FFF2-40B4-BE49-F238E27FC236}">
+                <a16:creationId xmlns:a16="http://schemas.microsoft.com/office/drawing/2014/main" id="{70E9E7F6-9A98-D40D-2283-FAE675AF16DA}"/>
+              </a:ext>
+            </a:extLst>
+          </p:cNvPr>
+          <p:cNvGraphicFramePr/>
+          <p:nvPr>
+            <p:extLst>
+              <p:ext uri="{D42A27DB-BD31-4B8C-83A1-F6EECF244321}">
+                <p14:modId xmlns:p14="http://schemas.microsoft.com/office/powerpoint/2010/main" val="2358288475"/>
+              </p:ext>
+            </p:extLst>
+          </p:nvPr>
+        </p:nvGraphicFramePr>
+        <p:xfrm>
+          <a:off x="6223000" y="508000"/>
+          <a:ext cx="5715000" cy="5588000"/>
+        </p:xfrm>
+        <a:graphic>
+          <a:graphicData uri="http://schemas.openxmlformats.org/drawingml/2006/chart">
+            <c:chart xmlns:c="http://schemas.openxmlformats.org/drawingml/2006/chart" xmlns:r="http://schemas.openxmlformats.org/officeDocument/2006/relationships" r:id="rId3"/>
+          </a:graphicData>
+        </a:graphic>
+      </p:graphicFrame>
+    </p:spTree>
+    <p:extLst>
+      <p:ext uri="{BB962C8B-B14F-4D97-AF65-F5344CB8AC3E}">
+        <p14:creationId xmlns:p14="http://schemas.microsoft.com/office/powerpoint/2010/main" val="2506983233"/>
+      </p:ext>
+    </p:extLst>
+  </p:cSld>
+  <p:clrMapOvr>
+    <a:masterClrMapping/>
+  </p:clrMapOvr>
+</p:sld>
+</file>
+
+<file path=ppt/slides/slide3.xml><?xml version="1.0" encoding="utf-8"?>
+<p:sld xmlns:a="http://schemas.openxmlformats.org/drawingml/2006/main" xmlns:r="http://schemas.openxmlformats.org/officeDocument/2006/relationships" xmlns:p="http://schemas.openxmlformats.org/presentationml/2006/main">
+  <p:cSld>
+    <p:spTree>
+      <p:nvGrpSpPr>
+        <p:cNvPr id="1" name=""/>
+        <p:cNvGrpSpPr/>
+        <p:nvPr/>
+      </p:nvGrpSpPr>
+      <p:grpSpPr>
+        <a:xfrm>
+          <a:off x="0" y="0"/>
+          <a:ext cx="0" cy="0"/>
+          <a:chOff x="0" y="0"/>
+          <a:chExt cx="0" cy="0"/>
+        </a:xfrm>
+      </p:grpSpPr>
+      <p:graphicFrame>
+        <p:nvGraphicFramePr>
+          <p:cNvPr id="2" name="图表 1">
+            <a:extLst>
+              <a:ext uri="{FF2B5EF4-FFF2-40B4-BE49-F238E27FC236}">
+                <a16:creationId xmlns:a16="http://schemas.microsoft.com/office/drawing/2014/main" id="{83496741-E122-FC62-3B4B-B2FFEA33EAEB}"/>
+              </a:ext>
+            </a:extLst>
+          </p:cNvPr>
+          <p:cNvGraphicFramePr/>
+          <p:nvPr>
+            <p:extLst>
+              <p:ext uri="{D42A27DB-BD31-4B8C-83A1-F6EECF244321}">
+                <p14:modId xmlns:p14="http://schemas.microsoft.com/office/powerpoint/2010/main" val="2731382449"/>
+              </p:ext>
+            </p:extLst>
+          </p:nvPr>
+        </p:nvGraphicFramePr>
+        <p:xfrm>
+          <a:off x="254000" y="508000"/>
+          <a:ext cx="5715000" cy="5588000"/>
+        </p:xfrm>
+        <a:graphic>
+          <a:graphicData uri="http://schemas.openxmlformats.org/drawingml/2006/chart">
+            <c:chart xmlns:c="http://schemas.openxmlformats.org/drawingml/2006/chart" xmlns:r="http://schemas.openxmlformats.org/officeDocument/2006/relationships" r:id="rId2"/>
+          </a:graphicData>
+        </a:graphic>
+      </p:graphicFrame>
+      <p:graphicFrame>
+        <p:nvGraphicFramePr>
+          <p:cNvPr id="3" name="图表 2">
+            <a:extLst>
+              <a:ext uri="{FF2B5EF4-FFF2-40B4-BE49-F238E27FC236}">
+                <a16:creationId xmlns:a16="http://schemas.microsoft.com/office/drawing/2014/main" id="{650F34EF-AEE8-73D6-F315-B55779E3E429}"/>
+              </a:ext>
+            </a:extLst>
+          </p:cNvPr>
+          <p:cNvGraphicFramePr/>
+          <p:nvPr>
+            <p:extLst>
+              <p:ext uri="{D42A27DB-BD31-4B8C-83A1-F6EECF244321}">
+                <p14:modId xmlns:p14="http://schemas.microsoft.com/office/powerpoint/2010/main" val="517342959"/>
+              </p:ext>
+            </p:extLst>
+          </p:nvPr>
+        </p:nvGraphicFramePr>
+        <p:xfrm>
+          <a:off x="6223000" y="508000"/>
+          <a:ext cx="5715000" cy="5588000"/>
+        </p:xfrm>
+        <a:graphic>
+          <a:graphicData uri="http://schemas.openxmlformats.org/drawingml/2006/chart">
+            <c:chart xmlns:c="http://schemas.openxmlformats.org/drawingml/2006/chart" xmlns:r="http://schemas.openxmlformats.org/officeDocument/2006/relationships" r:id="rId3"/>
+          </a:graphicData>
+        </a:graphic>
+      </p:graphicFrame>
+    </p:spTree>
+    <p:extLst>
+      <p:ext uri="{BB962C8B-B14F-4D97-AF65-F5344CB8AC3E}">
+        <p14:creationId xmlns:p14="http://schemas.microsoft.com/office/powerpoint/2010/main" val="4259180017"/>
       </p:ext>
     </p:extLst>
   </p:cSld>
